--- a/12.class_and_objects/OOP_Part4.pptx
+++ b/12.class_and_objects/OOP_Part4.pptx
@@ -76,20 +76,35 @@
             <a:noAutofit/>
           </a:bodyPr>
           <a:p>
-            <a:r>
-              <a:rPr b="0" lang="en-IN" sz="1800" spc="-1" strike="noStrike">
-                <a:solidFill>
-                  <a:srgbClr val="000000"/>
-                </a:solidFill>
-                <a:latin typeface="Calibri"/>
-              </a:rPr>
-              <a:t>Click to move the slide</a:t>
-            </a:r>
-            <a:endParaRPr b="0" lang="en-IN" sz="1800" spc="-1" strike="noStrike">
-              <a:solidFill>
-                <a:srgbClr val="000000"/>
-              </a:solidFill>
-              <a:latin typeface="Calibri"/>
+            <a:pPr algn="ctr">
+              <a:buNone/>
+            </a:pPr>
+            <a:r>
+              <a:rPr b="0" lang="en-IN" sz="4400" spc="-1" strike="noStrike">
+                <a:latin typeface="Arial"/>
+              </a:rPr>
+              <a:t>Click to </a:t>
+            </a:r>
+            <a:r>
+              <a:rPr b="0" lang="en-IN" sz="4400" spc="-1" strike="noStrike">
+                <a:latin typeface="Arial"/>
+              </a:rPr>
+              <a:t>move </a:t>
+            </a:r>
+            <a:r>
+              <a:rPr b="0" lang="en-IN" sz="4400" spc="-1" strike="noStrike">
+                <a:latin typeface="Arial"/>
+              </a:rPr>
+              <a:t>the </a:t>
+            </a:r>
+            <a:r>
+              <a:rPr b="0" lang="en-IN" sz="4400" spc="-1" strike="noStrike">
+                <a:latin typeface="Arial"/>
+              </a:rPr>
+              <a:t>slide</a:t>
+            </a:r>
+            <a:endParaRPr b="0" lang="en-IN" sz="4400" spc="-1" strike="noStrike">
+              <a:latin typeface="Arial"/>
             </a:endParaRPr>
           </a:p>
         </p:txBody>
@@ -126,7 +141,73 @@
               <a:rPr b="0" lang="en-IN" sz="2000" spc="-1" strike="noStrike">
                 <a:latin typeface="Arial"/>
               </a:rPr>
-              <a:t>Click to edit the notes format</a:t>
+              <a:t>Click </a:t>
+            </a:r>
+            <a:r>
+              <a:rPr b="0" lang="en-IN" sz="2000" spc="-1" strike="noStrike">
+                <a:latin typeface="Arial"/>
+              </a:rPr>
+              <a:t>to </a:t>
+            </a:r>
+            <a:r>
+              <a:rPr b="0" lang="en-IN" sz="2000" spc="-1" strike="noStrike">
+                <a:latin typeface="Arial"/>
+              </a:rPr>
+              <a:t>edi</a:t>
+            </a:r>
+            <a:r>
+              <a:rPr b="0" lang="en-IN" sz="2000" spc="-1" strike="noStrike">
+                <a:latin typeface="Arial"/>
+              </a:rPr>
+              <a:t>t </a:t>
+            </a:r>
+            <a:r>
+              <a:rPr b="0" lang="en-IN" sz="2000" spc="-1" strike="noStrike">
+                <a:latin typeface="Arial"/>
+              </a:rPr>
+              <a:t>th</a:t>
+            </a:r>
+            <a:r>
+              <a:rPr b="0" lang="en-IN" sz="2000" spc="-1" strike="noStrike">
+                <a:latin typeface="Arial"/>
+              </a:rPr>
+              <a:t>e </a:t>
+            </a:r>
+            <a:r>
+              <a:rPr b="0" lang="en-IN" sz="2000" spc="-1" strike="noStrike">
+                <a:latin typeface="Arial"/>
+              </a:rPr>
+              <a:t>no</a:t>
+            </a:r>
+            <a:r>
+              <a:rPr b="0" lang="en-IN" sz="2000" spc="-1" strike="noStrike">
+                <a:latin typeface="Arial"/>
+              </a:rPr>
+              <a:t>te</a:t>
+            </a:r>
+            <a:r>
+              <a:rPr b="0" lang="en-IN" sz="2000" spc="-1" strike="noStrike">
+                <a:latin typeface="Arial"/>
+              </a:rPr>
+              <a:t>s </a:t>
+            </a:r>
+            <a:r>
+              <a:rPr b="0" lang="en-IN" sz="2000" spc="-1" strike="noStrike">
+                <a:latin typeface="Arial"/>
+              </a:rPr>
+              <a:t>for</a:t>
+            </a:r>
+            <a:r>
+              <a:rPr b="0" lang="en-IN" sz="2000" spc="-1" strike="noStrike">
+                <a:latin typeface="Arial"/>
+              </a:rPr>
+              <a:t>m</a:t>
+            </a:r>
+            <a:r>
+              <a:rPr b="0" lang="en-IN" sz="2000" spc="-1" strike="noStrike">
+                <a:latin typeface="Arial"/>
+              </a:rPr>
+              <a:t>at</a:t>
             </a:r>
             <a:endParaRPr b="0" lang="en-IN" sz="2000" spc="-1" strike="noStrike">
               <a:latin typeface="Arial"/>
@@ -311,7 +392,7 @@
             <a:pPr algn="r">
               <a:buNone/>
             </a:pPr>
-            <a:fld id="{393338CE-8E44-4C59-B025-1ADA5A9E0585}" type="slidenum">
+            <a:fld id="{E2BE9DC6-FC8A-4167-8FED-D9B69C742FAF}" type="slidenum">
               <a:rPr b="0" lang="en-IN" sz="1400" spc="-1" strike="noStrike">
                 <a:latin typeface="Times New Roman"/>
               </a:rPr>
@@ -348,7 +429,7 @@
       </p:grpSpPr>
       <p:sp>
         <p:nvSpPr>
-          <p:cNvPr id="570" name="PlaceHolder 1"/>
+          <p:cNvPr id="562" name="PlaceHolder 1"/>
           <p:cNvSpPr>
             <a:spLocks noGrp="1"/>
           </p:cNvSpPr>
@@ -359,19 +440,19 @@
         <p:spPr>
           <a:xfrm>
             <a:off x="685800" y="1143000"/>
-            <a:ext cx="5486040" cy="3085920"/>
-          </a:xfrm>
-          <a:prstGeom prst="rect">
-            <a:avLst/>
-          </a:prstGeom>
-          <a:ln w="0">
-            <a:noFill/>
-          </a:ln>
-        </p:spPr>
-      </p:sp>
-      <p:sp>
-        <p:nvSpPr>
-          <p:cNvPr id="571" name="PlaceHolder 2"/>
+            <a:ext cx="5485320" cy="3085200"/>
+          </a:xfrm>
+          <a:prstGeom prst="rect">
+            <a:avLst/>
+          </a:prstGeom>
+          <a:ln w="0">
+            <a:noFill/>
+          </a:ln>
+        </p:spPr>
+      </p:sp>
+      <p:sp>
+        <p:nvSpPr>
+          <p:cNvPr id="563" name="PlaceHolder 2"/>
           <p:cNvSpPr>
             <a:spLocks noGrp="1"/>
           </p:cNvSpPr>
@@ -382,18 +463,18 @@
         <p:spPr>
           <a:xfrm>
             <a:off x="685800" y="4400640"/>
-            <a:ext cx="5486040" cy="3600000"/>
-          </a:xfrm>
-          <a:prstGeom prst="rect">
-            <a:avLst/>
-          </a:prstGeom>
-          <a:noFill/>
-          <a:ln w="0">
-            <a:noFill/>
-          </a:ln>
-        </p:spPr>
-        <p:txBody>
-          <a:bodyPr anchor="t">
+            <a:ext cx="5485320" cy="3599280"/>
+          </a:xfrm>
+          <a:prstGeom prst="rect">
+            <a:avLst/>
+          </a:prstGeom>
+          <a:noFill/>
+          <a:ln w="0">
+            <a:noFill/>
+          </a:ln>
+        </p:spPr>
+        <p:txBody>
+          <a:bodyPr lIns="0" rIns="0" tIns="0" bIns="0" anchor="t">
             <a:noAutofit/>
           </a:bodyPr>
           <a:p>
@@ -405,7 +486,7 @@
       </p:sp>
       <p:sp>
         <p:nvSpPr>
-          <p:cNvPr id="572" name="PlaceHolder 3"/>
+          <p:cNvPr id="564" name="PlaceHolder 3"/>
           <p:cNvSpPr>
             <a:spLocks noGrp="1"/>
           </p:cNvSpPr>
@@ -416,18 +497,18 @@
         <p:spPr>
           <a:xfrm>
             <a:off x="3884760" y="8685360"/>
-            <a:ext cx="2971440" cy="458280"/>
-          </a:xfrm>
-          <a:prstGeom prst="rect">
-            <a:avLst/>
-          </a:prstGeom>
-          <a:noFill/>
-          <a:ln w="0">
-            <a:noFill/>
-          </a:ln>
-        </p:spPr>
-        <p:txBody>
-          <a:bodyPr anchor="b">
+            <a:ext cx="2970720" cy="457560"/>
+          </a:xfrm>
+          <a:prstGeom prst="rect">
+            <a:avLst/>
+          </a:prstGeom>
+          <a:noFill/>
+          <a:ln w="0">
+            <a:noFill/>
+          </a:ln>
+        </p:spPr>
+        <p:txBody>
+          <a:bodyPr lIns="0" rIns="0" tIns="0" bIns="0" anchor="b">
             <a:noAutofit/>
           </a:bodyPr>
           <a:lstStyle>
@@ -452,7 +533,7 @@
               </a:lnSpc>
               <a:buNone/>
             </a:pPr>
-            <a:fld id="{9A6135D3-6F02-4F11-8AFD-0668E5D0A1A5}" type="slidenum">
+            <a:fld id="{CF886EAE-AA90-4355-9642-0836E6F21329}" type="slidenum">
               <a:rPr b="0" lang="en-US" sz="1200" spc="-1" strike="noStrike">
                 <a:solidFill>
                   <a:srgbClr val="000000"/>
@@ -492,7 +573,7 @@
       </p:grpSpPr>
       <p:sp>
         <p:nvSpPr>
-          <p:cNvPr id="597" name="PlaceHolder 1"/>
+          <p:cNvPr id="589" name="PlaceHolder 1"/>
           <p:cNvSpPr>
             <a:spLocks noGrp="1"/>
           </p:cNvSpPr>
@@ -503,19 +584,19 @@
         <p:spPr>
           <a:xfrm>
             <a:off x="685800" y="1143000"/>
-            <a:ext cx="5486040" cy="3085920"/>
-          </a:xfrm>
-          <a:prstGeom prst="rect">
-            <a:avLst/>
-          </a:prstGeom>
-          <a:ln w="0">
-            <a:noFill/>
-          </a:ln>
-        </p:spPr>
-      </p:sp>
-      <p:sp>
-        <p:nvSpPr>
-          <p:cNvPr id="598" name="PlaceHolder 2"/>
+            <a:ext cx="5485320" cy="3085200"/>
+          </a:xfrm>
+          <a:prstGeom prst="rect">
+            <a:avLst/>
+          </a:prstGeom>
+          <a:ln w="0">
+            <a:noFill/>
+          </a:ln>
+        </p:spPr>
+      </p:sp>
+      <p:sp>
+        <p:nvSpPr>
+          <p:cNvPr id="590" name="PlaceHolder 2"/>
           <p:cNvSpPr>
             <a:spLocks noGrp="1"/>
           </p:cNvSpPr>
@@ -526,18 +607,18 @@
         <p:spPr>
           <a:xfrm>
             <a:off x="685800" y="4400640"/>
-            <a:ext cx="5486040" cy="3600000"/>
-          </a:xfrm>
-          <a:prstGeom prst="rect">
-            <a:avLst/>
-          </a:prstGeom>
-          <a:noFill/>
-          <a:ln w="0">
-            <a:noFill/>
-          </a:ln>
-        </p:spPr>
-        <p:txBody>
-          <a:bodyPr anchor="t">
+            <a:ext cx="5485320" cy="3599280"/>
+          </a:xfrm>
+          <a:prstGeom prst="rect">
+            <a:avLst/>
+          </a:prstGeom>
+          <a:noFill/>
+          <a:ln w="0">
+            <a:noFill/>
+          </a:ln>
+        </p:spPr>
+        <p:txBody>
+          <a:bodyPr lIns="0" rIns="0" tIns="0" bIns="0" anchor="t">
             <a:noAutofit/>
           </a:bodyPr>
           <a:p>
@@ -549,7 +630,7 @@
       </p:sp>
       <p:sp>
         <p:nvSpPr>
-          <p:cNvPr id="599" name="PlaceHolder 3"/>
+          <p:cNvPr id="591" name="PlaceHolder 3"/>
           <p:cNvSpPr>
             <a:spLocks noGrp="1"/>
           </p:cNvSpPr>
@@ -560,18 +641,18 @@
         <p:spPr>
           <a:xfrm>
             <a:off x="3884760" y="8685360"/>
-            <a:ext cx="2971440" cy="458280"/>
-          </a:xfrm>
-          <a:prstGeom prst="rect">
-            <a:avLst/>
-          </a:prstGeom>
-          <a:noFill/>
-          <a:ln w="0">
-            <a:noFill/>
-          </a:ln>
-        </p:spPr>
-        <p:txBody>
-          <a:bodyPr anchor="b">
+            <a:ext cx="2970720" cy="457560"/>
+          </a:xfrm>
+          <a:prstGeom prst="rect">
+            <a:avLst/>
+          </a:prstGeom>
+          <a:noFill/>
+          <a:ln w="0">
+            <a:noFill/>
+          </a:ln>
+        </p:spPr>
+        <p:txBody>
+          <a:bodyPr lIns="0" rIns="0" tIns="0" bIns="0" anchor="b">
             <a:noAutofit/>
           </a:bodyPr>
           <a:lstStyle>
@@ -596,7 +677,7 @@
               </a:lnSpc>
               <a:buNone/>
             </a:pPr>
-            <a:fld id="{1ACDF7B8-AD92-4953-8C7C-CD813F4830F4}" type="slidenum">
+            <a:fld id="{54E583D7-82BE-40FE-B04A-57D5D2302ABB}" type="slidenum">
               <a:rPr b="0" lang="en-US" sz="1200" spc="-1" strike="noStrike">
                 <a:solidFill>
                   <a:srgbClr val="000000"/>
@@ -636,7 +717,7 @@
       </p:grpSpPr>
       <p:sp>
         <p:nvSpPr>
-          <p:cNvPr id="600" name="PlaceHolder 1"/>
+          <p:cNvPr id="592" name="PlaceHolder 1"/>
           <p:cNvSpPr>
             <a:spLocks noGrp="1"/>
           </p:cNvSpPr>
@@ -647,19 +728,19 @@
         <p:spPr>
           <a:xfrm>
             <a:off x="685800" y="1143000"/>
-            <a:ext cx="5486040" cy="3085920"/>
-          </a:xfrm>
-          <a:prstGeom prst="rect">
-            <a:avLst/>
-          </a:prstGeom>
-          <a:ln w="0">
-            <a:noFill/>
-          </a:ln>
-        </p:spPr>
-      </p:sp>
-      <p:sp>
-        <p:nvSpPr>
-          <p:cNvPr id="601" name="PlaceHolder 2"/>
+            <a:ext cx="5485320" cy="3085200"/>
+          </a:xfrm>
+          <a:prstGeom prst="rect">
+            <a:avLst/>
+          </a:prstGeom>
+          <a:ln w="0">
+            <a:noFill/>
+          </a:ln>
+        </p:spPr>
+      </p:sp>
+      <p:sp>
+        <p:nvSpPr>
+          <p:cNvPr id="593" name="PlaceHolder 2"/>
           <p:cNvSpPr>
             <a:spLocks noGrp="1"/>
           </p:cNvSpPr>
@@ -670,18 +751,18 @@
         <p:spPr>
           <a:xfrm>
             <a:off x="685800" y="4400640"/>
-            <a:ext cx="5486040" cy="3600000"/>
-          </a:xfrm>
-          <a:prstGeom prst="rect">
-            <a:avLst/>
-          </a:prstGeom>
-          <a:noFill/>
-          <a:ln w="0">
-            <a:noFill/>
-          </a:ln>
-        </p:spPr>
-        <p:txBody>
-          <a:bodyPr anchor="t">
+            <a:ext cx="5485320" cy="3599280"/>
+          </a:xfrm>
+          <a:prstGeom prst="rect">
+            <a:avLst/>
+          </a:prstGeom>
+          <a:noFill/>
+          <a:ln w="0">
+            <a:noFill/>
+          </a:ln>
+        </p:spPr>
+        <p:txBody>
+          <a:bodyPr lIns="0" rIns="0" tIns="0" bIns="0" anchor="t">
             <a:noAutofit/>
           </a:bodyPr>
           <a:p>
@@ -693,7 +774,7 @@
       </p:sp>
       <p:sp>
         <p:nvSpPr>
-          <p:cNvPr id="602" name="PlaceHolder 3"/>
+          <p:cNvPr id="594" name="PlaceHolder 3"/>
           <p:cNvSpPr>
             <a:spLocks noGrp="1"/>
           </p:cNvSpPr>
@@ -704,18 +785,18 @@
         <p:spPr>
           <a:xfrm>
             <a:off x="3884760" y="8685360"/>
-            <a:ext cx="2971440" cy="458280"/>
-          </a:xfrm>
-          <a:prstGeom prst="rect">
-            <a:avLst/>
-          </a:prstGeom>
-          <a:noFill/>
-          <a:ln w="0">
-            <a:noFill/>
-          </a:ln>
-        </p:spPr>
-        <p:txBody>
-          <a:bodyPr anchor="b">
+            <a:ext cx="2970720" cy="457560"/>
+          </a:xfrm>
+          <a:prstGeom prst="rect">
+            <a:avLst/>
+          </a:prstGeom>
+          <a:noFill/>
+          <a:ln w="0">
+            <a:noFill/>
+          </a:ln>
+        </p:spPr>
+        <p:txBody>
+          <a:bodyPr lIns="0" rIns="0" tIns="0" bIns="0" anchor="b">
             <a:noAutofit/>
           </a:bodyPr>
           <a:lstStyle>
@@ -740,7 +821,7 @@
               </a:lnSpc>
               <a:buNone/>
             </a:pPr>
-            <a:fld id="{8E440AF2-C401-4CB8-9336-CBA95C7EB764}" type="slidenum">
+            <a:fld id="{BF34231D-774E-4E4E-91F4-1C50306EFA7E}" type="slidenum">
               <a:rPr b="0" lang="en-US" sz="1200" spc="-1" strike="noStrike">
                 <a:solidFill>
                   <a:srgbClr val="000000"/>
@@ -780,7 +861,7 @@
       </p:grpSpPr>
       <p:sp>
         <p:nvSpPr>
-          <p:cNvPr id="603" name="PlaceHolder 1"/>
+          <p:cNvPr id="595" name="PlaceHolder 1"/>
           <p:cNvSpPr>
             <a:spLocks noGrp="1"/>
           </p:cNvSpPr>
@@ -791,19 +872,19 @@
         <p:spPr>
           <a:xfrm>
             <a:off x="685800" y="1143000"/>
-            <a:ext cx="5486040" cy="3085920"/>
-          </a:xfrm>
-          <a:prstGeom prst="rect">
-            <a:avLst/>
-          </a:prstGeom>
-          <a:ln w="0">
-            <a:noFill/>
-          </a:ln>
-        </p:spPr>
-      </p:sp>
-      <p:sp>
-        <p:nvSpPr>
-          <p:cNvPr id="604" name="PlaceHolder 2"/>
+            <a:ext cx="5485320" cy="3085200"/>
+          </a:xfrm>
+          <a:prstGeom prst="rect">
+            <a:avLst/>
+          </a:prstGeom>
+          <a:ln w="0">
+            <a:noFill/>
+          </a:ln>
+        </p:spPr>
+      </p:sp>
+      <p:sp>
+        <p:nvSpPr>
+          <p:cNvPr id="596" name="PlaceHolder 2"/>
           <p:cNvSpPr>
             <a:spLocks noGrp="1"/>
           </p:cNvSpPr>
@@ -814,18 +895,18 @@
         <p:spPr>
           <a:xfrm>
             <a:off x="685800" y="4400640"/>
-            <a:ext cx="5486040" cy="3600000"/>
-          </a:xfrm>
-          <a:prstGeom prst="rect">
-            <a:avLst/>
-          </a:prstGeom>
-          <a:noFill/>
-          <a:ln w="0">
-            <a:noFill/>
-          </a:ln>
-        </p:spPr>
-        <p:txBody>
-          <a:bodyPr anchor="t">
+            <a:ext cx="5485320" cy="3599280"/>
+          </a:xfrm>
+          <a:prstGeom prst="rect">
+            <a:avLst/>
+          </a:prstGeom>
+          <a:noFill/>
+          <a:ln w="0">
+            <a:noFill/>
+          </a:ln>
+        </p:spPr>
+        <p:txBody>
+          <a:bodyPr lIns="0" rIns="0" tIns="0" bIns="0" anchor="t">
             <a:noAutofit/>
           </a:bodyPr>
           <a:p>
@@ -837,7 +918,7 @@
       </p:sp>
       <p:sp>
         <p:nvSpPr>
-          <p:cNvPr id="605" name="PlaceHolder 3"/>
+          <p:cNvPr id="597" name="PlaceHolder 3"/>
           <p:cNvSpPr>
             <a:spLocks noGrp="1"/>
           </p:cNvSpPr>
@@ -848,18 +929,18 @@
         <p:spPr>
           <a:xfrm>
             <a:off x="3884760" y="8685360"/>
-            <a:ext cx="2971440" cy="458280"/>
-          </a:xfrm>
-          <a:prstGeom prst="rect">
-            <a:avLst/>
-          </a:prstGeom>
-          <a:noFill/>
-          <a:ln w="0">
-            <a:noFill/>
-          </a:ln>
-        </p:spPr>
-        <p:txBody>
-          <a:bodyPr anchor="b">
+            <a:ext cx="2970720" cy="457560"/>
+          </a:xfrm>
+          <a:prstGeom prst="rect">
+            <a:avLst/>
+          </a:prstGeom>
+          <a:noFill/>
+          <a:ln w="0">
+            <a:noFill/>
+          </a:ln>
+        </p:spPr>
+        <p:txBody>
+          <a:bodyPr lIns="0" rIns="0" tIns="0" bIns="0" anchor="b">
             <a:noAutofit/>
           </a:bodyPr>
           <a:lstStyle>
@@ -884,7 +965,7 @@
               </a:lnSpc>
               <a:buNone/>
             </a:pPr>
-            <a:fld id="{40CC6CC7-A384-48A2-B800-2FAA4AEE2AFB}" type="slidenum">
+            <a:fld id="{13641539-2526-41B1-BFEC-431CC99B768F}" type="slidenum">
               <a:rPr b="0" lang="en-US" sz="1200" spc="-1" strike="noStrike">
                 <a:solidFill>
                   <a:srgbClr val="000000"/>
@@ -924,7 +1005,7 @@
       </p:grpSpPr>
       <p:sp>
         <p:nvSpPr>
-          <p:cNvPr id="606" name="PlaceHolder 1"/>
+          <p:cNvPr id="598" name="PlaceHolder 1"/>
           <p:cNvSpPr>
             <a:spLocks noGrp="1"/>
           </p:cNvSpPr>
@@ -935,19 +1016,19 @@
         <p:spPr>
           <a:xfrm>
             <a:off x="685800" y="1143000"/>
-            <a:ext cx="5486040" cy="3085920"/>
-          </a:xfrm>
-          <a:prstGeom prst="rect">
-            <a:avLst/>
-          </a:prstGeom>
-          <a:ln w="0">
-            <a:noFill/>
-          </a:ln>
-        </p:spPr>
-      </p:sp>
-      <p:sp>
-        <p:nvSpPr>
-          <p:cNvPr id="607" name="PlaceHolder 2"/>
+            <a:ext cx="5485320" cy="3085200"/>
+          </a:xfrm>
+          <a:prstGeom prst="rect">
+            <a:avLst/>
+          </a:prstGeom>
+          <a:ln w="0">
+            <a:noFill/>
+          </a:ln>
+        </p:spPr>
+      </p:sp>
+      <p:sp>
+        <p:nvSpPr>
+          <p:cNvPr id="599" name="PlaceHolder 2"/>
           <p:cNvSpPr>
             <a:spLocks noGrp="1"/>
           </p:cNvSpPr>
@@ -958,18 +1039,18 @@
         <p:spPr>
           <a:xfrm>
             <a:off x="685800" y="4400640"/>
-            <a:ext cx="5486040" cy="3600000"/>
-          </a:xfrm>
-          <a:prstGeom prst="rect">
-            <a:avLst/>
-          </a:prstGeom>
-          <a:noFill/>
-          <a:ln w="0">
-            <a:noFill/>
-          </a:ln>
-        </p:spPr>
-        <p:txBody>
-          <a:bodyPr anchor="t">
+            <a:ext cx="5485320" cy="3599280"/>
+          </a:xfrm>
+          <a:prstGeom prst="rect">
+            <a:avLst/>
+          </a:prstGeom>
+          <a:noFill/>
+          <a:ln w="0">
+            <a:noFill/>
+          </a:ln>
+        </p:spPr>
+        <p:txBody>
+          <a:bodyPr lIns="0" rIns="0" tIns="0" bIns="0" anchor="t">
             <a:noAutofit/>
           </a:bodyPr>
           <a:p>
@@ -981,7 +1062,7 @@
       </p:sp>
       <p:sp>
         <p:nvSpPr>
-          <p:cNvPr id="608" name="PlaceHolder 3"/>
+          <p:cNvPr id="600" name="PlaceHolder 3"/>
           <p:cNvSpPr>
             <a:spLocks noGrp="1"/>
           </p:cNvSpPr>
@@ -992,18 +1073,18 @@
         <p:spPr>
           <a:xfrm>
             <a:off x="3884760" y="8685360"/>
-            <a:ext cx="2971440" cy="458280"/>
-          </a:xfrm>
-          <a:prstGeom prst="rect">
-            <a:avLst/>
-          </a:prstGeom>
-          <a:noFill/>
-          <a:ln w="0">
-            <a:noFill/>
-          </a:ln>
-        </p:spPr>
-        <p:txBody>
-          <a:bodyPr anchor="b">
+            <a:ext cx="2970720" cy="457560"/>
+          </a:xfrm>
+          <a:prstGeom prst="rect">
+            <a:avLst/>
+          </a:prstGeom>
+          <a:noFill/>
+          <a:ln w="0">
+            <a:noFill/>
+          </a:ln>
+        </p:spPr>
+        <p:txBody>
+          <a:bodyPr lIns="0" rIns="0" tIns="0" bIns="0" anchor="b">
             <a:noAutofit/>
           </a:bodyPr>
           <a:lstStyle>
@@ -1028,7 +1109,7 @@
               </a:lnSpc>
               <a:buNone/>
             </a:pPr>
-            <a:fld id="{17722C69-1AB5-4520-AD75-4D8D12CF7FCE}" type="slidenum">
+            <a:fld id="{CAFDAAF3-0AB8-47EA-BE82-DF6D6A836B82}" type="slidenum">
               <a:rPr b="0" lang="en-US" sz="1200" spc="-1" strike="noStrike">
                 <a:solidFill>
                   <a:srgbClr val="000000"/>
@@ -1068,7 +1149,7 @@
       </p:grpSpPr>
       <p:sp>
         <p:nvSpPr>
-          <p:cNvPr id="609" name="PlaceHolder 1"/>
+          <p:cNvPr id="601" name="PlaceHolder 1"/>
           <p:cNvSpPr>
             <a:spLocks noGrp="1"/>
           </p:cNvSpPr>
@@ -1079,19 +1160,19 @@
         <p:spPr>
           <a:xfrm>
             <a:off x="685800" y="1143000"/>
-            <a:ext cx="5486040" cy="3085920"/>
-          </a:xfrm>
-          <a:prstGeom prst="rect">
-            <a:avLst/>
-          </a:prstGeom>
-          <a:ln w="0">
-            <a:noFill/>
-          </a:ln>
-        </p:spPr>
-      </p:sp>
-      <p:sp>
-        <p:nvSpPr>
-          <p:cNvPr id="610" name="PlaceHolder 2"/>
+            <a:ext cx="5485320" cy="3085200"/>
+          </a:xfrm>
+          <a:prstGeom prst="rect">
+            <a:avLst/>
+          </a:prstGeom>
+          <a:ln w="0">
+            <a:noFill/>
+          </a:ln>
+        </p:spPr>
+      </p:sp>
+      <p:sp>
+        <p:nvSpPr>
+          <p:cNvPr id="602" name="PlaceHolder 2"/>
           <p:cNvSpPr>
             <a:spLocks noGrp="1"/>
           </p:cNvSpPr>
@@ -1102,18 +1183,18 @@
         <p:spPr>
           <a:xfrm>
             <a:off x="685800" y="4400640"/>
-            <a:ext cx="5486040" cy="3600000"/>
-          </a:xfrm>
-          <a:prstGeom prst="rect">
-            <a:avLst/>
-          </a:prstGeom>
-          <a:noFill/>
-          <a:ln w="0">
-            <a:noFill/>
-          </a:ln>
-        </p:spPr>
-        <p:txBody>
-          <a:bodyPr anchor="t">
+            <a:ext cx="5485320" cy="3599280"/>
+          </a:xfrm>
+          <a:prstGeom prst="rect">
+            <a:avLst/>
+          </a:prstGeom>
+          <a:noFill/>
+          <a:ln w="0">
+            <a:noFill/>
+          </a:ln>
+        </p:spPr>
+        <p:txBody>
+          <a:bodyPr lIns="0" rIns="0" tIns="0" bIns="0" anchor="t">
             <a:noAutofit/>
           </a:bodyPr>
           <a:p>
@@ -1125,7 +1206,7 @@
       </p:sp>
       <p:sp>
         <p:nvSpPr>
-          <p:cNvPr id="611" name="PlaceHolder 3"/>
+          <p:cNvPr id="603" name="PlaceHolder 3"/>
           <p:cNvSpPr>
             <a:spLocks noGrp="1"/>
           </p:cNvSpPr>
@@ -1136,18 +1217,18 @@
         <p:spPr>
           <a:xfrm>
             <a:off x="3884760" y="8685360"/>
-            <a:ext cx="2971440" cy="458280"/>
-          </a:xfrm>
-          <a:prstGeom prst="rect">
-            <a:avLst/>
-          </a:prstGeom>
-          <a:noFill/>
-          <a:ln w="0">
-            <a:noFill/>
-          </a:ln>
-        </p:spPr>
-        <p:txBody>
-          <a:bodyPr anchor="b">
+            <a:ext cx="2970720" cy="457560"/>
+          </a:xfrm>
+          <a:prstGeom prst="rect">
+            <a:avLst/>
+          </a:prstGeom>
+          <a:noFill/>
+          <a:ln w="0">
+            <a:noFill/>
+          </a:ln>
+        </p:spPr>
+        <p:txBody>
+          <a:bodyPr lIns="0" rIns="0" tIns="0" bIns="0" anchor="b">
             <a:noAutofit/>
           </a:bodyPr>
           <a:lstStyle>
@@ -1172,7 +1253,7 @@
               </a:lnSpc>
               <a:buNone/>
             </a:pPr>
-            <a:fld id="{8EA60D48-3830-4078-BE30-17496A7DA338}" type="slidenum">
+            <a:fld id="{4EB5A293-BA7D-4541-B00C-3974C4887ED7}" type="slidenum">
               <a:rPr b="0" lang="en-US" sz="1200" spc="-1" strike="noStrike">
                 <a:solidFill>
                   <a:srgbClr val="000000"/>
@@ -1212,7 +1293,7 @@
       </p:grpSpPr>
       <p:sp>
         <p:nvSpPr>
-          <p:cNvPr id="612" name="PlaceHolder 1"/>
+          <p:cNvPr id="604" name="PlaceHolder 1"/>
           <p:cNvSpPr>
             <a:spLocks noGrp="1"/>
           </p:cNvSpPr>
@@ -1223,19 +1304,19 @@
         <p:spPr>
           <a:xfrm>
             <a:off x="685800" y="1143000"/>
-            <a:ext cx="5486040" cy="3085920"/>
-          </a:xfrm>
-          <a:prstGeom prst="rect">
-            <a:avLst/>
-          </a:prstGeom>
-          <a:ln w="0">
-            <a:noFill/>
-          </a:ln>
-        </p:spPr>
-      </p:sp>
-      <p:sp>
-        <p:nvSpPr>
-          <p:cNvPr id="613" name="PlaceHolder 2"/>
+            <a:ext cx="5485320" cy="3085200"/>
+          </a:xfrm>
+          <a:prstGeom prst="rect">
+            <a:avLst/>
+          </a:prstGeom>
+          <a:ln w="0">
+            <a:noFill/>
+          </a:ln>
+        </p:spPr>
+      </p:sp>
+      <p:sp>
+        <p:nvSpPr>
+          <p:cNvPr id="605" name="PlaceHolder 2"/>
           <p:cNvSpPr>
             <a:spLocks noGrp="1"/>
           </p:cNvSpPr>
@@ -1246,18 +1327,18 @@
         <p:spPr>
           <a:xfrm>
             <a:off x="685800" y="4400640"/>
-            <a:ext cx="5486040" cy="3600000"/>
-          </a:xfrm>
-          <a:prstGeom prst="rect">
-            <a:avLst/>
-          </a:prstGeom>
-          <a:noFill/>
-          <a:ln w="0">
-            <a:noFill/>
-          </a:ln>
-        </p:spPr>
-        <p:txBody>
-          <a:bodyPr anchor="t">
+            <a:ext cx="5485320" cy="3599280"/>
+          </a:xfrm>
+          <a:prstGeom prst="rect">
+            <a:avLst/>
+          </a:prstGeom>
+          <a:noFill/>
+          <a:ln w="0">
+            <a:noFill/>
+          </a:ln>
+        </p:spPr>
+        <p:txBody>
+          <a:bodyPr lIns="0" rIns="0" tIns="0" bIns="0" anchor="t">
             <a:noAutofit/>
           </a:bodyPr>
           <a:p>
@@ -1269,7 +1350,7 @@
       </p:sp>
       <p:sp>
         <p:nvSpPr>
-          <p:cNvPr id="614" name="PlaceHolder 3"/>
+          <p:cNvPr id="606" name="PlaceHolder 3"/>
           <p:cNvSpPr>
             <a:spLocks noGrp="1"/>
           </p:cNvSpPr>
@@ -1280,18 +1361,18 @@
         <p:spPr>
           <a:xfrm>
             <a:off x="3884760" y="8685360"/>
-            <a:ext cx="2971440" cy="458280"/>
-          </a:xfrm>
-          <a:prstGeom prst="rect">
-            <a:avLst/>
-          </a:prstGeom>
-          <a:noFill/>
-          <a:ln w="0">
-            <a:noFill/>
-          </a:ln>
-        </p:spPr>
-        <p:txBody>
-          <a:bodyPr anchor="b">
+            <a:ext cx="2970720" cy="457560"/>
+          </a:xfrm>
+          <a:prstGeom prst="rect">
+            <a:avLst/>
+          </a:prstGeom>
+          <a:noFill/>
+          <a:ln w="0">
+            <a:noFill/>
+          </a:ln>
+        </p:spPr>
+        <p:txBody>
+          <a:bodyPr lIns="0" rIns="0" tIns="0" bIns="0" anchor="b">
             <a:noAutofit/>
           </a:bodyPr>
           <a:lstStyle>
@@ -1316,7 +1397,7 @@
               </a:lnSpc>
               <a:buNone/>
             </a:pPr>
-            <a:fld id="{7EE33126-31E5-4BE8-B221-07681A9ECC51}" type="slidenum">
+            <a:fld id="{1AD49C24-4D7C-4EE7-806F-EB3167256C3D}" type="slidenum">
               <a:rPr b="0" lang="en-US" sz="1200" spc="-1" strike="noStrike">
                 <a:solidFill>
                   <a:srgbClr val="000000"/>
@@ -1356,7 +1437,7 @@
       </p:grpSpPr>
       <p:sp>
         <p:nvSpPr>
-          <p:cNvPr id="615" name="PlaceHolder 1"/>
+          <p:cNvPr id="607" name="PlaceHolder 1"/>
           <p:cNvSpPr>
             <a:spLocks noGrp="1"/>
           </p:cNvSpPr>
@@ -1367,19 +1448,19 @@
         <p:spPr>
           <a:xfrm>
             <a:off x="685800" y="1143000"/>
-            <a:ext cx="5486040" cy="3085920"/>
-          </a:xfrm>
-          <a:prstGeom prst="rect">
-            <a:avLst/>
-          </a:prstGeom>
-          <a:ln w="0">
-            <a:noFill/>
-          </a:ln>
-        </p:spPr>
-      </p:sp>
-      <p:sp>
-        <p:nvSpPr>
-          <p:cNvPr id="616" name="PlaceHolder 2"/>
+            <a:ext cx="5485320" cy="3085200"/>
+          </a:xfrm>
+          <a:prstGeom prst="rect">
+            <a:avLst/>
+          </a:prstGeom>
+          <a:ln w="0">
+            <a:noFill/>
+          </a:ln>
+        </p:spPr>
+      </p:sp>
+      <p:sp>
+        <p:nvSpPr>
+          <p:cNvPr id="608" name="PlaceHolder 2"/>
           <p:cNvSpPr>
             <a:spLocks noGrp="1"/>
           </p:cNvSpPr>
@@ -1390,18 +1471,18 @@
         <p:spPr>
           <a:xfrm>
             <a:off x="685800" y="4400640"/>
-            <a:ext cx="5486040" cy="3600000"/>
-          </a:xfrm>
-          <a:prstGeom prst="rect">
-            <a:avLst/>
-          </a:prstGeom>
-          <a:noFill/>
-          <a:ln w="0">
-            <a:noFill/>
-          </a:ln>
-        </p:spPr>
-        <p:txBody>
-          <a:bodyPr anchor="t">
+            <a:ext cx="5485320" cy="3599280"/>
+          </a:xfrm>
+          <a:prstGeom prst="rect">
+            <a:avLst/>
+          </a:prstGeom>
+          <a:noFill/>
+          <a:ln w="0">
+            <a:noFill/>
+          </a:ln>
+        </p:spPr>
+        <p:txBody>
+          <a:bodyPr lIns="0" rIns="0" tIns="0" bIns="0" anchor="t">
             <a:noAutofit/>
           </a:bodyPr>
           <a:p>
@@ -1413,7 +1494,7 @@
       </p:sp>
       <p:sp>
         <p:nvSpPr>
-          <p:cNvPr id="617" name="PlaceHolder 3"/>
+          <p:cNvPr id="609" name="PlaceHolder 3"/>
           <p:cNvSpPr>
             <a:spLocks noGrp="1"/>
           </p:cNvSpPr>
@@ -1424,18 +1505,18 @@
         <p:spPr>
           <a:xfrm>
             <a:off x="3884760" y="8685360"/>
-            <a:ext cx="2971440" cy="458280"/>
-          </a:xfrm>
-          <a:prstGeom prst="rect">
-            <a:avLst/>
-          </a:prstGeom>
-          <a:noFill/>
-          <a:ln w="0">
-            <a:noFill/>
-          </a:ln>
-        </p:spPr>
-        <p:txBody>
-          <a:bodyPr anchor="b">
+            <a:ext cx="2970720" cy="457560"/>
+          </a:xfrm>
+          <a:prstGeom prst="rect">
+            <a:avLst/>
+          </a:prstGeom>
+          <a:noFill/>
+          <a:ln w="0">
+            <a:noFill/>
+          </a:ln>
+        </p:spPr>
+        <p:txBody>
+          <a:bodyPr lIns="0" rIns="0" tIns="0" bIns="0" anchor="b">
             <a:noAutofit/>
           </a:bodyPr>
           <a:lstStyle>
@@ -1460,7 +1541,7 @@
               </a:lnSpc>
               <a:buNone/>
             </a:pPr>
-            <a:fld id="{1D100DDF-4FBD-493D-87FE-3FAC10A53F86}" type="slidenum">
+            <a:fld id="{3035F572-CC37-45B5-8A4F-E470321708B8}" type="slidenum">
               <a:rPr b="0" lang="en-US" sz="1200" spc="-1" strike="noStrike">
                 <a:solidFill>
                   <a:srgbClr val="000000"/>
@@ -1500,7 +1581,7 @@
       </p:grpSpPr>
       <p:sp>
         <p:nvSpPr>
-          <p:cNvPr id="618" name="PlaceHolder 1"/>
+          <p:cNvPr id="610" name="PlaceHolder 1"/>
           <p:cNvSpPr>
             <a:spLocks noGrp="1"/>
           </p:cNvSpPr>
@@ -1511,19 +1592,19 @@
         <p:spPr>
           <a:xfrm>
             <a:off x="685800" y="1143000"/>
-            <a:ext cx="5486040" cy="3085920"/>
-          </a:xfrm>
-          <a:prstGeom prst="rect">
-            <a:avLst/>
-          </a:prstGeom>
-          <a:ln w="0">
-            <a:noFill/>
-          </a:ln>
-        </p:spPr>
-      </p:sp>
-      <p:sp>
-        <p:nvSpPr>
-          <p:cNvPr id="619" name="PlaceHolder 2"/>
+            <a:ext cx="5485320" cy="3085200"/>
+          </a:xfrm>
+          <a:prstGeom prst="rect">
+            <a:avLst/>
+          </a:prstGeom>
+          <a:ln w="0">
+            <a:noFill/>
+          </a:ln>
+        </p:spPr>
+      </p:sp>
+      <p:sp>
+        <p:nvSpPr>
+          <p:cNvPr id="611" name="PlaceHolder 2"/>
           <p:cNvSpPr>
             <a:spLocks noGrp="1"/>
           </p:cNvSpPr>
@@ -1534,18 +1615,18 @@
         <p:spPr>
           <a:xfrm>
             <a:off x="685800" y="4400640"/>
-            <a:ext cx="5486040" cy="3600000"/>
-          </a:xfrm>
-          <a:prstGeom prst="rect">
-            <a:avLst/>
-          </a:prstGeom>
-          <a:noFill/>
-          <a:ln w="0">
-            <a:noFill/>
-          </a:ln>
-        </p:spPr>
-        <p:txBody>
-          <a:bodyPr anchor="t">
+            <a:ext cx="5485320" cy="3599280"/>
+          </a:xfrm>
+          <a:prstGeom prst="rect">
+            <a:avLst/>
+          </a:prstGeom>
+          <a:noFill/>
+          <a:ln w="0">
+            <a:noFill/>
+          </a:ln>
+        </p:spPr>
+        <p:txBody>
+          <a:bodyPr lIns="0" rIns="0" tIns="0" bIns="0" anchor="t">
             <a:noAutofit/>
           </a:bodyPr>
           <a:p>
@@ -1557,7 +1638,7 @@
       </p:sp>
       <p:sp>
         <p:nvSpPr>
-          <p:cNvPr id="620" name="PlaceHolder 3"/>
+          <p:cNvPr id="612" name="PlaceHolder 3"/>
           <p:cNvSpPr>
             <a:spLocks noGrp="1"/>
           </p:cNvSpPr>
@@ -1568,18 +1649,18 @@
         <p:spPr>
           <a:xfrm>
             <a:off x="3884760" y="8685360"/>
-            <a:ext cx="2971440" cy="458280"/>
-          </a:xfrm>
-          <a:prstGeom prst="rect">
-            <a:avLst/>
-          </a:prstGeom>
-          <a:noFill/>
-          <a:ln w="0">
-            <a:noFill/>
-          </a:ln>
-        </p:spPr>
-        <p:txBody>
-          <a:bodyPr anchor="b">
+            <a:ext cx="2970720" cy="457560"/>
+          </a:xfrm>
+          <a:prstGeom prst="rect">
+            <a:avLst/>
+          </a:prstGeom>
+          <a:noFill/>
+          <a:ln w="0">
+            <a:noFill/>
+          </a:ln>
+        </p:spPr>
+        <p:txBody>
+          <a:bodyPr lIns="0" rIns="0" tIns="0" bIns="0" anchor="b">
             <a:noAutofit/>
           </a:bodyPr>
           <a:lstStyle>
@@ -1604,7 +1685,7 @@
               </a:lnSpc>
               <a:buNone/>
             </a:pPr>
-            <a:fld id="{B62394AB-30A0-4CD9-B225-22F7EBC9E6EC}" type="slidenum">
+            <a:fld id="{1798ECAF-3A3F-4DF9-B485-B7EDB2CF8D5D}" type="slidenum">
               <a:rPr b="0" lang="en-US" sz="1200" spc="-1" strike="noStrike">
                 <a:solidFill>
                   <a:srgbClr val="000000"/>
@@ -1644,7 +1725,7 @@
       </p:grpSpPr>
       <p:sp>
         <p:nvSpPr>
-          <p:cNvPr id="573" name="PlaceHolder 1"/>
+          <p:cNvPr id="565" name="PlaceHolder 1"/>
           <p:cNvSpPr>
             <a:spLocks noGrp="1"/>
           </p:cNvSpPr>
@@ -1655,19 +1736,19 @@
         <p:spPr>
           <a:xfrm>
             <a:off x="685800" y="1143000"/>
-            <a:ext cx="5486040" cy="3085920"/>
-          </a:xfrm>
-          <a:prstGeom prst="rect">
-            <a:avLst/>
-          </a:prstGeom>
-          <a:ln w="0">
-            <a:noFill/>
-          </a:ln>
-        </p:spPr>
-      </p:sp>
-      <p:sp>
-        <p:nvSpPr>
-          <p:cNvPr id="574" name="PlaceHolder 2"/>
+            <a:ext cx="5485320" cy="3085200"/>
+          </a:xfrm>
+          <a:prstGeom prst="rect">
+            <a:avLst/>
+          </a:prstGeom>
+          <a:ln w="0">
+            <a:noFill/>
+          </a:ln>
+        </p:spPr>
+      </p:sp>
+      <p:sp>
+        <p:nvSpPr>
+          <p:cNvPr id="566" name="PlaceHolder 2"/>
           <p:cNvSpPr>
             <a:spLocks noGrp="1"/>
           </p:cNvSpPr>
@@ -1678,18 +1759,18 @@
         <p:spPr>
           <a:xfrm>
             <a:off x="685800" y="4400640"/>
-            <a:ext cx="5486040" cy="3600000"/>
-          </a:xfrm>
-          <a:prstGeom prst="rect">
-            <a:avLst/>
-          </a:prstGeom>
-          <a:noFill/>
-          <a:ln w="0">
-            <a:noFill/>
-          </a:ln>
-        </p:spPr>
-        <p:txBody>
-          <a:bodyPr anchor="t">
+            <a:ext cx="5485320" cy="3599280"/>
+          </a:xfrm>
+          <a:prstGeom prst="rect">
+            <a:avLst/>
+          </a:prstGeom>
+          <a:noFill/>
+          <a:ln w="0">
+            <a:noFill/>
+          </a:ln>
+        </p:spPr>
+        <p:txBody>
+          <a:bodyPr lIns="0" rIns="0" tIns="0" bIns="0" anchor="t">
             <a:noAutofit/>
           </a:bodyPr>
           <a:p>
@@ -1701,7 +1782,7 @@
       </p:sp>
       <p:sp>
         <p:nvSpPr>
-          <p:cNvPr id="575" name="PlaceHolder 3"/>
+          <p:cNvPr id="567" name="PlaceHolder 3"/>
           <p:cNvSpPr>
             <a:spLocks noGrp="1"/>
           </p:cNvSpPr>
@@ -1712,18 +1793,18 @@
         <p:spPr>
           <a:xfrm>
             <a:off x="3884760" y="8685360"/>
-            <a:ext cx="2971440" cy="458280"/>
-          </a:xfrm>
-          <a:prstGeom prst="rect">
-            <a:avLst/>
-          </a:prstGeom>
-          <a:noFill/>
-          <a:ln w="0">
-            <a:noFill/>
-          </a:ln>
-        </p:spPr>
-        <p:txBody>
-          <a:bodyPr anchor="b">
+            <a:ext cx="2970720" cy="457560"/>
+          </a:xfrm>
+          <a:prstGeom prst="rect">
+            <a:avLst/>
+          </a:prstGeom>
+          <a:noFill/>
+          <a:ln w="0">
+            <a:noFill/>
+          </a:ln>
+        </p:spPr>
+        <p:txBody>
+          <a:bodyPr lIns="0" rIns="0" tIns="0" bIns="0" anchor="b">
             <a:noAutofit/>
           </a:bodyPr>
           <a:lstStyle>
@@ -1748,7 +1829,7 @@
               </a:lnSpc>
               <a:buNone/>
             </a:pPr>
-            <a:fld id="{8CF66D4C-BDD1-46C3-94CF-79FDF85F3EC9}" type="slidenum">
+            <a:fld id="{8F6279E0-CA8D-4BF3-A856-A8E5111ECBCF}" type="slidenum">
               <a:rPr b="0" lang="en-US" sz="1200" spc="-1" strike="noStrike">
                 <a:solidFill>
                   <a:srgbClr val="000000"/>
@@ -1788,7 +1869,7 @@
       </p:grpSpPr>
       <p:sp>
         <p:nvSpPr>
-          <p:cNvPr id="576" name="PlaceHolder 1"/>
+          <p:cNvPr id="568" name="PlaceHolder 1"/>
           <p:cNvSpPr>
             <a:spLocks noGrp="1"/>
           </p:cNvSpPr>
@@ -1799,19 +1880,19 @@
         <p:spPr>
           <a:xfrm>
             <a:off x="685800" y="1143000"/>
-            <a:ext cx="5486040" cy="3085920"/>
-          </a:xfrm>
-          <a:prstGeom prst="rect">
-            <a:avLst/>
-          </a:prstGeom>
-          <a:ln w="0">
-            <a:noFill/>
-          </a:ln>
-        </p:spPr>
-      </p:sp>
-      <p:sp>
-        <p:nvSpPr>
-          <p:cNvPr id="577" name="PlaceHolder 2"/>
+            <a:ext cx="5485320" cy="3085200"/>
+          </a:xfrm>
+          <a:prstGeom prst="rect">
+            <a:avLst/>
+          </a:prstGeom>
+          <a:ln w="0">
+            <a:noFill/>
+          </a:ln>
+        </p:spPr>
+      </p:sp>
+      <p:sp>
+        <p:nvSpPr>
+          <p:cNvPr id="569" name="PlaceHolder 2"/>
           <p:cNvSpPr>
             <a:spLocks noGrp="1"/>
           </p:cNvSpPr>
@@ -1822,18 +1903,18 @@
         <p:spPr>
           <a:xfrm>
             <a:off x="685800" y="4400640"/>
-            <a:ext cx="5486040" cy="3600000"/>
-          </a:xfrm>
-          <a:prstGeom prst="rect">
-            <a:avLst/>
-          </a:prstGeom>
-          <a:noFill/>
-          <a:ln w="0">
-            <a:noFill/>
-          </a:ln>
-        </p:spPr>
-        <p:txBody>
-          <a:bodyPr anchor="t">
+            <a:ext cx="5485320" cy="3599280"/>
+          </a:xfrm>
+          <a:prstGeom prst="rect">
+            <a:avLst/>
+          </a:prstGeom>
+          <a:noFill/>
+          <a:ln w="0">
+            <a:noFill/>
+          </a:ln>
+        </p:spPr>
+        <p:txBody>
+          <a:bodyPr lIns="0" rIns="0" tIns="0" bIns="0" anchor="t">
             <a:noAutofit/>
           </a:bodyPr>
           <a:p>
@@ -1845,7 +1926,7 @@
       </p:sp>
       <p:sp>
         <p:nvSpPr>
-          <p:cNvPr id="578" name="PlaceHolder 3"/>
+          <p:cNvPr id="570" name="PlaceHolder 3"/>
           <p:cNvSpPr>
             <a:spLocks noGrp="1"/>
           </p:cNvSpPr>
@@ -1856,18 +1937,18 @@
         <p:spPr>
           <a:xfrm>
             <a:off x="3884760" y="8685360"/>
-            <a:ext cx="2971440" cy="458280"/>
-          </a:xfrm>
-          <a:prstGeom prst="rect">
-            <a:avLst/>
-          </a:prstGeom>
-          <a:noFill/>
-          <a:ln w="0">
-            <a:noFill/>
-          </a:ln>
-        </p:spPr>
-        <p:txBody>
-          <a:bodyPr anchor="b">
+            <a:ext cx="2970720" cy="457560"/>
+          </a:xfrm>
+          <a:prstGeom prst="rect">
+            <a:avLst/>
+          </a:prstGeom>
+          <a:noFill/>
+          <a:ln w="0">
+            <a:noFill/>
+          </a:ln>
+        </p:spPr>
+        <p:txBody>
+          <a:bodyPr lIns="0" rIns="0" tIns="0" bIns="0" anchor="b">
             <a:noAutofit/>
           </a:bodyPr>
           <a:lstStyle>
@@ -1892,7 +1973,7 @@
               </a:lnSpc>
               <a:buNone/>
             </a:pPr>
-            <a:fld id="{E44C8F52-7273-4E45-818C-A5DE839A30BC}" type="slidenum">
+            <a:fld id="{3A20E533-2D29-4DF2-AEF7-FEBA9F8ECDAD}" type="slidenum">
               <a:rPr b="0" lang="en-US" sz="1200" spc="-1" strike="noStrike">
                 <a:solidFill>
                   <a:srgbClr val="000000"/>
@@ -1932,7 +2013,7 @@
       </p:grpSpPr>
       <p:sp>
         <p:nvSpPr>
-          <p:cNvPr id="579" name="PlaceHolder 1"/>
+          <p:cNvPr id="571" name="PlaceHolder 1"/>
           <p:cNvSpPr>
             <a:spLocks noGrp="1"/>
           </p:cNvSpPr>
@@ -1943,19 +2024,19 @@
         <p:spPr>
           <a:xfrm>
             <a:off x="685800" y="1143000"/>
-            <a:ext cx="5486040" cy="3085920"/>
-          </a:xfrm>
-          <a:prstGeom prst="rect">
-            <a:avLst/>
-          </a:prstGeom>
-          <a:ln w="0">
-            <a:noFill/>
-          </a:ln>
-        </p:spPr>
-      </p:sp>
-      <p:sp>
-        <p:nvSpPr>
-          <p:cNvPr id="580" name="PlaceHolder 2"/>
+            <a:ext cx="5485320" cy="3085200"/>
+          </a:xfrm>
+          <a:prstGeom prst="rect">
+            <a:avLst/>
+          </a:prstGeom>
+          <a:ln w="0">
+            <a:noFill/>
+          </a:ln>
+        </p:spPr>
+      </p:sp>
+      <p:sp>
+        <p:nvSpPr>
+          <p:cNvPr id="572" name="PlaceHolder 2"/>
           <p:cNvSpPr>
             <a:spLocks noGrp="1"/>
           </p:cNvSpPr>
@@ -1966,18 +2047,18 @@
         <p:spPr>
           <a:xfrm>
             <a:off x="685800" y="4400640"/>
-            <a:ext cx="5486040" cy="3600000"/>
-          </a:xfrm>
-          <a:prstGeom prst="rect">
-            <a:avLst/>
-          </a:prstGeom>
-          <a:noFill/>
-          <a:ln w="0">
-            <a:noFill/>
-          </a:ln>
-        </p:spPr>
-        <p:txBody>
-          <a:bodyPr anchor="t">
+            <a:ext cx="5485320" cy="3599280"/>
+          </a:xfrm>
+          <a:prstGeom prst="rect">
+            <a:avLst/>
+          </a:prstGeom>
+          <a:noFill/>
+          <a:ln w="0">
+            <a:noFill/>
+          </a:ln>
+        </p:spPr>
+        <p:txBody>
+          <a:bodyPr lIns="0" rIns="0" tIns="0" bIns="0" anchor="t">
             <a:noAutofit/>
           </a:bodyPr>
           <a:p>
@@ -1989,7 +2070,7 @@
       </p:sp>
       <p:sp>
         <p:nvSpPr>
-          <p:cNvPr id="581" name="PlaceHolder 3"/>
+          <p:cNvPr id="573" name="PlaceHolder 3"/>
           <p:cNvSpPr>
             <a:spLocks noGrp="1"/>
           </p:cNvSpPr>
@@ -2000,18 +2081,18 @@
         <p:spPr>
           <a:xfrm>
             <a:off x="3884760" y="8685360"/>
-            <a:ext cx="2971440" cy="458280"/>
-          </a:xfrm>
-          <a:prstGeom prst="rect">
-            <a:avLst/>
-          </a:prstGeom>
-          <a:noFill/>
-          <a:ln w="0">
-            <a:noFill/>
-          </a:ln>
-        </p:spPr>
-        <p:txBody>
-          <a:bodyPr anchor="b">
+            <a:ext cx="2970720" cy="457560"/>
+          </a:xfrm>
+          <a:prstGeom prst="rect">
+            <a:avLst/>
+          </a:prstGeom>
+          <a:noFill/>
+          <a:ln w="0">
+            <a:noFill/>
+          </a:ln>
+        </p:spPr>
+        <p:txBody>
+          <a:bodyPr lIns="0" rIns="0" tIns="0" bIns="0" anchor="b">
             <a:noAutofit/>
           </a:bodyPr>
           <a:lstStyle>
@@ -2036,7 +2117,7 @@
               </a:lnSpc>
               <a:buNone/>
             </a:pPr>
-            <a:fld id="{3431980A-73FC-4311-9B91-BCF13983156C}" type="slidenum">
+            <a:fld id="{A102ECC9-5B8B-4A2D-82F2-92AA7850089F}" type="slidenum">
               <a:rPr b="0" lang="en-US" sz="1200" spc="-1" strike="noStrike">
                 <a:solidFill>
                   <a:srgbClr val="000000"/>
@@ -2076,7 +2157,7 @@
       </p:grpSpPr>
       <p:sp>
         <p:nvSpPr>
-          <p:cNvPr id="582" name="PlaceHolder 1"/>
+          <p:cNvPr id="574" name="PlaceHolder 1"/>
           <p:cNvSpPr>
             <a:spLocks noGrp="1"/>
           </p:cNvSpPr>
@@ -2087,19 +2168,19 @@
         <p:spPr>
           <a:xfrm>
             <a:off x="685800" y="1143000"/>
-            <a:ext cx="5486040" cy="3085920"/>
-          </a:xfrm>
-          <a:prstGeom prst="rect">
-            <a:avLst/>
-          </a:prstGeom>
-          <a:ln w="0">
-            <a:noFill/>
-          </a:ln>
-        </p:spPr>
-      </p:sp>
-      <p:sp>
-        <p:nvSpPr>
-          <p:cNvPr id="583" name="PlaceHolder 2"/>
+            <a:ext cx="5485320" cy="3085200"/>
+          </a:xfrm>
+          <a:prstGeom prst="rect">
+            <a:avLst/>
+          </a:prstGeom>
+          <a:ln w="0">
+            <a:noFill/>
+          </a:ln>
+        </p:spPr>
+      </p:sp>
+      <p:sp>
+        <p:nvSpPr>
+          <p:cNvPr id="575" name="PlaceHolder 2"/>
           <p:cNvSpPr>
             <a:spLocks noGrp="1"/>
           </p:cNvSpPr>
@@ -2110,18 +2191,18 @@
         <p:spPr>
           <a:xfrm>
             <a:off x="685800" y="4400640"/>
-            <a:ext cx="5486040" cy="3600000"/>
-          </a:xfrm>
-          <a:prstGeom prst="rect">
-            <a:avLst/>
-          </a:prstGeom>
-          <a:noFill/>
-          <a:ln w="0">
-            <a:noFill/>
-          </a:ln>
-        </p:spPr>
-        <p:txBody>
-          <a:bodyPr anchor="t">
+            <a:ext cx="5485320" cy="3599280"/>
+          </a:xfrm>
+          <a:prstGeom prst="rect">
+            <a:avLst/>
+          </a:prstGeom>
+          <a:noFill/>
+          <a:ln w="0">
+            <a:noFill/>
+          </a:ln>
+        </p:spPr>
+        <p:txBody>
+          <a:bodyPr lIns="0" rIns="0" tIns="0" bIns="0" anchor="t">
             <a:noAutofit/>
           </a:bodyPr>
           <a:p>
@@ -2133,7 +2214,7 @@
       </p:sp>
       <p:sp>
         <p:nvSpPr>
-          <p:cNvPr id="584" name="PlaceHolder 3"/>
+          <p:cNvPr id="576" name="PlaceHolder 3"/>
           <p:cNvSpPr>
             <a:spLocks noGrp="1"/>
           </p:cNvSpPr>
@@ -2144,18 +2225,18 @@
         <p:spPr>
           <a:xfrm>
             <a:off x="3884760" y="8685360"/>
-            <a:ext cx="2971440" cy="458280"/>
-          </a:xfrm>
-          <a:prstGeom prst="rect">
-            <a:avLst/>
-          </a:prstGeom>
-          <a:noFill/>
-          <a:ln w="0">
-            <a:noFill/>
-          </a:ln>
-        </p:spPr>
-        <p:txBody>
-          <a:bodyPr anchor="b">
+            <a:ext cx="2970720" cy="457560"/>
+          </a:xfrm>
+          <a:prstGeom prst="rect">
+            <a:avLst/>
+          </a:prstGeom>
+          <a:noFill/>
+          <a:ln w="0">
+            <a:noFill/>
+          </a:ln>
+        </p:spPr>
+        <p:txBody>
+          <a:bodyPr lIns="0" rIns="0" tIns="0" bIns="0" anchor="b">
             <a:noAutofit/>
           </a:bodyPr>
           <a:lstStyle>
@@ -2180,7 +2261,7 @@
               </a:lnSpc>
               <a:buNone/>
             </a:pPr>
-            <a:fld id="{8AFAEA09-9298-418F-A21D-4921CECCB565}" type="slidenum">
+            <a:fld id="{2A2E230B-E63A-4DEE-A2D9-2F7880076E98}" type="slidenum">
               <a:rPr b="0" lang="en-US" sz="1200" spc="-1" strike="noStrike">
                 <a:solidFill>
                   <a:srgbClr val="000000"/>
@@ -2220,7 +2301,7 @@
       </p:grpSpPr>
       <p:sp>
         <p:nvSpPr>
-          <p:cNvPr id="585" name="PlaceHolder 1"/>
+          <p:cNvPr id="577" name="PlaceHolder 1"/>
           <p:cNvSpPr>
             <a:spLocks noGrp="1"/>
           </p:cNvSpPr>
@@ -2231,19 +2312,19 @@
         <p:spPr>
           <a:xfrm>
             <a:off x="685800" y="1143000"/>
-            <a:ext cx="5486040" cy="3085920"/>
-          </a:xfrm>
-          <a:prstGeom prst="rect">
-            <a:avLst/>
-          </a:prstGeom>
-          <a:ln w="0">
-            <a:noFill/>
-          </a:ln>
-        </p:spPr>
-      </p:sp>
-      <p:sp>
-        <p:nvSpPr>
-          <p:cNvPr id="586" name="PlaceHolder 2"/>
+            <a:ext cx="5485320" cy="3085200"/>
+          </a:xfrm>
+          <a:prstGeom prst="rect">
+            <a:avLst/>
+          </a:prstGeom>
+          <a:ln w="0">
+            <a:noFill/>
+          </a:ln>
+        </p:spPr>
+      </p:sp>
+      <p:sp>
+        <p:nvSpPr>
+          <p:cNvPr id="578" name="PlaceHolder 2"/>
           <p:cNvSpPr>
             <a:spLocks noGrp="1"/>
           </p:cNvSpPr>
@@ -2254,18 +2335,18 @@
         <p:spPr>
           <a:xfrm>
             <a:off x="685800" y="4400640"/>
-            <a:ext cx="5486040" cy="3600000"/>
-          </a:xfrm>
-          <a:prstGeom prst="rect">
-            <a:avLst/>
-          </a:prstGeom>
-          <a:noFill/>
-          <a:ln w="0">
-            <a:noFill/>
-          </a:ln>
-        </p:spPr>
-        <p:txBody>
-          <a:bodyPr anchor="t">
+            <a:ext cx="5485320" cy="3599280"/>
+          </a:xfrm>
+          <a:prstGeom prst="rect">
+            <a:avLst/>
+          </a:prstGeom>
+          <a:noFill/>
+          <a:ln w="0">
+            <a:noFill/>
+          </a:ln>
+        </p:spPr>
+        <p:txBody>
+          <a:bodyPr lIns="0" rIns="0" tIns="0" bIns="0" anchor="t">
             <a:noAutofit/>
           </a:bodyPr>
           <a:p>
@@ -2277,7 +2358,7 @@
       </p:sp>
       <p:sp>
         <p:nvSpPr>
-          <p:cNvPr id="587" name="PlaceHolder 3"/>
+          <p:cNvPr id="579" name="PlaceHolder 3"/>
           <p:cNvSpPr>
             <a:spLocks noGrp="1"/>
           </p:cNvSpPr>
@@ -2288,18 +2369,18 @@
         <p:spPr>
           <a:xfrm>
             <a:off x="3884760" y="8685360"/>
-            <a:ext cx="2971440" cy="458280"/>
-          </a:xfrm>
-          <a:prstGeom prst="rect">
-            <a:avLst/>
-          </a:prstGeom>
-          <a:noFill/>
-          <a:ln w="0">
-            <a:noFill/>
-          </a:ln>
-        </p:spPr>
-        <p:txBody>
-          <a:bodyPr anchor="b">
+            <a:ext cx="2970720" cy="457560"/>
+          </a:xfrm>
+          <a:prstGeom prst="rect">
+            <a:avLst/>
+          </a:prstGeom>
+          <a:noFill/>
+          <a:ln w="0">
+            <a:noFill/>
+          </a:ln>
+        </p:spPr>
+        <p:txBody>
+          <a:bodyPr lIns="0" rIns="0" tIns="0" bIns="0" anchor="b">
             <a:noAutofit/>
           </a:bodyPr>
           <a:lstStyle>
@@ -2324,7 +2405,7 @@
               </a:lnSpc>
               <a:buNone/>
             </a:pPr>
-            <a:fld id="{23DC544A-281B-4E02-8EBE-95429CBC2C19}" type="slidenum">
+            <a:fld id="{7FB8E75D-4E42-4D0F-A1DF-705D124F9377}" type="slidenum">
               <a:rPr b="0" lang="en-US" sz="1200" spc="-1" strike="noStrike">
                 <a:solidFill>
                   <a:srgbClr val="000000"/>
@@ -2364,7 +2445,7 @@
       </p:grpSpPr>
       <p:sp>
         <p:nvSpPr>
-          <p:cNvPr id="588" name="PlaceHolder 1"/>
+          <p:cNvPr id="580" name="PlaceHolder 1"/>
           <p:cNvSpPr>
             <a:spLocks noGrp="1"/>
           </p:cNvSpPr>
@@ -2375,19 +2456,19 @@
         <p:spPr>
           <a:xfrm>
             <a:off x="685800" y="1143000"/>
-            <a:ext cx="5486040" cy="3085920"/>
-          </a:xfrm>
-          <a:prstGeom prst="rect">
-            <a:avLst/>
-          </a:prstGeom>
-          <a:ln w="0">
-            <a:noFill/>
-          </a:ln>
-        </p:spPr>
-      </p:sp>
-      <p:sp>
-        <p:nvSpPr>
-          <p:cNvPr id="589" name="PlaceHolder 2"/>
+            <a:ext cx="5485320" cy="3085200"/>
+          </a:xfrm>
+          <a:prstGeom prst="rect">
+            <a:avLst/>
+          </a:prstGeom>
+          <a:ln w="0">
+            <a:noFill/>
+          </a:ln>
+        </p:spPr>
+      </p:sp>
+      <p:sp>
+        <p:nvSpPr>
+          <p:cNvPr id="581" name="PlaceHolder 2"/>
           <p:cNvSpPr>
             <a:spLocks noGrp="1"/>
           </p:cNvSpPr>
@@ -2398,18 +2479,18 @@
         <p:spPr>
           <a:xfrm>
             <a:off x="685800" y="4400640"/>
-            <a:ext cx="5486040" cy="3600000"/>
-          </a:xfrm>
-          <a:prstGeom prst="rect">
-            <a:avLst/>
-          </a:prstGeom>
-          <a:noFill/>
-          <a:ln w="0">
-            <a:noFill/>
-          </a:ln>
-        </p:spPr>
-        <p:txBody>
-          <a:bodyPr anchor="t">
+            <a:ext cx="5485320" cy="3599280"/>
+          </a:xfrm>
+          <a:prstGeom prst="rect">
+            <a:avLst/>
+          </a:prstGeom>
+          <a:noFill/>
+          <a:ln w="0">
+            <a:noFill/>
+          </a:ln>
+        </p:spPr>
+        <p:txBody>
+          <a:bodyPr lIns="0" rIns="0" tIns="0" bIns="0" anchor="t">
             <a:noAutofit/>
           </a:bodyPr>
           <a:p>
@@ -2421,7 +2502,7 @@
       </p:sp>
       <p:sp>
         <p:nvSpPr>
-          <p:cNvPr id="590" name="PlaceHolder 3"/>
+          <p:cNvPr id="582" name="PlaceHolder 3"/>
           <p:cNvSpPr>
             <a:spLocks noGrp="1"/>
           </p:cNvSpPr>
@@ -2432,18 +2513,18 @@
         <p:spPr>
           <a:xfrm>
             <a:off x="3884760" y="8685360"/>
-            <a:ext cx="2971440" cy="458280"/>
-          </a:xfrm>
-          <a:prstGeom prst="rect">
-            <a:avLst/>
-          </a:prstGeom>
-          <a:noFill/>
-          <a:ln w="0">
-            <a:noFill/>
-          </a:ln>
-        </p:spPr>
-        <p:txBody>
-          <a:bodyPr anchor="b">
+            <a:ext cx="2970720" cy="457560"/>
+          </a:xfrm>
+          <a:prstGeom prst="rect">
+            <a:avLst/>
+          </a:prstGeom>
+          <a:noFill/>
+          <a:ln w="0">
+            <a:noFill/>
+          </a:ln>
+        </p:spPr>
+        <p:txBody>
+          <a:bodyPr lIns="0" rIns="0" tIns="0" bIns="0" anchor="b">
             <a:noAutofit/>
           </a:bodyPr>
           <a:lstStyle>
@@ -2468,7 +2549,7 @@
               </a:lnSpc>
               <a:buNone/>
             </a:pPr>
-            <a:fld id="{44977906-7CD4-4F71-A664-7C5AB2D06408}" type="slidenum">
+            <a:fld id="{C35FCBAE-C159-4E36-BFC0-8AC4D24E652B}" type="slidenum">
               <a:rPr b="0" lang="en-US" sz="1200" spc="-1" strike="noStrike">
                 <a:solidFill>
                   <a:srgbClr val="000000"/>
@@ -2508,7 +2589,7 @@
       </p:grpSpPr>
       <p:sp>
         <p:nvSpPr>
-          <p:cNvPr id="591" name="PlaceHolder 1"/>
+          <p:cNvPr id="583" name="PlaceHolder 1"/>
           <p:cNvSpPr>
             <a:spLocks noGrp="1"/>
           </p:cNvSpPr>
@@ -2519,19 +2600,19 @@
         <p:spPr>
           <a:xfrm>
             <a:off x="685800" y="1143000"/>
-            <a:ext cx="5486040" cy="3085920"/>
-          </a:xfrm>
-          <a:prstGeom prst="rect">
-            <a:avLst/>
-          </a:prstGeom>
-          <a:ln w="0">
-            <a:noFill/>
-          </a:ln>
-        </p:spPr>
-      </p:sp>
-      <p:sp>
-        <p:nvSpPr>
-          <p:cNvPr id="592" name="PlaceHolder 2"/>
+            <a:ext cx="5485320" cy="3085200"/>
+          </a:xfrm>
+          <a:prstGeom prst="rect">
+            <a:avLst/>
+          </a:prstGeom>
+          <a:ln w="0">
+            <a:noFill/>
+          </a:ln>
+        </p:spPr>
+      </p:sp>
+      <p:sp>
+        <p:nvSpPr>
+          <p:cNvPr id="584" name="PlaceHolder 2"/>
           <p:cNvSpPr>
             <a:spLocks noGrp="1"/>
           </p:cNvSpPr>
@@ -2542,18 +2623,18 @@
         <p:spPr>
           <a:xfrm>
             <a:off x="685800" y="4400640"/>
-            <a:ext cx="5486040" cy="3600000"/>
-          </a:xfrm>
-          <a:prstGeom prst="rect">
-            <a:avLst/>
-          </a:prstGeom>
-          <a:noFill/>
-          <a:ln w="0">
-            <a:noFill/>
-          </a:ln>
-        </p:spPr>
-        <p:txBody>
-          <a:bodyPr anchor="t">
+            <a:ext cx="5485320" cy="3599280"/>
+          </a:xfrm>
+          <a:prstGeom prst="rect">
+            <a:avLst/>
+          </a:prstGeom>
+          <a:noFill/>
+          <a:ln w="0">
+            <a:noFill/>
+          </a:ln>
+        </p:spPr>
+        <p:txBody>
+          <a:bodyPr lIns="0" rIns="0" tIns="0" bIns="0" anchor="t">
             <a:noAutofit/>
           </a:bodyPr>
           <a:p>
@@ -2565,7 +2646,7 @@
       </p:sp>
       <p:sp>
         <p:nvSpPr>
-          <p:cNvPr id="593" name="PlaceHolder 3"/>
+          <p:cNvPr id="585" name="PlaceHolder 3"/>
           <p:cNvSpPr>
             <a:spLocks noGrp="1"/>
           </p:cNvSpPr>
@@ -2576,18 +2657,18 @@
         <p:spPr>
           <a:xfrm>
             <a:off x="3884760" y="8685360"/>
-            <a:ext cx="2971440" cy="458280"/>
-          </a:xfrm>
-          <a:prstGeom prst="rect">
-            <a:avLst/>
-          </a:prstGeom>
-          <a:noFill/>
-          <a:ln w="0">
-            <a:noFill/>
-          </a:ln>
-        </p:spPr>
-        <p:txBody>
-          <a:bodyPr anchor="b">
+            <a:ext cx="2970720" cy="457560"/>
+          </a:xfrm>
+          <a:prstGeom prst="rect">
+            <a:avLst/>
+          </a:prstGeom>
+          <a:noFill/>
+          <a:ln w="0">
+            <a:noFill/>
+          </a:ln>
+        </p:spPr>
+        <p:txBody>
+          <a:bodyPr lIns="0" rIns="0" tIns="0" bIns="0" anchor="b">
             <a:noAutofit/>
           </a:bodyPr>
           <a:lstStyle>
@@ -2612,7 +2693,7 @@
               </a:lnSpc>
               <a:buNone/>
             </a:pPr>
-            <a:fld id="{C27FC82F-567C-4897-B0BE-BBEF93752FFD}" type="slidenum">
+            <a:fld id="{EE481BF8-B6E1-4E14-9CDB-6D2FF5BAC236}" type="slidenum">
               <a:rPr b="0" lang="en-US" sz="1200" spc="-1" strike="noStrike">
                 <a:solidFill>
                   <a:srgbClr val="000000"/>
@@ -2652,7 +2733,7 @@
       </p:grpSpPr>
       <p:sp>
         <p:nvSpPr>
-          <p:cNvPr id="594" name="PlaceHolder 1"/>
+          <p:cNvPr id="586" name="PlaceHolder 1"/>
           <p:cNvSpPr>
             <a:spLocks noGrp="1"/>
           </p:cNvSpPr>
@@ -2663,19 +2744,19 @@
         <p:spPr>
           <a:xfrm>
             <a:off x="685800" y="1143000"/>
-            <a:ext cx="5486040" cy="3085920"/>
-          </a:xfrm>
-          <a:prstGeom prst="rect">
-            <a:avLst/>
-          </a:prstGeom>
-          <a:ln w="0">
-            <a:noFill/>
-          </a:ln>
-        </p:spPr>
-      </p:sp>
-      <p:sp>
-        <p:nvSpPr>
-          <p:cNvPr id="595" name="PlaceHolder 2"/>
+            <a:ext cx="5485320" cy="3085200"/>
+          </a:xfrm>
+          <a:prstGeom prst="rect">
+            <a:avLst/>
+          </a:prstGeom>
+          <a:ln w="0">
+            <a:noFill/>
+          </a:ln>
+        </p:spPr>
+      </p:sp>
+      <p:sp>
+        <p:nvSpPr>
+          <p:cNvPr id="587" name="PlaceHolder 2"/>
           <p:cNvSpPr>
             <a:spLocks noGrp="1"/>
           </p:cNvSpPr>
@@ -2686,18 +2767,18 @@
         <p:spPr>
           <a:xfrm>
             <a:off x="685800" y="4400640"/>
-            <a:ext cx="5486040" cy="3600000"/>
-          </a:xfrm>
-          <a:prstGeom prst="rect">
-            <a:avLst/>
-          </a:prstGeom>
-          <a:noFill/>
-          <a:ln w="0">
-            <a:noFill/>
-          </a:ln>
-        </p:spPr>
-        <p:txBody>
-          <a:bodyPr anchor="t">
+            <a:ext cx="5485320" cy="3599280"/>
+          </a:xfrm>
+          <a:prstGeom prst="rect">
+            <a:avLst/>
+          </a:prstGeom>
+          <a:noFill/>
+          <a:ln w="0">
+            <a:noFill/>
+          </a:ln>
+        </p:spPr>
+        <p:txBody>
+          <a:bodyPr lIns="0" rIns="0" tIns="0" bIns="0" anchor="t">
             <a:noAutofit/>
           </a:bodyPr>
           <a:p>
@@ -2709,7 +2790,7 @@
       </p:sp>
       <p:sp>
         <p:nvSpPr>
-          <p:cNvPr id="596" name="PlaceHolder 3"/>
+          <p:cNvPr id="588" name="PlaceHolder 3"/>
           <p:cNvSpPr>
             <a:spLocks noGrp="1"/>
           </p:cNvSpPr>
@@ -2720,18 +2801,18 @@
         <p:spPr>
           <a:xfrm>
             <a:off x="3884760" y="8685360"/>
-            <a:ext cx="2971440" cy="458280"/>
-          </a:xfrm>
-          <a:prstGeom prst="rect">
-            <a:avLst/>
-          </a:prstGeom>
-          <a:noFill/>
-          <a:ln w="0">
-            <a:noFill/>
-          </a:ln>
-        </p:spPr>
-        <p:txBody>
-          <a:bodyPr anchor="b">
+            <a:ext cx="2970720" cy="457560"/>
+          </a:xfrm>
+          <a:prstGeom prst="rect">
+            <a:avLst/>
+          </a:prstGeom>
+          <a:noFill/>
+          <a:ln w="0">
+            <a:noFill/>
+          </a:ln>
+        </p:spPr>
+        <p:txBody>
+          <a:bodyPr lIns="0" rIns="0" tIns="0" bIns="0" anchor="b">
             <a:noAutofit/>
           </a:bodyPr>
           <a:lstStyle>
@@ -2756,7 +2837,7 @@
               </a:lnSpc>
               <a:buNone/>
             </a:pPr>
-            <a:fld id="{69942C02-1559-41CF-814C-D56571538559}" type="slidenum">
+            <a:fld id="{420080DA-8B7D-4ACD-AB24-44AFD819920D}" type="slidenum">
               <a:rPr b="0" lang="en-US" sz="1200" spc="-1" strike="noStrike">
                 <a:solidFill>
                   <a:srgbClr val="000000"/>
@@ -2844,11 +2925,11 @@
             <a:noAutofit/>
           </a:bodyPr>
           <a:p>
-            <a:endParaRPr b="0" lang="en-IN" sz="1800" spc="-1" strike="noStrike">
-              <a:solidFill>
-                <a:srgbClr val="000000"/>
-              </a:solidFill>
-              <a:latin typeface="Calibri"/>
+            <a:pPr algn="ctr">
+              <a:buNone/>
+            </a:pPr>
+            <a:endParaRPr b="0" lang="en-IN" sz="4400" spc="-1" strike="noStrike">
+              <a:latin typeface="Arial"/>
             </a:endParaRPr>
           </a:p>
         </p:txBody>
@@ -2882,10 +2963,7 @@
           </a:bodyPr>
           <a:p>
             <a:endParaRPr b="0" lang="en-IN" sz="3200" spc="-1" strike="noStrike">
-              <a:solidFill>
-                <a:srgbClr val="000000"/>
-              </a:solidFill>
-              <a:latin typeface="Calibri"/>
+              <a:latin typeface="Arial"/>
             </a:endParaRPr>
           </a:p>
         </p:txBody>
@@ -2919,10 +2997,7 @@
           </a:bodyPr>
           <a:p>
             <a:endParaRPr b="0" lang="en-IN" sz="3200" spc="-1" strike="noStrike">
-              <a:solidFill>
-                <a:srgbClr val="000000"/>
-              </a:solidFill>
-              <a:latin typeface="Calibri"/>
+              <a:latin typeface="Arial"/>
             </a:endParaRPr>
           </a:p>
         </p:txBody>
@@ -2977,11 +3052,11 @@
             <a:noAutofit/>
           </a:bodyPr>
           <a:p>
-            <a:endParaRPr b="0" lang="en-IN" sz="1800" spc="-1" strike="noStrike">
-              <a:solidFill>
-                <a:srgbClr val="000000"/>
-              </a:solidFill>
-              <a:latin typeface="Calibri"/>
+            <a:pPr algn="ctr">
+              <a:buNone/>
+            </a:pPr>
+            <a:endParaRPr b="0" lang="en-IN" sz="4400" spc="-1" strike="noStrike">
+              <a:latin typeface="Arial"/>
             </a:endParaRPr>
           </a:p>
         </p:txBody>
@@ -3015,10 +3090,7 @@
           </a:bodyPr>
           <a:p>
             <a:endParaRPr b="0" lang="en-IN" sz="3200" spc="-1" strike="noStrike">
-              <a:solidFill>
-                <a:srgbClr val="000000"/>
-              </a:solidFill>
-              <a:latin typeface="Calibri"/>
+              <a:latin typeface="Arial"/>
             </a:endParaRPr>
           </a:p>
         </p:txBody>
@@ -3052,10 +3124,7 @@
           </a:bodyPr>
           <a:p>
             <a:endParaRPr b="0" lang="en-IN" sz="3200" spc="-1" strike="noStrike">
-              <a:solidFill>
-                <a:srgbClr val="000000"/>
-              </a:solidFill>
-              <a:latin typeface="Calibri"/>
+              <a:latin typeface="Arial"/>
             </a:endParaRPr>
           </a:p>
         </p:txBody>
@@ -3089,10 +3158,7 @@
           </a:bodyPr>
           <a:p>
             <a:endParaRPr b="0" lang="en-IN" sz="3200" spc="-1" strike="noStrike">
-              <a:solidFill>
-                <a:srgbClr val="000000"/>
-              </a:solidFill>
-              <a:latin typeface="Calibri"/>
+              <a:latin typeface="Arial"/>
             </a:endParaRPr>
           </a:p>
         </p:txBody>
@@ -3126,10 +3192,7 @@
           </a:bodyPr>
           <a:p>
             <a:endParaRPr b="0" lang="en-IN" sz="3200" spc="-1" strike="noStrike">
-              <a:solidFill>
-                <a:srgbClr val="000000"/>
-              </a:solidFill>
-              <a:latin typeface="Calibri"/>
+              <a:latin typeface="Arial"/>
             </a:endParaRPr>
           </a:p>
         </p:txBody>
@@ -3184,11 +3247,11 @@
             <a:noAutofit/>
           </a:bodyPr>
           <a:p>
-            <a:endParaRPr b="0" lang="en-IN" sz="1800" spc="-1" strike="noStrike">
-              <a:solidFill>
-                <a:srgbClr val="000000"/>
-              </a:solidFill>
-              <a:latin typeface="Calibri"/>
+            <a:pPr algn="ctr">
+              <a:buNone/>
+            </a:pPr>
+            <a:endParaRPr b="0" lang="en-IN" sz="4400" spc="-1" strike="noStrike">
+              <a:latin typeface="Arial"/>
             </a:endParaRPr>
           </a:p>
         </p:txBody>
@@ -3222,10 +3285,7 @@
           </a:bodyPr>
           <a:p>
             <a:endParaRPr b="0" lang="en-IN" sz="3200" spc="-1" strike="noStrike">
-              <a:solidFill>
-                <a:srgbClr val="000000"/>
-              </a:solidFill>
-              <a:latin typeface="Calibri"/>
+              <a:latin typeface="Arial"/>
             </a:endParaRPr>
           </a:p>
         </p:txBody>
@@ -3259,10 +3319,7 @@
           </a:bodyPr>
           <a:p>
             <a:endParaRPr b="0" lang="en-IN" sz="3200" spc="-1" strike="noStrike">
-              <a:solidFill>
-                <a:srgbClr val="000000"/>
-              </a:solidFill>
-              <a:latin typeface="Calibri"/>
+              <a:latin typeface="Arial"/>
             </a:endParaRPr>
           </a:p>
         </p:txBody>
@@ -3296,10 +3353,7 @@
           </a:bodyPr>
           <a:p>
             <a:endParaRPr b="0" lang="en-IN" sz="3200" spc="-1" strike="noStrike">
-              <a:solidFill>
-                <a:srgbClr val="000000"/>
-              </a:solidFill>
-              <a:latin typeface="Calibri"/>
+              <a:latin typeface="Arial"/>
             </a:endParaRPr>
           </a:p>
         </p:txBody>
@@ -3333,10 +3387,7 @@
           </a:bodyPr>
           <a:p>
             <a:endParaRPr b="0" lang="en-IN" sz="3200" spc="-1" strike="noStrike">
-              <a:solidFill>
-                <a:srgbClr val="000000"/>
-              </a:solidFill>
-              <a:latin typeface="Calibri"/>
+              <a:latin typeface="Arial"/>
             </a:endParaRPr>
           </a:p>
         </p:txBody>
@@ -3370,10 +3421,7 @@
           </a:bodyPr>
           <a:p>
             <a:endParaRPr b="0" lang="en-IN" sz="3200" spc="-1" strike="noStrike">
-              <a:solidFill>
-                <a:srgbClr val="000000"/>
-              </a:solidFill>
-              <a:latin typeface="Calibri"/>
+              <a:latin typeface="Arial"/>
             </a:endParaRPr>
           </a:p>
         </p:txBody>
@@ -3407,10 +3455,7 @@
           </a:bodyPr>
           <a:p>
             <a:endParaRPr b="0" lang="en-IN" sz="3200" spc="-1" strike="noStrike">
-              <a:solidFill>
-                <a:srgbClr val="000000"/>
-              </a:solidFill>
-              <a:latin typeface="Calibri"/>
+              <a:latin typeface="Arial"/>
             </a:endParaRPr>
           </a:p>
         </p:txBody>
@@ -3465,11 +3510,11 @@
             <a:noAutofit/>
           </a:bodyPr>
           <a:p>
-            <a:endParaRPr b="0" lang="en-IN" sz="1800" spc="-1" strike="noStrike">
-              <a:solidFill>
-                <a:srgbClr val="000000"/>
-              </a:solidFill>
-              <a:latin typeface="Calibri"/>
+            <a:pPr algn="ctr">
+              <a:buNone/>
+            </a:pPr>
+            <a:endParaRPr b="0" lang="en-IN" sz="4400" spc="-1" strike="noStrike">
+              <a:latin typeface="Arial"/>
             </a:endParaRPr>
           </a:p>
         </p:txBody>
@@ -3561,11 +3606,11 @@
             <a:noAutofit/>
           </a:bodyPr>
           <a:p>
-            <a:endParaRPr b="0" lang="en-IN" sz="1800" spc="-1" strike="noStrike">
-              <a:solidFill>
-                <a:srgbClr val="000000"/>
-              </a:solidFill>
-              <a:latin typeface="Calibri"/>
+            <a:pPr algn="ctr">
+              <a:buNone/>
+            </a:pPr>
+            <a:endParaRPr b="0" lang="en-IN" sz="4400" spc="-1" strike="noStrike">
+              <a:latin typeface="Arial"/>
             </a:endParaRPr>
           </a:p>
         </p:txBody>
@@ -3599,10 +3644,7 @@
           </a:bodyPr>
           <a:p>
             <a:endParaRPr b="0" lang="en-IN" sz="3200" spc="-1" strike="noStrike">
-              <a:solidFill>
-                <a:srgbClr val="000000"/>
-              </a:solidFill>
-              <a:latin typeface="Calibri"/>
+              <a:latin typeface="Arial"/>
             </a:endParaRPr>
           </a:p>
         </p:txBody>
@@ -3657,11 +3699,11 @@
             <a:noAutofit/>
           </a:bodyPr>
           <a:p>
-            <a:endParaRPr b="0" lang="en-IN" sz="1800" spc="-1" strike="noStrike">
-              <a:solidFill>
-                <a:srgbClr val="000000"/>
-              </a:solidFill>
-              <a:latin typeface="Calibri"/>
+            <a:pPr algn="ctr">
+              <a:buNone/>
+            </a:pPr>
+            <a:endParaRPr b="0" lang="en-IN" sz="4400" spc="-1" strike="noStrike">
+              <a:latin typeface="Arial"/>
             </a:endParaRPr>
           </a:p>
         </p:txBody>
@@ -3695,10 +3737,7 @@
           </a:bodyPr>
           <a:p>
             <a:endParaRPr b="0" lang="en-IN" sz="3200" spc="-1" strike="noStrike">
-              <a:solidFill>
-                <a:srgbClr val="000000"/>
-              </a:solidFill>
-              <a:latin typeface="Calibri"/>
+              <a:latin typeface="Arial"/>
             </a:endParaRPr>
           </a:p>
         </p:txBody>
@@ -3732,10 +3771,7 @@
           </a:bodyPr>
           <a:p>
             <a:endParaRPr b="0" lang="en-IN" sz="3200" spc="-1" strike="noStrike">
-              <a:solidFill>
-                <a:srgbClr val="000000"/>
-              </a:solidFill>
-              <a:latin typeface="Calibri"/>
+              <a:latin typeface="Arial"/>
             </a:endParaRPr>
           </a:p>
         </p:txBody>
@@ -3790,11 +3826,11 @@
             <a:noAutofit/>
           </a:bodyPr>
           <a:p>
-            <a:endParaRPr b="0" lang="en-IN" sz="1800" spc="-1" strike="noStrike">
-              <a:solidFill>
-                <a:srgbClr val="000000"/>
-              </a:solidFill>
-              <a:latin typeface="Calibri"/>
+            <a:pPr algn="ctr">
+              <a:buNone/>
+            </a:pPr>
+            <a:endParaRPr b="0" lang="en-IN" sz="4400" spc="-1" strike="noStrike">
+              <a:latin typeface="Arial"/>
             </a:endParaRPr>
           </a:p>
         </p:txBody>
@@ -3908,11 +3944,11 @@
             <a:noAutofit/>
           </a:bodyPr>
           <a:p>
-            <a:endParaRPr b="0" lang="en-IN" sz="1800" spc="-1" strike="noStrike">
-              <a:solidFill>
-                <a:srgbClr val="000000"/>
-              </a:solidFill>
-              <a:latin typeface="Calibri"/>
+            <a:pPr algn="ctr">
+              <a:buNone/>
+            </a:pPr>
+            <a:endParaRPr b="0" lang="en-IN" sz="4400" spc="-1" strike="noStrike">
+              <a:latin typeface="Arial"/>
             </a:endParaRPr>
           </a:p>
         </p:txBody>
@@ -3946,10 +3982,7 @@
           </a:bodyPr>
           <a:p>
             <a:endParaRPr b="0" lang="en-IN" sz="3200" spc="-1" strike="noStrike">
-              <a:solidFill>
-                <a:srgbClr val="000000"/>
-              </a:solidFill>
-              <a:latin typeface="Calibri"/>
+              <a:latin typeface="Arial"/>
             </a:endParaRPr>
           </a:p>
         </p:txBody>
@@ -3983,10 +4016,7 @@
           </a:bodyPr>
           <a:p>
             <a:endParaRPr b="0" lang="en-IN" sz="3200" spc="-1" strike="noStrike">
-              <a:solidFill>
-                <a:srgbClr val="000000"/>
-              </a:solidFill>
-              <a:latin typeface="Calibri"/>
+              <a:latin typeface="Arial"/>
             </a:endParaRPr>
           </a:p>
         </p:txBody>
@@ -4020,10 +4050,7 @@
           </a:bodyPr>
           <a:p>
             <a:endParaRPr b="0" lang="en-IN" sz="3200" spc="-1" strike="noStrike">
-              <a:solidFill>
-                <a:srgbClr val="000000"/>
-              </a:solidFill>
-              <a:latin typeface="Calibri"/>
+              <a:latin typeface="Arial"/>
             </a:endParaRPr>
           </a:p>
         </p:txBody>
@@ -4078,11 +4105,11 @@
             <a:noAutofit/>
           </a:bodyPr>
           <a:p>
-            <a:endParaRPr b="0" lang="en-IN" sz="1800" spc="-1" strike="noStrike">
-              <a:solidFill>
-                <a:srgbClr val="000000"/>
-              </a:solidFill>
-              <a:latin typeface="Calibri"/>
+            <a:pPr algn="ctr">
+              <a:buNone/>
+            </a:pPr>
+            <a:endParaRPr b="0" lang="en-IN" sz="4400" spc="-1" strike="noStrike">
+              <a:latin typeface="Arial"/>
             </a:endParaRPr>
           </a:p>
         </p:txBody>
@@ -4116,10 +4143,7 @@
           </a:bodyPr>
           <a:p>
             <a:endParaRPr b="0" lang="en-IN" sz="3200" spc="-1" strike="noStrike">
-              <a:solidFill>
-                <a:srgbClr val="000000"/>
-              </a:solidFill>
-              <a:latin typeface="Calibri"/>
+              <a:latin typeface="Arial"/>
             </a:endParaRPr>
           </a:p>
         </p:txBody>
@@ -4153,10 +4177,7 @@
           </a:bodyPr>
           <a:p>
             <a:endParaRPr b="0" lang="en-IN" sz="3200" spc="-1" strike="noStrike">
-              <a:solidFill>
-                <a:srgbClr val="000000"/>
-              </a:solidFill>
-              <a:latin typeface="Calibri"/>
+              <a:latin typeface="Arial"/>
             </a:endParaRPr>
           </a:p>
         </p:txBody>
@@ -4190,10 +4211,7 @@
           </a:bodyPr>
           <a:p>
             <a:endParaRPr b="0" lang="en-IN" sz="3200" spc="-1" strike="noStrike">
-              <a:solidFill>
-                <a:srgbClr val="000000"/>
-              </a:solidFill>
-              <a:latin typeface="Calibri"/>
+              <a:latin typeface="Arial"/>
             </a:endParaRPr>
           </a:p>
         </p:txBody>
@@ -4248,11 +4266,11 @@
             <a:noAutofit/>
           </a:bodyPr>
           <a:p>
-            <a:endParaRPr b="0" lang="en-IN" sz="1800" spc="-1" strike="noStrike">
-              <a:solidFill>
-                <a:srgbClr val="000000"/>
-              </a:solidFill>
-              <a:latin typeface="Calibri"/>
+            <a:pPr algn="ctr">
+              <a:buNone/>
+            </a:pPr>
+            <a:endParaRPr b="0" lang="en-IN" sz="4400" spc="-1" strike="noStrike">
+              <a:latin typeface="Arial"/>
             </a:endParaRPr>
           </a:p>
         </p:txBody>
@@ -4286,10 +4304,7 @@
           </a:bodyPr>
           <a:p>
             <a:endParaRPr b="0" lang="en-IN" sz="3200" spc="-1" strike="noStrike">
-              <a:solidFill>
-                <a:srgbClr val="000000"/>
-              </a:solidFill>
-              <a:latin typeface="Calibri"/>
+              <a:latin typeface="Arial"/>
             </a:endParaRPr>
           </a:p>
         </p:txBody>
@@ -4323,10 +4338,7 @@
           </a:bodyPr>
           <a:p>
             <a:endParaRPr b="0" lang="en-IN" sz="3200" spc="-1" strike="noStrike">
-              <a:solidFill>
-                <a:srgbClr val="000000"/>
-              </a:solidFill>
-              <a:latin typeface="Calibri"/>
+              <a:latin typeface="Arial"/>
             </a:endParaRPr>
           </a:p>
         </p:txBody>
@@ -4360,10 +4372,7 @@
           </a:bodyPr>
           <a:p>
             <a:endParaRPr b="0" lang="en-IN" sz="3200" spc="-1" strike="noStrike">
-              <a:solidFill>
-                <a:srgbClr val="000000"/>
-              </a:solidFill>
-              <a:latin typeface="Calibri"/>
+              <a:latin typeface="Arial"/>
             </a:endParaRPr>
           </a:p>
         </p:txBody>
@@ -4425,20 +4434,35 @@
             <a:noAutofit/>
           </a:bodyPr>
           <a:p>
-            <a:r>
-              <a:rPr b="0" lang="en-IN" sz="1800" spc="-1" strike="noStrike">
-                <a:solidFill>
-                  <a:srgbClr val="000000"/>
-                </a:solidFill>
-                <a:latin typeface="Calibri"/>
-              </a:rPr>
-              <a:t>Click to edit the title text format</a:t>
-            </a:r>
-            <a:endParaRPr b="0" lang="en-IN" sz="1800" spc="-1" strike="noStrike">
-              <a:solidFill>
-                <a:srgbClr val="000000"/>
-              </a:solidFill>
-              <a:latin typeface="Calibri"/>
+            <a:pPr algn="ctr">
+              <a:buNone/>
+            </a:pPr>
+            <a:r>
+              <a:rPr b="0" lang="en-IN" sz="4400" spc="-1" strike="noStrike">
+                <a:latin typeface="Arial"/>
+              </a:rPr>
+              <a:t>Click to </a:t>
+            </a:r>
+            <a:r>
+              <a:rPr b="0" lang="en-IN" sz="4400" spc="-1" strike="noStrike">
+                <a:latin typeface="Arial"/>
+              </a:rPr>
+              <a:t>edit the </a:t>
+            </a:r>
+            <a:r>
+              <a:rPr b="0" lang="en-IN" sz="4400" spc="-1" strike="noStrike">
+                <a:latin typeface="Arial"/>
+              </a:rPr>
+              <a:t>title text </a:t>
+            </a:r>
+            <a:r>
+              <a:rPr b="0" lang="en-IN" sz="4400" spc="-1" strike="noStrike">
+                <a:latin typeface="Arial"/>
+              </a:rPr>
+              <a:t>format</a:t>
+            </a:r>
+            <a:endParaRPr b="0" lang="en-IN" sz="4400" spc="-1" strike="noStrike">
+              <a:latin typeface="Arial"/>
             </a:endParaRPr>
           </a:p>
         </p:txBody>
@@ -4484,18 +4508,12 @@
             </a:pPr>
             <a:r>
               <a:rPr b="0" lang="en-IN" sz="3200" spc="-1" strike="noStrike">
-                <a:solidFill>
-                  <a:srgbClr val="000000"/>
-                </a:solidFill>
-                <a:latin typeface="Calibri"/>
+                <a:latin typeface="Arial"/>
               </a:rPr>
               <a:t>Click to edit the outline text format</a:t>
             </a:r>
             <a:endParaRPr b="0" lang="en-IN" sz="3200" spc="-1" strike="noStrike">
-              <a:solidFill>
-                <a:srgbClr val="000000"/>
-              </a:solidFill>
-              <a:latin typeface="Calibri"/>
+              <a:latin typeface="Arial"/>
             </a:endParaRPr>
           </a:p>
           <a:p>
@@ -4511,19 +4529,13 @@
               <a:buChar char=""/>
             </a:pPr>
             <a:r>
-              <a:rPr b="0" lang="en-IN" sz="2400" spc="-1" strike="noStrike">
-                <a:solidFill>
-                  <a:srgbClr val="000000"/>
-                </a:solidFill>
-                <a:latin typeface="Calibri"/>
+              <a:rPr b="0" lang="en-IN" sz="2800" spc="-1" strike="noStrike">
+                <a:latin typeface="Arial"/>
               </a:rPr>
               <a:t>Second Outline Level</a:t>
             </a:r>
-            <a:endParaRPr b="0" lang="en-IN" sz="2400" spc="-1" strike="noStrike">
-              <a:solidFill>
-                <a:srgbClr val="000000"/>
-              </a:solidFill>
-              <a:latin typeface="Calibri"/>
+            <a:endParaRPr b="0" lang="en-IN" sz="2800" spc="-1" strike="noStrike">
+              <a:latin typeface="Arial"/>
             </a:endParaRPr>
           </a:p>
           <a:p>
@@ -4539,19 +4551,13 @@
               <a:buChar char=""/>
             </a:pPr>
             <a:r>
-              <a:rPr b="0" lang="en-IN" sz="2000" spc="-1" strike="noStrike">
-                <a:solidFill>
-                  <a:srgbClr val="000000"/>
-                </a:solidFill>
-                <a:latin typeface="Calibri"/>
+              <a:rPr b="0" lang="en-IN" sz="2400" spc="-1" strike="noStrike">
+                <a:latin typeface="Arial"/>
               </a:rPr>
               <a:t>Third Outline Level</a:t>
             </a:r>
-            <a:endParaRPr b="0" lang="en-IN" sz="2000" spc="-1" strike="noStrike">
-              <a:solidFill>
-                <a:srgbClr val="000000"/>
-              </a:solidFill>
-              <a:latin typeface="Calibri"/>
+            <a:endParaRPr b="0" lang="en-IN" sz="2400" spc="-1" strike="noStrike">
+              <a:latin typeface="Arial"/>
             </a:endParaRPr>
           </a:p>
           <a:p>
@@ -4568,18 +4574,12 @@
             </a:pPr>
             <a:r>
               <a:rPr b="0" lang="en-IN" sz="2000" spc="-1" strike="noStrike">
-                <a:solidFill>
-                  <a:srgbClr val="000000"/>
-                </a:solidFill>
-                <a:latin typeface="Calibri"/>
+                <a:latin typeface="Arial"/>
               </a:rPr>
               <a:t>Fourth Outline Level</a:t>
             </a:r>
             <a:endParaRPr b="0" lang="en-IN" sz="2000" spc="-1" strike="noStrike">
-              <a:solidFill>
-                <a:srgbClr val="000000"/>
-              </a:solidFill>
-              <a:latin typeface="Calibri"/>
+              <a:latin typeface="Arial"/>
             </a:endParaRPr>
           </a:p>
           <a:p>
@@ -4596,18 +4596,12 @@
             </a:pPr>
             <a:r>
               <a:rPr b="0" lang="en-IN" sz="2000" spc="-1" strike="noStrike">
-                <a:solidFill>
-                  <a:srgbClr val="000000"/>
-                </a:solidFill>
-                <a:latin typeface="Calibri"/>
+                <a:latin typeface="Arial"/>
               </a:rPr>
               <a:t>Fifth Outline Level</a:t>
             </a:r>
             <a:endParaRPr b="0" lang="en-IN" sz="2000" spc="-1" strike="noStrike">
-              <a:solidFill>
-                <a:srgbClr val="000000"/>
-              </a:solidFill>
-              <a:latin typeface="Calibri"/>
+              <a:latin typeface="Arial"/>
             </a:endParaRPr>
           </a:p>
           <a:p>
@@ -4624,18 +4618,12 @@
             </a:pPr>
             <a:r>
               <a:rPr b="0" lang="en-IN" sz="2000" spc="-1" strike="noStrike">
-                <a:solidFill>
-                  <a:srgbClr val="000000"/>
-                </a:solidFill>
-                <a:latin typeface="Calibri"/>
+                <a:latin typeface="Arial"/>
               </a:rPr>
               <a:t>Sixth Outline Level</a:t>
             </a:r>
             <a:endParaRPr b="0" lang="en-IN" sz="2000" spc="-1" strike="noStrike">
-              <a:solidFill>
-                <a:srgbClr val="000000"/>
-              </a:solidFill>
-              <a:latin typeface="Calibri"/>
+              <a:latin typeface="Arial"/>
             </a:endParaRPr>
           </a:p>
           <a:p>
@@ -4652,18 +4640,12 @@
             </a:pPr>
             <a:r>
               <a:rPr b="0" lang="en-IN" sz="2000" spc="-1" strike="noStrike">
-                <a:solidFill>
-                  <a:srgbClr val="000000"/>
-                </a:solidFill>
-                <a:latin typeface="Calibri"/>
+                <a:latin typeface="Arial"/>
               </a:rPr>
               <a:t>Seventh Outline Level</a:t>
             </a:r>
             <a:endParaRPr b="0" lang="en-IN" sz="2000" spc="-1" strike="noStrike">
-              <a:solidFill>
-                <a:srgbClr val="000000"/>
-              </a:solidFill>
-              <a:latin typeface="Calibri"/>
+              <a:latin typeface="Arial"/>
             </a:endParaRPr>
           </a:p>
         </p:txBody>
@@ -4721,7 +4703,7 @@
         <p:spPr>
           <a:xfrm>
             <a:off x="0" y="4114800"/>
-            <a:ext cx="9143640" cy="1028520"/>
+            <a:ext cx="9142920" cy="1027800"/>
           </a:xfrm>
           <a:prstGeom prst="rect">
             <a:avLst/>
@@ -4752,7 +4734,7 @@
         <p:spPr>
           <a:xfrm>
             <a:off x="457200" y="1097280"/>
-            <a:ext cx="109440" cy="2788560"/>
+            <a:ext cx="108720" cy="2787840"/>
           </a:xfrm>
           <a:prstGeom prst="rect">
             <a:avLst/>
@@ -4783,7 +4765,7 @@
         <p:spPr>
           <a:xfrm>
             <a:off x="777240" y="1097280"/>
-            <a:ext cx="7772040" cy="776880"/>
+            <a:ext cx="7771320" cy="776160"/>
           </a:xfrm>
           <a:prstGeom prst="rect">
             <a:avLst/>
@@ -4838,7 +4820,7 @@
         <p:spPr>
           <a:xfrm>
             <a:off x="777240" y="1874520"/>
-            <a:ext cx="7772040" cy="749520"/>
+            <a:ext cx="7771320" cy="748800"/>
           </a:xfrm>
           <a:prstGeom prst="rect">
             <a:avLst/>
@@ -4893,7 +4875,7 @@
         <p:spPr>
           <a:xfrm>
             <a:off x="777240" y="2724840"/>
-            <a:ext cx="7314840" cy="383760"/>
+            <a:ext cx="7314120" cy="383040"/>
           </a:xfrm>
           <a:prstGeom prst="rect">
             <a:avLst/>
@@ -4948,7 +4930,7 @@
         <p:spPr>
           <a:xfrm>
             <a:off x="457200" y="4206240"/>
-            <a:ext cx="8229240" cy="292320"/>
+            <a:ext cx="8228520" cy="291600"/>
           </a:xfrm>
           <a:prstGeom prst="rect">
             <a:avLst/>
@@ -5003,7 +4985,7 @@
         <p:spPr>
           <a:xfrm>
             <a:off x="6949440" y="228600"/>
-            <a:ext cx="2559960" cy="2559960"/>
+            <a:ext cx="2559240" cy="2559240"/>
           </a:xfrm>
           <a:prstGeom prst="ellipse">
             <a:avLst/>
@@ -5038,7 +5020,7 @@
         <p:spPr>
           <a:xfrm>
             <a:off x="7589520" y="1325880"/>
-            <a:ext cx="1371240" cy="1371240"/>
+            <a:ext cx="1370520" cy="1370520"/>
           </a:xfrm>
           <a:prstGeom prst="ellipse">
             <a:avLst/>
@@ -5110,7 +5092,7 @@
         <p:spPr>
           <a:xfrm>
             <a:off x="0" y="0"/>
-            <a:ext cx="9143640" cy="1005480"/>
+            <a:ext cx="9142920" cy="1004760"/>
           </a:xfrm>
           <a:prstGeom prst="rect">
             <a:avLst/>
@@ -5141,7 +5123,7 @@
         <p:spPr>
           <a:xfrm>
             <a:off x="0" y="0"/>
-            <a:ext cx="109440" cy="1005480"/>
+            <a:ext cx="108720" cy="1004760"/>
           </a:xfrm>
           <a:prstGeom prst="rect">
             <a:avLst/>
@@ -5172,7 +5154,7 @@
         <p:spPr>
           <a:xfrm>
             <a:off x="255960" y="128160"/>
-            <a:ext cx="8503560" cy="548280"/>
+            <a:ext cx="8502840" cy="547560"/>
           </a:xfrm>
           <a:prstGeom prst="rect">
             <a:avLst/>
@@ -5227,7 +5209,7 @@
         <p:spPr>
           <a:xfrm>
             <a:off x="255960" y="658440"/>
-            <a:ext cx="8503560" cy="273960"/>
+            <a:ext cx="8502840" cy="273240"/>
           </a:xfrm>
           <a:prstGeom prst="rect">
             <a:avLst/>
@@ -5282,7 +5264,7 @@
         <p:spPr>
           <a:xfrm>
             <a:off x="320040" y="1143000"/>
-            <a:ext cx="2742840" cy="3913200"/>
+            <a:ext cx="2742120" cy="3912480"/>
           </a:xfrm>
           <a:prstGeom prst="rect">
             <a:avLst/>
@@ -5320,7 +5302,7 @@
         <p:spPr>
           <a:xfrm>
             <a:off x="320040" y="1143000"/>
-            <a:ext cx="2742840" cy="347040"/>
+            <a:ext cx="2742120" cy="346320"/>
           </a:xfrm>
           <a:prstGeom prst="rect">
             <a:avLst/>
@@ -5351,7 +5333,7 @@
         <p:spPr>
           <a:xfrm>
             <a:off x="429840" y="1143000"/>
-            <a:ext cx="2514240" cy="347040"/>
+            <a:ext cx="2513520" cy="346320"/>
           </a:xfrm>
           <a:prstGeom prst="rect">
             <a:avLst/>
@@ -5406,7 +5388,7 @@
         <p:spPr>
           <a:xfrm>
             <a:off x="411480" y="1536120"/>
-            <a:ext cx="2559960" cy="383760"/>
+            <a:ext cx="2559240" cy="383040"/>
           </a:xfrm>
           <a:prstGeom prst="rect">
             <a:avLst/>
@@ -5444,7 +5426,7 @@
         <p:spPr>
           <a:xfrm>
             <a:off x="411480" y="1536120"/>
-            <a:ext cx="2559960" cy="383760"/>
+            <a:ext cx="2559240" cy="383040"/>
           </a:xfrm>
           <a:prstGeom prst="rect">
             <a:avLst/>
@@ -5499,7 +5481,7 @@
         <p:spPr>
           <a:xfrm>
             <a:off x="393120" y="1956960"/>
-            <a:ext cx="2605680" cy="2578320"/>
+            <a:ext cx="2604960" cy="2577600"/>
           </a:xfrm>
           <a:prstGeom prst="rect">
             <a:avLst/>
@@ -5530,7 +5512,7 @@
         <p:spPr>
           <a:xfrm>
             <a:off x="393120" y="1956960"/>
-            <a:ext cx="566640" cy="200880"/>
+            <a:ext cx="565920" cy="200160"/>
           </a:xfrm>
           <a:prstGeom prst="rect">
             <a:avLst/>
@@ -5561,7 +5543,7 @@
         <p:spPr>
           <a:xfrm>
             <a:off x="393120" y="1956960"/>
-            <a:ext cx="566640" cy="200880"/>
+            <a:ext cx="565920" cy="200160"/>
           </a:xfrm>
           <a:prstGeom prst="rect">
             <a:avLst/>
@@ -5616,7 +5598,7 @@
         <p:spPr>
           <a:xfrm>
             <a:off x="484560" y="2212920"/>
-            <a:ext cx="2422800" cy="2276640"/>
+            <a:ext cx="2422080" cy="2275920"/>
           </a:xfrm>
           <a:prstGeom prst="rect">
             <a:avLst/>
@@ -6083,7 +6065,7 @@
         <p:spPr>
           <a:xfrm>
             <a:off x="411480" y="4572000"/>
-            <a:ext cx="2559960" cy="383760"/>
+            <a:ext cx="2559240" cy="383040"/>
           </a:xfrm>
           <a:prstGeom prst="rect">
             <a:avLst/>
@@ -6121,7 +6103,7 @@
         <p:spPr>
           <a:xfrm>
             <a:off x="411480" y="4572000"/>
-            <a:ext cx="2559960" cy="383760"/>
+            <a:ext cx="2559240" cy="383040"/>
           </a:xfrm>
           <a:prstGeom prst="rect">
             <a:avLst/>
@@ -6176,7 +6158,7 @@
         <p:spPr>
           <a:xfrm>
             <a:off x="3218760" y="1143000"/>
-            <a:ext cx="2742840" cy="3913200"/>
+            <a:ext cx="2742120" cy="3912480"/>
           </a:xfrm>
           <a:prstGeom prst="rect">
             <a:avLst/>
@@ -6214,7 +6196,7 @@
         <p:spPr>
           <a:xfrm>
             <a:off x="3218760" y="1143000"/>
-            <a:ext cx="2742840" cy="347040"/>
+            <a:ext cx="2742120" cy="346320"/>
           </a:xfrm>
           <a:prstGeom prst="rect">
             <a:avLst/>
@@ -6245,7 +6227,7 @@
         <p:spPr>
           <a:xfrm>
             <a:off x="3328560" y="1143000"/>
-            <a:ext cx="2514240" cy="347040"/>
+            <a:ext cx="2513520" cy="346320"/>
           </a:xfrm>
           <a:prstGeom prst="rect">
             <a:avLst/>
@@ -6300,7 +6282,7 @@
         <p:spPr>
           <a:xfrm>
             <a:off x="3310200" y="1536120"/>
-            <a:ext cx="2559960" cy="383760"/>
+            <a:ext cx="2559240" cy="383040"/>
           </a:xfrm>
           <a:prstGeom prst="rect">
             <a:avLst/>
@@ -6338,7 +6320,7 @@
         <p:spPr>
           <a:xfrm>
             <a:off x="3310200" y="1536120"/>
-            <a:ext cx="2559960" cy="383760"/>
+            <a:ext cx="2559240" cy="383040"/>
           </a:xfrm>
           <a:prstGeom prst="rect">
             <a:avLst/>
@@ -6393,7 +6375,7 @@
         <p:spPr>
           <a:xfrm>
             <a:off x="3291840" y="1956960"/>
-            <a:ext cx="2605680" cy="2578320"/>
+            <a:ext cx="2604960" cy="2577600"/>
           </a:xfrm>
           <a:prstGeom prst="rect">
             <a:avLst/>
@@ -6424,7 +6406,7 @@
         <p:spPr>
           <a:xfrm>
             <a:off x="3291840" y="1956960"/>
-            <a:ext cx="566640" cy="200880"/>
+            <a:ext cx="565920" cy="200160"/>
           </a:xfrm>
           <a:prstGeom prst="rect">
             <a:avLst/>
@@ -6455,7 +6437,7 @@
         <p:spPr>
           <a:xfrm>
             <a:off x="3291840" y="1956960"/>
-            <a:ext cx="566640" cy="200880"/>
+            <a:ext cx="565920" cy="200160"/>
           </a:xfrm>
           <a:prstGeom prst="rect">
             <a:avLst/>
@@ -6510,7 +6492,7 @@
         <p:spPr>
           <a:xfrm>
             <a:off x="3383280" y="2212920"/>
-            <a:ext cx="2422800" cy="2276640"/>
+            <a:ext cx="2422080" cy="2275920"/>
           </a:xfrm>
           <a:prstGeom prst="rect">
             <a:avLst/>
@@ -6923,7 +6905,7 @@
         <p:spPr>
           <a:xfrm>
             <a:off x="3310200" y="4572000"/>
-            <a:ext cx="2559960" cy="383760"/>
+            <a:ext cx="2559240" cy="383040"/>
           </a:xfrm>
           <a:prstGeom prst="rect">
             <a:avLst/>
@@ -6961,7 +6943,7 @@
         <p:spPr>
           <a:xfrm>
             <a:off x="3310200" y="4572000"/>
-            <a:ext cx="2559960" cy="383760"/>
+            <a:ext cx="2559240" cy="383040"/>
           </a:xfrm>
           <a:prstGeom prst="rect">
             <a:avLst/>
@@ -7016,7 +6998,7 @@
         <p:spPr>
           <a:xfrm>
             <a:off x="6108120" y="1143000"/>
-            <a:ext cx="2742840" cy="3913200"/>
+            <a:ext cx="2742120" cy="3912480"/>
           </a:xfrm>
           <a:prstGeom prst="rect">
             <a:avLst/>
@@ -7054,7 +7036,7 @@
         <p:spPr>
           <a:xfrm>
             <a:off x="6108120" y="1143000"/>
-            <a:ext cx="2742840" cy="347040"/>
+            <a:ext cx="2742120" cy="346320"/>
           </a:xfrm>
           <a:prstGeom prst="rect">
             <a:avLst/>
@@ -7085,7 +7067,7 @@
         <p:spPr>
           <a:xfrm>
             <a:off x="6217920" y="1143000"/>
-            <a:ext cx="2514240" cy="347040"/>
+            <a:ext cx="2513520" cy="346320"/>
           </a:xfrm>
           <a:prstGeom prst="rect">
             <a:avLst/>
@@ -7140,7 +7122,7 @@
         <p:spPr>
           <a:xfrm>
             <a:off x="6199560" y="1536120"/>
-            <a:ext cx="2559960" cy="383760"/>
+            <a:ext cx="2559240" cy="383040"/>
           </a:xfrm>
           <a:prstGeom prst="rect">
             <a:avLst/>
@@ -7178,7 +7160,7 @@
         <p:spPr>
           <a:xfrm>
             <a:off x="6199560" y="1536120"/>
-            <a:ext cx="2559960" cy="383760"/>
+            <a:ext cx="2559240" cy="383040"/>
           </a:xfrm>
           <a:prstGeom prst="rect">
             <a:avLst/>
@@ -7233,7 +7215,7 @@
         <p:spPr>
           <a:xfrm>
             <a:off x="6181200" y="1956960"/>
-            <a:ext cx="2605680" cy="2578320"/>
+            <a:ext cx="2604960" cy="2577600"/>
           </a:xfrm>
           <a:prstGeom prst="rect">
             <a:avLst/>
@@ -7264,7 +7246,7 @@
         <p:spPr>
           <a:xfrm>
             <a:off x="6181200" y="1956960"/>
-            <a:ext cx="566640" cy="200880"/>
+            <a:ext cx="565920" cy="200160"/>
           </a:xfrm>
           <a:prstGeom prst="rect">
             <a:avLst/>
@@ -7295,7 +7277,7 @@
         <p:spPr>
           <a:xfrm>
             <a:off x="6181200" y="1956960"/>
-            <a:ext cx="566640" cy="200880"/>
+            <a:ext cx="565920" cy="200160"/>
           </a:xfrm>
           <a:prstGeom prst="rect">
             <a:avLst/>
@@ -7350,7 +7332,7 @@
         <p:spPr>
           <a:xfrm>
             <a:off x="6272640" y="2212920"/>
-            <a:ext cx="2422800" cy="2276640"/>
+            <a:ext cx="2422080" cy="2275920"/>
           </a:xfrm>
           <a:prstGeom prst="rect">
             <a:avLst/>
@@ -7783,7 +7765,7 @@
         <p:spPr>
           <a:xfrm>
             <a:off x="6199560" y="4572000"/>
-            <a:ext cx="2559960" cy="383760"/>
+            <a:ext cx="2559240" cy="383040"/>
           </a:xfrm>
           <a:prstGeom prst="rect">
             <a:avLst/>
@@ -7821,7 +7803,7 @@
         <p:spPr>
           <a:xfrm>
             <a:off x="6199560" y="4572000"/>
-            <a:ext cx="2559960" cy="383760"/>
+            <a:ext cx="2559240" cy="383040"/>
           </a:xfrm>
           <a:prstGeom prst="rect">
             <a:avLst/>
@@ -7913,7 +7895,7 @@
         <p:spPr>
           <a:xfrm>
             <a:off x="0" y="0"/>
-            <a:ext cx="9143640" cy="1005480"/>
+            <a:ext cx="9142920" cy="1004760"/>
           </a:xfrm>
           <a:prstGeom prst="rect">
             <a:avLst/>
@@ -7944,7 +7926,7 @@
         <p:spPr>
           <a:xfrm>
             <a:off x="0" y="0"/>
-            <a:ext cx="109440" cy="1005480"/>
+            <a:ext cx="108720" cy="1004760"/>
           </a:xfrm>
           <a:prstGeom prst="rect">
             <a:avLst/>
@@ -7975,7 +7957,7 @@
         <p:spPr>
           <a:xfrm>
             <a:off x="255960" y="128160"/>
-            <a:ext cx="8503560" cy="548280"/>
+            <a:ext cx="8502840" cy="547560"/>
           </a:xfrm>
           <a:prstGeom prst="rect">
             <a:avLst/>
@@ -8030,7 +8012,7 @@
         <p:spPr>
           <a:xfrm>
             <a:off x="255960" y="658440"/>
-            <a:ext cx="8503560" cy="273960"/>
+            <a:ext cx="8502840" cy="273240"/>
           </a:xfrm>
           <a:prstGeom prst="rect">
             <a:avLst/>
@@ -8085,7 +8067,7 @@
         <p:spPr>
           <a:xfrm>
             <a:off x="320040" y="1143000"/>
-            <a:ext cx="4114440" cy="2194200"/>
+            <a:ext cx="4113720" cy="2193480"/>
           </a:xfrm>
           <a:prstGeom prst="rect">
             <a:avLst/>
@@ -8123,7 +8105,7 @@
         <p:spPr>
           <a:xfrm>
             <a:off x="457200" y="1261800"/>
-            <a:ext cx="3748680" cy="273960"/>
+            <a:ext cx="3747960" cy="273240"/>
           </a:xfrm>
           <a:prstGeom prst="rect">
             <a:avLst/>
@@ -8178,7 +8160,7 @@
         <p:spPr>
           <a:xfrm>
             <a:off x="457200" y="1572840"/>
-            <a:ext cx="3748680" cy="347040"/>
+            <a:ext cx="3747960" cy="346320"/>
           </a:xfrm>
           <a:prstGeom prst="rect">
             <a:avLst/>
@@ -8233,7 +8215,7 @@
         <p:spPr>
           <a:xfrm>
             <a:off x="365760" y="1956960"/>
-            <a:ext cx="4004640" cy="1261440"/>
+            <a:ext cx="4003920" cy="1260720"/>
           </a:xfrm>
           <a:prstGeom prst="rect">
             <a:avLst/>
@@ -8264,7 +8246,7 @@
         <p:spPr>
           <a:xfrm>
             <a:off x="365760" y="1956960"/>
-            <a:ext cx="566640" cy="200880"/>
+            <a:ext cx="565920" cy="200160"/>
           </a:xfrm>
           <a:prstGeom prst="rect">
             <a:avLst/>
@@ -8295,7 +8277,7 @@
         <p:spPr>
           <a:xfrm>
             <a:off x="365760" y="1956960"/>
-            <a:ext cx="566640" cy="200880"/>
+            <a:ext cx="565920" cy="200160"/>
           </a:xfrm>
           <a:prstGeom prst="rect">
             <a:avLst/>
@@ -8350,7 +8332,7 @@
         <p:spPr>
           <a:xfrm>
             <a:off x="457200" y="2212920"/>
-            <a:ext cx="3821760" cy="959760"/>
+            <a:ext cx="3821040" cy="959040"/>
           </a:xfrm>
           <a:prstGeom prst="rect">
             <a:avLst/>
@@ -8545,7 +8527,7 @@
         <p:spPr>
           <a:xfrm>
             <a:off x="4709160" y="1143000"/>
-            <a:ext cx="4114440" cy="2194200"/>
+            <a:ext cx="4113720" cy="2193480"/>
           </a:xfrm>
           <a:prstGeom prst="rect">
             <a:avLst/>
@@ -8583,7 +8565,7 @@
         <p:spPr>
           <a:xfrm>
             <a:off x="4846320" y="1261800"/>
-            <a:ext cx="3748680" cy="273960"/>
+            <a:ext cx="3747960" cy="273240"/>
           </a:xfrm>
           <a:prstGeom prst="rect">
             <a:avLst/>
@@ -8638,7 +8620,7 @@
         <p:spPr>
           <a:xfrm>
             <a:off x="4846320" y="1627560"/>
-            <a:ext cx="3821760" cy="804240"/>
+            <a:ext cx="3821040" cy="803520"/>
           </a:xfrm>
           <a:prstGeom prst="rect">
             <a:avLst/>
@@ -8676,7 +8658,7 @@
         <p:spPr>
           <a:xfrm>
             <a:off x="4846320" y="1627560"/>
-            <a:ext cx="72720" cy="804240"/>
+            <a:ext cx="72000" cy="803520"/>
           </a:xfrm>
           <a:prstGeom prst="rect">
             <a:avLst/>
@@ -8707,7 +8689,7 @@
         <p:spPr>
           <a:xfrm>
             <a:off x="5010840" y="1627560"/>
-            <a:ext cx="1508400" cy="347040"/>
+            <a:ext cx="1507680" cy="346320"/>
           </a:xfrm>
           <a:prstGeom prst="rect">
             <a:avLst/>
@@ -8762,7 +8744,7 @@
         <p:spPr>
           <a:xfrm>
             <a:off x="5010840" y="1974960"/>
-            <a:ext cx="3657240" cy="255600"/>
+            <a:ext cx="3656520" cy="254880"/>
           </a:xfrm>
           <a:prstGeom prst="rect">
             <a:avLst/>
@@ -8817,7 +8799,7 @@
         <p:spPr>
           <a:xfrm>
             <a:off x="5010840" y="2231280"/>
-            <a:ext cx="3657240" cy="200880"/>
+            <a:ext cx="3656520" cy="200160"/>
           </a:xfrm>
           <a:prstGeom prst="rect">
             <a:avLst/>
@@ -8872,7 +8854,7 @@
         <p:spPr>
           <a:xfrm>
             <a:off x="4846320" y="2541960"/>
-            <a:ext cx="3821760" cy="804240"/>
+            <a:ext cx="3821040" cy="803520"/>
           </a:xfrm>
           <a:prstGeom prst="rect">
             <a:avLst/>
@@ -8910,7 +8892,7 @@
         <p:spPr>
           <a:xfrm>
             <a:off x="4846320" y="2541960"/>
-            <a:ext cx="72720" cy="804240"/>
+            <a:ext cx="72000" cy="803520"/>
           </a:xfrm>
           <a:prstGeom prst="rect">
             <a:avLst/>
@@ -8941,7 +8923,7 @@
         <p:spPr>
           <a:xfrm>
             <a:off x="5010840" y="2541960"/>
-            <a:ext cx="1508400" cy="347040"/>
+            <a:ext cx="1507680" cy="346320"/>
           </a:xfrm>
           <a:prstGeom prst="rect">
             <a:avLst/>
@@ -8996,7 +8978,7 @@
         <p:spPr>
           <a:xfrm>
             <a:off x="5010840" y="2889360"/>
-            <a:ext cx="3657240" cy="255600"/>
+            <a:ext cx="3656520" cy="254880"/>
           </a:xfrm>
           <a:prstGeom prst="rect">
             <a:avLst/>
@@ -9051,7 +9033,7 @@
         <p:spPr>
           <a:xfrm>
             <a:off x="5010840" y="3145680"/>
-            <a:ext cx="3657240" cy="200880"/>
+            <a:ext cx="3656520" cy="200160"/>
           </a:xfrm>
           <a:prstGeom prst="rect">
             <a:avLst/>
@@ -9106,7 +9088,7 @@
         <p:spPr>
           <a:xfrm>
             <a:off x="320040" y="3429000"/>
-            <a:ext cx="8503560" cy="1535760"/>
+            <a:ext cx="8502840" cy="1535040"/>
           </a:xfrm>
           <a:prstGeom prst="rect">
             <a:avLst/>
@@ -9144,7 +9126,7 @@
         <p:spPr>
           <a:xfrm>
             <a:off x="320040" y="3429000"/>
-            <a:ext cx="8503560" cy="347040"/>
+            <a:ext cx="8502840" cy="346320"/>
           </a:xfrm>
           <a:prstGeom prst="rect">
             <a:avLst/>
@@ -9175,7 +9157,7 @@
         <p:spPr>
           <a:xfrm>
             <a:off x="457200" y="3429000"/>
-            <a:ext cx="8046360" cy="347040"/>
+            <a:ext cx="8045640" cy="346320"/>
           </a:xfrm>
           <a:prstGeom prst="rect">
             <a:avLst/>
@@ -9230,7 +9212,7 @@
         <p:spPr>
           <a:xfrm>
             <a:off x="457200" y="3822120"/>
-            <a:ext cx="2605680" cy="255600"/>
+            <a:ext cx="2604960" cy="254880"/>
           </a:xfrm>
           <a:prstGeom prst="rect">
             <a:avLst/>
@@ -9285,7 +9267,7 @@
         <p:spPr>
           <a:xfrm>
             <a:off x="457200" y="4096440"/>
-            <a:ext cx="2605680" cy="804240"/>
+            <a:ext cx="2604960" cy="803520"/>
           </a:xfrm>
           <a:prstGeom prst="rect">
             <a:avLst/>
@@ -9340,7 +9322,7 @@
         <p:spPr>
           <a:xfrm>
             <a:off x="3291840" y="3822120"/>
-            <a:ext cx="2605680" cy="255600"/>
+            <a:ext cx="2604960" cy="254880"/>
           </a:xfrm>
           <a:prstGeom prst="rect">
             <a:avLst/>
@@ -9395,7 +9377,7 @@
         <p:spPr>
           <a:xfrm>
             <a:off x="3291840" y="4096440"/>
-            <a:ext cx="2605680" cy="804240"/>
+            <a:ext cx="2604960" cy="803520"/>
           </a:xfrm>
           <a:prstGeom prst="rect">
             <a:avLst/>
@@ -9450,7 +9432,7 @@
         <p:spPr>
           <a:xfrm>
             <a:off x="6126480" y="3822120"/>
-            <a:ext cx="2605680" cy="255600"/>
+            <a:ext cx="2604960" cy="254880"/>
           </a:xfrm>
           <a:prstGeom prst="rect">
             <a:avLst/>
@@ -9505,7 +9487,7 @@
         <p:spPr>
           <a:xfrm>
             <a:off x="6126480" y="4096440"/>
-            <a:ext cx="2605680" cy="804240"/>
+            <a:ext cx="2604960" cy="803520"/>
           </a:xfrm>
           <a:prstGeom prst="rect">
             <a:avLst/>
@@ -9560,7 +9542,7 @@
         <p:spPr>
           <a:xfrm>
             <a:off x="320040" y="4773240"/>
-            <a:ext cx="8503560" cy="273960"/>
+            <a:ext cx="8502840" cy="273240"/>
           </a:xfrm>
           <a:prstGeom prst="rect">
             <a:avLst/>
@@ -9598,7 +9580,7 @@
         <p:spPr>
           <a:xfrm>
             <a:off x="320040" y="4773240"/>
-            <a:ext cx="91080" cy="273960"/>
+            <a:ext cx="90360" cy="273240"/>
           </a:xfrm>
           <a:prstGeom prst="rect">
             <a:avLst/>
@@ -9629,7 +9611,7 @@
         <p:spPr>
           <a:xfrm>
             <a:off x="502920" y="4773240"/>
-            <a:ext cx="8229240" cy="273960"/>
+            <a:ext cx="8228520" cy="273240"/>
           </a:xfrm>
           <a:prstGeom prst="rect">
             <a:avLst/>
@@ -9731,7 +9713,7 @@
         <p:spPr>
           <a:xfrm>
             <a:off x="0" y="0"/>
-            <a:ext cx="9143640" cy="1005480"/>
+            <a:ext cx="9142920" cy="1004760"/>
           </a:xfrm>
           <a:prstGeom prst="rect">
             <a:avLst/>
@@ -9762,7 +9744,7 @@
         <p:spPr>
           <a:xfrm>
             <a:off x="0" y="0"/>
-            <a:ext cx="109440" cy="1005480"/>
+            <a:ext cx="108720" cy="1004760"/>
           </a:xfrm>
           <a:prstGeom prst="rect">
             <a:avLst/>
@@ -9793,7 +9775,7 @@
         <p:spPr>
           <a:xfrm>
             <a:off x="255960" y="128160"/>
-            <a:ext cx="8503560" cy="548280"/>
+            <a:ext cx="8502840" cy="547560"/>
           </a:xfrm>
           <a:prstGeom prst="rect">
             <a:avLst/>
@@ -9848,7 +9830,7 @@
         <p:spPr>
           <a:xfrm>
             <a:off x="255960" y="658440"/>
-            <a:ext cx="8503560" cy="273960"/>
+            <a:ext cx="8502840" cy="273240"/>
           </a:xfrm>
           <a:prstGeom prst="rect">
             <a:avLst/>
@@ -9903,7 +9885,7 @@
         <p:spPr>
           <a:xfrm>
             <a:off x="320040" y="1143000"/>
-            <a:ext cx="4205880" cy="3931560"/>
+            <a:ext cx="4205160" cy="3930840"/>
           </a:xfrm>
           <a:prstGeom prst="rect">
             <a:avLst/>
@@ -9941,7 +9923,7 @@
         <p:spPr>
           <a:xfrm>
             <a:off x="365760" y="1188720"/>
-            <a:ext cx="4114440" cy="3858480"/>
+            <a:ext cx="4113720" cy="3857760"/>
           </a:xfrm>
           <a:prstGeom prst="rect">
             <a:avLst/>
@@ -9972,7 +9954,7 @@
         <p:spPr>
           <a:xfrm>
             <a:off x="365760" y="1188720"/>
-            <a:ext cx="566640" cy="200880"/>
+            <a:ext cx="565920" cy="200160"/>
           </a:xfrm>
           <a:prstGeom prst="rect">
             <a:avLst/>
@@ -10003,7 +9985,7 @@
         <p:spPr>
           <a:xfrm>
             <a:off x="365760" y="1188720"/>
-            <a:ext cx="566640" cy="200880"/>
+            <a:ext cx="565920" cy="200160"/>
           </a:xfrm>
           <a:prstGeom prst="rect">
             <a:avLst/>
@@ -10058,7 +10040,7 @@
         <p:spPr>
           <a:xfrm>
             <a:off x="457200" y="1426320"/>
-            <a:ext cx="3931560" cy="3584160"/>
+            <a:ext cx="3930840" cy="3583440"/>
           </a:xfrm>
           <a:prstGeom prst="rect">
             <a:avLst/>
@@ -10903,7 +10885,7 @@
         <p:spPr>
           <a:xfrm>
             <a:off x="4709160" y="1143000"/>
-            <a:ext cx="4114440" cy="3931560"/>
+            <a:ext cx="4113720" cy="3930840"/>
           </a:xfrm>
           <a:prstGeom prst="rect">
             <a:avLst/>
@@ -10941,7 +10923,7 @@
         <p:spPr>
           <a:xfrm>
             <a:off x="4754880" y="1188720"/>
-            <a:ext cx="4114440" cy="3858480"/>
+            <a:ext cx="4113720" cy="3857760"/>
           </a:xfrm>
           <a:prstGeom prst="rect">
             <a:avLst/>
@@ -10972,7 +10954,7 @@
         <p:spPr>
           <a:xfrm>
             <a:off x="4754880" y="1188720"/>
-            <a:ext cx="566640" cy="200880"/>
+            <a:ext cx="565920" cy="200160"/>
           </a:xfrm>
           <a:prstGeom prst="rect">
             <a:avLst/>
@@ -11003,7 +10985,7 @@
         <p:spPr>
           <a:xfrm>
             <a:off x="4754880" y="1188720"/>
-            <a:ext cx="566640" cy="200880"/>
+            <a:ext cx="565920" cy="200160"/>
           </a:xfrm>
           <a:prstGeom prst="rect">
             <a:avLst/>
@@ -11058,7 +11040,7 @@
         <p:spPr>
           <a:xfrm>
             <a:off x="4846320" y="1426320"/>
-            <a:ext cx="3931560" cy="3584160"/>
+            <a:ext cx="3930840" cy="3583440"/>
           </a:xfrm>
           <a:prstGeom prst="rect">
             <a:avLst/>
@@ -11894,7 +11876,7 @@
         <p:spPr>
           <a:xfrm>
             <a:off x="0" y="0"/>
-            <a:ext cx="9143640" cy="1005480"/>
+            <a:ext cx="9142920" cy="1004760"/>
           </a:xfrm>
           <a:prstGeom prst="rect">
             <a:avLst/>
@@ -11925,7 +11907,7 @@
         <p:spPr>
           <a:xfrm>
             <a:off x="0" y="0"/>
-            <a:ext cx="109440" cy="1005480"/>
+            <a:ext cx="108720" cy="1004760"/>
           </a:xfrm>
           <a:prstGeom prst="rect">
             <a:avLst/>
@@ -11956,7 +11938,7 @@
         <p:spPr>
           <a:xfrm>
             <a:off x="255960" y="128160"/>
-            <a:ext cx="8503560" cy="548280"/>
+            <a:ext cx="8502840" cy="547560"/>
           </a:xfrm>
           <a:prstGeom prst="rect">
             <a:avLst/>
@@ -12011,7 +11993,7 @@
         <p:spPr>
           <a:xfrm>
             <a:off x="255960" y="658440"/>
-            <a:ext cx="8503560" cy="273960"/>
+            <a:ext cx="8502840" cy="273240"/>
           </a:xfrm>
           <a:prstGeom prst="rect">
             <a:avLst/>
@@ -12066,7 +12048,7 @@
         <p:spPr>
           <a:xfrm>
             <a:off x="320040" y="1143000"/>
-            <a:ext cx="8503560" cy="365400"/>
+            <a:ext cx="8502840" cy="364680"/>
           </a:xfrm>
           <a:prstGeom prst="rect">
             <a:avLst/>
@@ -12097,7 +12079,7 @@
         <p:spPr>
           <a:xfrm>
             <a:off x="457200" y="1143000"/>
-            <a:ext cx="3291480" cy="365400"/>
+            <a:ext cx="3290760" cy="364680"/>
           </a:xfrm>
           <a:prstGeom prst="rect">
             <a:avLst/>
@@ -12152,7 +12134,7 @@
         <p:spPr>
           <a:xfrm>
             <a:off x="3749040" y="1143000"/>
-            <a:ext cx="1096920" cy="365400"/>
+            <a:ext cx="1096200" cy="364680"/>
           </a:xfrm>
           <a:prstGeom prst="rect">
             <a:avLst/>
@@ -12207,7 +12189,7 @@
         <p:spPr>
           <a:xfrm>
             <a:off x="4846320" y="1143000"/>
-            <a:ext cx="3931560" cy="365400"/>
+            <a:ext cx="3930840" cy="364680"/>
           </a:xfrm>
           <a:prstGeom prst="rect">
             <a:avLst/>
@@ -12262,7 +12244,7 @@
         <p:spPr>
           <a:xfrm>
             <a:off x="320040" y="1554480"/>
-            <a:ext cx="8503560" cy="429480"/>
+            <a:ext cx="8502840" cy="428760"/>
           </a:xfrm>
           <a:prstGeom prst="rect">
             <a:avLst/>
@@ -12300,7 +12282,7 @@
         <p:spPr>
           <a:xfrm>
             <a:off x="320040" y="1554480"/>
-            <a:ext cx="72720" cy="456840"/>
+            <a:ext cx="72000" cy="456120"/>
           </a:xfrm>
           <a:prstGeom prst="rect">
             <a:avLst/>
@@ -12331,7 +12313,7 @@
         <p:spPr>
           <a:xfrm>
             <a:off x="457200" y="1554480"/>
-            <a:ext cx="3245760" cy="456840"/>
+            <a:ext cx="3245040" cy="456120"/>
           </a:xfrm>
           <a:prstGeom prst="rect">
             <a:avLst/>
@@ -12386,7 +12368,7 @@
         <p:spPr>
           <a:xfrm>
             <a:off x="3749040" y="1554480"/>
-            <a:ext cx="1051200" cy="456840"/>
+            <a:ext cx="1050480" cy="456120"/>
           </a:xfrm>
           <a:prstGeom prst="rect">
             <a:avLst/>
@@ -12441,7 +12423,7 @@
         <p:spPr>
           <a:xfrm>
             <a:off x="4846320" y="1554480"/>
-            <a:ext cx="3885840" cy="456840"/>
+            <a:ext cx="3885120" cy="456120"/>
           </a:xfrm>
           <a:prstGeom prst="rect">
             <a:avLst/>
@@ -12496,7 +12478,7 @@
         <p:spPr>
           <a:xfrm>
             <a:off x="320040" y="2030040"/>
-            <a:ext cx="8503560" cy="429480"/>
+            <a:ext cx="8502840" cy="428760"/>
           </a:xfrm>
           <a:prstGeom prst="rect">
             <a:avLst/>
@@ -12534,7 +12516,7 @@
         <p:spPr>
           <a:xfrm>
             <a:off x="320040" y="2030040"/>
-            <a:ext cx="72720" cy="456840"/>
+            <a:ext cx="72000" cy="456120"/>
           </a:xfrm>
           <a:prstGeom prst="rect">
             <a:avLst/>
@@ -12565,7 +12547,7 @@
         <p:spPr>
           <a:xfrm>
             <a:off x="457200" y="2030040"/>
-            <a:ext cx="3245760" cy="456840"/>
+            <a:ext cx="3245040" cy="456120"/>
           </a:xfrm>
           <a:prstGeom prst="rect">
             <a:avLst/>
@@ -12620,7 +12602,7 @@
         <p:spPr>
           <a:xfrm>
             <a:off x="3749040" y="2030040"/>
-            <a:ext cx="1051200" cy="456840"/>
+            <a:ext cx="1050480" cy="456120"/>
           </a:xfrm>
           <a:prstGeom prst="rect">
             <a:avLst/>
@@ -12675,7 +12657,7 @@
         <p:spPr>
           <a:xfrm>
             <a:off x="4846320" y="2030040"/>
-            <a:ext cx="3885840" cy="456840"/>
+            <a:ext cx="3885120" cy="456120"/>
           </a:xfrm>
           <a:prstGeom prst="rect">
             <a:avLst/>
@@ -12730,7 +12712,7 @@
         <p:spPr>
           <a:xfrm>
             <a:off x="320040" y="2505600"/>
-            <a:ext cx="8503560" cy="429480"/>
+            <a:ext cx="8502840" cy="428760"/>
           </a:xfrm>
           <a:prstGeom prst="rect">
             <a:avLst/>
@@ -12768,7 +12750,7 @@
         <p:spPr>
           <a:xfrm>
             <a:off x="320040" y="2505600"/>
-            <a:ext cx="72720" cy="456840"/>
+            <a:ext cx="72000" cy="456120"/>
           </a:xfrm>
           <a:prstGeom prst="rect">
             <a:avLst/>
@@ -12799,7 +12781,7 @@
         <p:spPr>
           <a:xfrm>
             <a:off x="457200" y="2505600"/>
-            <a:ext cx="3245760" cy="456840"/>
+            <a:ext cx="3245040" cy="456120"/>
           </a:xfrm>
           <a:prstGeom prst="rect">
             <a:avLst/>
@@ -12854,7 +12836,7 @@
         <p:spPr>
           <a:xfrm>
             <a:off x="3749040" y="2505600"/>
-            <a:ext cx="1051200" cy="456840"/>
+            <a:ext cx="1050480" cy="456120"/>
           </a:xfrm>
           <a:prstGeom prst="rect">
             <a:avLst/>
@@ -12909,7 +12891,7 @@
         <p:spPr>
           <a:xfrm>
             <a:off x="4846320" y="2505600"/>
-            <a:ext cx="3885840" cy="456840"/>
+            <a:ext cx="3885120" cy="456120"/>
           </a:xfrm>
           <a:prstGeom prst="rect">
             <a:avLst/>
@@ -12964,7 +12946,7 @@
         <p:spPr>
           <a:xfrm>
             <a:off x="320040" y="2980800"/>
-            <a:ext cx="8503560" cy="429480"/>
+            <a:ext cx="8502840" cy="428760"/>
           </a:xfrm>
           <a:prstGeom prst="rect">
             <a:avLst/>
@@ -13002,7 +12984,7 @@
         <p:spPr>
           <a:xfrm>
             <a:off x="320040" y="2980800"/>
-            <a:ext cx="72720" cy="456840"/>
+            <a:ext cx="72000" cy="456120"/>
           </a:xfrm>
           <a:prstGeom prst="rect">
             <a:avLst/>
@@ -13033,7 +13015,7 @@
         <p:spPr>
           <a:xfrm>
             <a:off x="457200" y="2980800"/>
-            <a:ext cx="3245760" cy="456840"/>
+            <a:ext cx="3245040" cy="456120"/>
           </a:xfrm>
           <a:prstGeom prst="rect">
             <a:avLst/>
@@ -13088,7 +13070,7 @@
         <p:spPr>
           <a:xfrm>
             <a:off x="3749040" y="2980800"/>
-            <a:ext cx="1051200" cy="456840"/>
+            <a:ext cx="1050480" cy="456120"/>
           </a:xfrm>
           <a:prstGeom prst="rect">
             <a:avLst/>
@@ -13153,7 +13135,7 @@
         <p:spPr>
           <a:xfrm>
             <a:off x="4846320" y="2980800"/>
-            <a:ext cx="3885840" cy="456840"/>
+            <a:ext cx="3885120" cy="456120"/>
           </a:xfrm>
           <a:prstGeom prst="rect">
             <a:avLst/>
@@ -13208,7 +13190,7 @@
         <p:spPr>
           <a:xfrm>
             <a:off x="320040" y="3456360"/>
-            <a:ext cx="8503560" cy="429480"/>
+            <a:ext cx="8502840" cy="428760"/>
           </a:xfrm>
           <a:prstGeom prst="rect">
             <a:avLst/>
@@ -13246,7 +13228,7 @@
         <p:spPr>
           <a:xfrm>
             <a:off x="320040" y="3456360"/>
-            <a:ext cx="72720" cy="456840"/>
+            <a:ext cx="72000" cy="456120"/>
           </a:xfrm>
           <a:prstGeom prst="rect">
             <a:avLst/>
@@ -13277,7 +13259,7 @@
         <p:spPr>
           <a:xfrm>
             <a:off x="457200" y="3456360"/>
-            <a:ext cx="3245760" cy="456840"/>
+            <a:ext cx="3245040" cy="456120"/>
           </a:xfrm>
           <a:prstGeom prst="rect">
             <a:avLst/>
@@ -13332,7 +13314,7 @@
         <p:spPr>
           <a:xfrm>
             <a:off x="3749040" y="3456360"/>
-            <a:ext cx="1051200" cy="456840"/>
+            <a:ext cx="1050480" cy="456120"/>
           </a:xfrm>
           <a:prstGeom prst="rect">
             <a:avLst/>
@@ -13387,7 +13369,7 @@
         <p:spPr>
           <a:xfrm>
             <a:off x="4846320" y="3456360"/>
-            <a:ext cx="3885840" cy="456840"/>
+            <a:ext cx="3885120" cy="456120"/>
           </a:xfrm>
           <a:prstGeom prst="rect">
             <a:avLst/>
@@ -13442,7 +13424,7 @@
         <p:spPr>
           <a:xfrm>
             <a:off x="320040" y="3931920"/>
-            <a:ext cx="8503560" cy="429480"/>
+            <a:ext cx="8502840" cy="428760"/>
           </a:xfrm>
           <a:prstGeom prst="rect">
             <a:avLst/>
@@ -13480,7 +13462,7 @@
         <p:spPr>
           <a:xfrm>
             <a:off x="320040" y="3931920"/>
-            <a:ext cx="72720" cy="456840"/>
+            <a:ext cx="72000" cy="456120"/>
           </a:xfrm>
           <a:prstGeom prst="rect">
             <a:avLst/>
@@ -13511,7 +13493,7 @@
         <p:spPr>
           <a:xfrm>
             <a:off x="457200" y="3931920"/>
-            <a:ext cx="3245760" cy="456840"/>
+            <a:ext cx="3245040" cy="456120"/>
           </a:xfrm>
           <a:prstGeom prst="rect">
             <a:avLst/>
@@ -13566,7 +13548,7 @@
         <p:spPr>
           <a:xfrm>
             <a:off x="3749040" y="3931920"/>
-            <a:ext cx="1051200" cy="456840"/>
+            <a:ext cx="1050480" cy="456120"/>
           </a:xfrm>
           <a:prstGeom prst="rect">
             <a:avLst/>
@@ -13621,7 +13603,7 @@
         <p:spPr>
           <a:xfrm>
             <a:off x="4846320" y="3931920"/>
-            <a:ext cx="3885840" cy="456840"/>
+            <a:ext cx="3885120" cy="456120"/>
           </a:xfrm>
           <a:prstGeom prst="rect">
             <a:avLst/>
@@ -13676,7 +13658,7 @@
         <p:spPr>
           <a:xfrm>
             <a:off x="320040" y="4407480"/>
-            <a:ext cx="8503560" cy="429480"/>
+            <a:ext cx="8502840" cy="428760"/>
           </a:xfrm>
           <a:prstGeom prst="rect">
             <a:avLst/>
@@ -13714,7 +13696,7 @@
         <p:spPr>
           <a:xfrm>
             <a:off x="320040" y="4407480"/>
-            <a:ext cx="72720" cy="456840"/>
+            <a:ext cx="72000" cy="456120"/>
           </a:xfrm>
           <a:prstGeom prst="rect">
             <a:avLst/>
@@ -13745,7 +13727,7 @@
         <p:spPr>
           <a:xfrm>
             <a:off x="457200" y="4407480"/>
-            <a:ext cx="3245760" cy="456840"/>
+            <a:ext cx="3245040" cy="456120"/>
           </a:xfrm>
           <a:prstGeom prst="rect">
             <a:avLst/>
@@ -13800,7 +13782,7 @@
         <p:spPr>
           <a:xfrm>
             <a:off x="3749040" y="4407480"/>
-            <a:ext cx="1051200" cy="456840"/>
+            <a:ext cx="1050480" cy="456120"/>
           </a:xfrm>
           <a:prstGeom prst="rect">
             <a:avLst/>
@@ -13855,7 +13837,7 @@
         <p:spPr>
           <a:xfrm>
             <a:off x="4846320" y="4407480"/>
-            <a:ext cx="3885840" cy="456840"/>
+            <a:ext cx="3885120" cy="456120"/>
           </a:xfrm>
           <a:prstGeom prst="rect">
             <a:avLst/>
@@ -13910,7 +13892,7 @@
         <p:spPr>
           <a:xfrm>
             <a:off x="320040" y="4773240"/>
-            <a:ext cx="8503560" cy="273960"/>
+            <a:ext cx="8502840" cy="273240"/>
           </a:xfrm>
           <a:prstGeom prst="rect">
             <a:avLst/>
@@ -13948,7 +13930,7 @@
         <p:spPr>
           <a:xfrm>
             <a:off x="320040" y="4773240"/>
-            <a:ext cx="91080" cy="273960"/>
+            <a:ext cx="90360" cy="273240"/>
           </a:xfrm>
           <a:prstGeom prst="rect">
             <a:avLst/>
@@ -13979,7 +13961,7 @@
         <p:spPr>
           <a:xfrm>
             <a:off x="502920" y="4773240"/>
-            <a:ext cx="8229240" cy="273960"/>
+            <a:ext cx="8228520" cy="273240"/>
           </a:xfrm>
           <a:prstGeom prst="rect">
             <a:avLst/>
@@ -14081,7 +14063,7 @@
         <p:spPr>
           <a:xfrm>
             <a:off x="0" y="0"/>
-            <a:ext cx="9143640" cy="1005480"/>
+            <a:ext cx="9142920" cy="1004760"/>
           </a:xfrm>
           <a:prstGeom prst="rect">
             <a:avLst/>
@@ -14112,7 +14094,7 @@
         <p:spPr>
           <a:xfrm>
             <a:off x="0" y="0"/>
-            <a:ext cx="109440" cy="1005480"/>
+            <a:ext cx="108720" cy="1004760"/>
           </a:xfrm>
           <a:prstGeom prst="rect">
             <a:avLst/>
@@ -14143,7 +14125,7 @@
         <p:spPr>
           <a:xfrm>
             <a:off x="255960" y="128160"/>
-            <a:ext cx="8503560" cy="548280"/>
+            <a:ext cx="8502840" cy="547560"/>
           </a:xfrm>
           <a:prstGeom prst="rect">
             <a:avLst/>
@@ -14198,7 +14180,7 @@
         <p:spPr>
           <a:xfrm>
             <a:off x="255960" y="658440"/>
-            <a:ext cx="8503560" cy="273960"/>
+            <a:ext cx="8502840" cy="273240"/>
           </a:xfrm>
           <a:prstGeom prst="rect">
             <a:avLst/>
@@ -14253,7 +14235,7 @@
         <p:spPr>
           <a:xfrm>
             <a:off x="320040" y="1143000"/>
-            <a:ext cx="8503560" cy="1535760"/>
+            <a:ext cx="8502840" cy="1535040"/>
           </a:xfrm>
           <a:prstGeom prst="rect">
             <a:avLst/>
@@ -14291,7 +14273,7 @@
         <p:spPr>
           <a:xfrm>
             <a:off x="457200" y="1234440"/>
-            <a:ext cx="8046360" cy="255600"/>
+            <a:ext cx="8045640" cy="254880"/>
           </a:xfrm>
           <a:prstGeom prst="rect">
             <a:avLst/>
@@ -14346,7 +14328,7 @@
         <p:spPr>
           <a:xfrm>
             <a:off x="365760" y="1517760"/>
-            <a:ext cx="8412120" cy="1078560"/>
+            <a:ext cx="8453880" cy="1181880"/>
           </a:xfrm>
           <a:prstGeom prst="rect">
             <a:avLst/>
@@ -14377,7 +14359,7 @@
         <p:spPr>
           <a:xfrm>
             <a:off x="365760" y="1517760"/>
-            <a:ext cx="566640" cy="200880"/>
+            <a:ext cx="565920" cy="200160"/>
           </a:xfrm>
           <a:prstGeom prst="rect">
             <a:avLst/>
@@ -14408,7 +14390,7 @@
         <p:spPr>
           <a:xfrm>
             <a:off x="365760" y="1517760"/>
-            <a:ext cx="566640" cy="200880"/>
+            <a:ext cx="565920" cy="200160"/>
           </a:xfrm>
           <a:prstGeom prst="rect">
             <a:avLst/>
@@ -14463,7 +14445,7 @@
         <p:spPr>
           <a:xfrm>
             <a:off x="457200" y="1774080"/>
-            <a:ext cx="8229240" cy="776880"/>
+            <a:ext cx="8362440" cy="925560"/>
           </a:xfrm>
           <a:prstGeom prst="rect">
             <a:avLst/>
@@ -14614,7 +14596,7 @@
         <p:spPr>
           <a:xfrm>
             <a:off x="320040" y="2788920"/>
-            <a:ext cx="2742840" cy="1992960"/>
+            <a:ext cx="2742120" cy="1992240"/>
           </a:xfrm>
           <a:prstGeom prst="rect">
             <a:avLst/>
@@ -14652,7 +14634,7 @@
         <p:spPr>
           <a:xfrm>
             <a:off x="320040" y="2788920"/>
-            <a:ext cx="2742840" cy="347040"/>
+            <a:ext cx="2742120" cy="346320"/>
           </a:xfrm>
           <a:prstGeom prst="rect">
             <a:avLst/>
@@ -14683,7 +14665,7 @@
         <p:spPr>
           <a:xfrm>
             <a:off x="457200" y="2788920"/>
-            <a:ext cx="2468520" cy="347040"/>
+            <a:ext cx="2467800" cy="346320"/>
           </a:xfrm>
           <a:prstGeom prst="rect">
             <a:avLst/>
@@ -14738,7 +14720,7 @@
         <p:spPr>
           <a:xfrm>
             <a:off x="457200" y="3200400"/>
-            <a:ext cx="2486880" cy="1481040"/>
+            <a:ext cx="2486160" cy="1480320"/>
           </a:xfrm>
           <a:prstGeom prst="rect">
             <a:avLst/>
@@ -14793,7 +14775,7 @@
         <p:spPr>
           <a:xfrm>
             <a:off x="3227760" y="2788920"/>
-            <a:ext cx="2742840" cy="1992960"/>
+            <a:ext cx="2742120" cy="1992240"/>
           </a:xfrm>
           <a:prstGeom prst="rect">
             <a:avLst/>
@@ -14831,7 +14813,7 @@
         <p:spPr>
           <a:xfrm>
             <a:off x="3227760" y="2788920"/>
-            <a:ext cx="2742840" cy="347040"/>
+            <a:ext cx="2742120" cy="346320"/>
           </a:xfrm>
           <a:prstGeom prst="rect">
             <a:avLst/>
@@ -14862,7 +14844,7 @@
         <p:spPr>
           <a:xfrm>
             <a:off x="3364920" y="2788920"/>
-            <a:ext cx="2468520" cy="347040"/>
+            <a:ext cx="2467800" cy="346320"/>
           </a:xfrm>
           <a:prstGeom prst="rect">
             <a:avLst/>
@@ -14917,7 +14899,7 @@
         <p:spPr>
           <a:xfrm>
             <a:off x="3364920" y="3200400"/>
-            <a:ext cx="2486880" cy="1481040"/>
+            <a:ext cx="2486160" cy="1480320"/>
           </a:xfrm>
           <a:prstGeom prst="rect">
             <a:avLst/>
@@ -14972,7 +14954,7 @@
         <p:spPr>
           <a:xfrm>
             <a:off x="6135480" y="2788920"/>
-            <a:ext cx="2742840" cy="1992960"/>
+            <a:ext cx="2742120" cy="1992240"/>
           </a:xfrm>
           <a:prstGeom prst="rect">
             <a:avLst/>
@@ -15010,7 +14992,7 @@
         <p:spPr>
           <a:xfrm>
             <a:off x="6135480" y="2788920"/>
-            <a:ext cx="2742840" cy="347040"/>
+            <a:ext cx="2742120" cy="346320"/>
           </a:xfrm>
           <a:prstGeom prst="rect">
             <a:avLst/>
@@ -15041,7 +15023,7 @@
         <p:spPr>
           <a:xfrm>
             <a:off x="6272640" y="2788920"/>
-            <a:ext cx="2468520" cy="347040"/>
+            <a:ext cx="2467800" cy="346320"/>
           </a:xfrm>
           <a:prstGeom prst="rect">
             <a:avLst/>
@@ -15096,7 +15078,7 @@
         <p:spPr>
           <a:xfrm>
             <a:off x="6272640" y="3200400"/>
-            <a:ext cx="2486880" cy="1481040"/>
+            <a:ext cx="2486160" cy="1480320"/>
           </a:xfrm>
           <a:prstGeom prst="rect">
             <a:avLst/>
@@ -15151,7 +15133,7 @@
         <p:spPr>
           <a:xfrm>
             <a:off x="320040" y="4864680"/>
-            <a:ext cx="8503560" cy="228240"/>
+            <a:ext cx="8502840" cy="227520"/>
           </a:xfrm>
           <a:prstGeom prst="rect">
             <a:avLst/>
@@ -15189,7 +15171,7 @@
         <p:spPr>
           <a:xfrm>
             <a:off x="457200" y="4864680"/>
-            <a:ext cx="8229240" cy="228240"/>
+            <a:ext cx="8228520" cy="227520"/>
           </a:xfrm>
           <a:prstGeom prst="rect">
             <a:avLst/>
@@ -15281,7 +15263,7 @@
         <p:spPr>
           <a:xfrm>
             <a:off x="0" y="0"/>
-            <a:ext cx="9143640" cy="1005480"/>
+            <a:ext cx="9142920" cy="1004760"/>
           </a:xfrm>
           <a:prstGeom prst="rect">
             <a:avLst/>
@@ -15312,7 +15294,7 @@
         <p:spPr>
           <a:xfrm>
             <a:off x="0" y="0"/>
-            <a:ext cx="109440" cy="1005480"/>
+            <a:ext cx="108720" cy="1004760"/>
           </a:xfrm>
           <a:prstGeom prst="rect">
             <a:avLst/>
@@ -15343,7 +15325,7 @@
         <p:spPr>
           <a:xfrm>
             <a:off x="255960" y="128160"/>
-            <a:ext cx="8503560" cy="548280"/>
+            <a:ext cx="8502840" cy="547560"/>
           </a:xfrm>
           <a:prstGeom prst="rect">
             <a:avLst/>
@@ -15398,7 +15380,7 @@
         <p:spPr>
           <a:xfrm>
             <a:off x="255960" y="658440"/>
-            <a:ext cx="8503560" cy="273960"/>
+            <a:ext cx="8502840" cy="273240"/>
           </a:xfrm>
           <a:prstGeom prst="rect">
             <a:avLst/>
@@ -15453,7 +15435,7 @@
         <p:spPr>
           <a:xfrm>
             <a:off x="320040" y="1143000"/>
-            <a:ext cx="8503560" cy="840960"/>
+            <a:ext cx="8502840" cy="840240"/>
           </a:xfrm>
           <a:prstGeom prst="rect">
             <a:avLst/>
@@ -15491,7 +15473,7 @@
         <p:spPr>
           <a:xfrm>
             <a:off x="320040" y="1143000"/>
-            <a:ext cx="8503560" cy="72720"/>
+            <a:ext cx="8502840" cy="72000"/>
           </a:xfrm>
           <a:prstGeom prst="rect">
             <a:avLst/>
@@ -15522,7 +15504,7 @@
         <p:spPr>
           <a:xfrm>
             <a:off x="457200" y="1261800"/>
-            <a:ext cx="8229240" cy="658080"/>
+            <a:ext cx="8228520" cy="657360"/>
           </a:xfrm>
           <a:prstGeom prst="rect">
             <a:avLst/>
@@ -15560,7 +15542,7 @@
                 <a:latin typeface="Calibri"/>
                 <a:ea typeface="Calibri"/>
               </a:rPr>
-              <a:t>"When I first learned how to create my own data types using OOP, I felt so powerful! It was an amazing feeling — I can add new data types to Python itself."</a:t>
+              <a:t>"We can create our own data types using OOP, It is very powerful! We can add new data types to Python itself."</a:t>
             </a:r>
             <a:endParaRPr b="0" lang="en-IN" sz="1200" spc="-1" strike="noStrike">
               <a:latin typeface="Arial"/>
@@ -15577,7 +15559,7 @@
         <p:spPr>
           <a:xfrm>
             <a:off x="320040" y="2084760"/>
-            <a:ext cx="8503560" cy="804240"/>
+            <a:ext cx="8502840" cy="803520"/>
           </a:xfrm>
           <a:prstGeom prst="rect">
             <a:avLst/>
@@ -15614,8 +15596,8 @@
         </p:nvSpPr>
         <p:spPr>
           <a:xfrm>
-            <a:off x="320040" y="2084760"/>
-            <a:ext cx="8503560" cy="347040"/>
+            <a:off x="320040" y="1980000"/>
+            <a:ext cx="8499600" cy="539640"/>
           </a:xfrm>
           <a:prstGeom prst="rect">
             <a:avLst/>
@@ -15646,7 +15628,7 @@
         <p:spPr>
           <a:xfrm>
             <a:off x="457200" y="2084760"/>
-            <a:ext cx="2559960" cy="347040"/>
+            <a:ext cx="2559240" cy="346320"/>
           </a:xfrm>
           <a:prstGeom prst="rect">
             <a:avLst/>
@@ -15701,7 +15683,7 @@
         <p:spPr>
           <a:xfrm>
             <a:off x="3017520" y="2084760"/>
-            <a:ext cx="5668920" cy="347040"/>
+            <a:ext cx="5802120" cy="254880"/>
           </a:xfrm>
           <a:prstGeom prst="rect">
             <a:avLst/>
@@ -15756,7 +15738,7 @@
         <p:spPr>
           <a:xfrm>
             <a:off x="457200" y="2450520"/>
-            <a:ext cx="8229240" cy="402120"/>
+            <a:ext cx="8228520" cy="401400"/>
           </a:xfrm>
           <a:prstGeom prst="rect">
             <a:avLst/>
@@ -15811,7 +15793,7 @@
         <p:spPr>
           <a:xfrm>
             <a:off x="320040" y="2999160"/>
-            <a:ext cx="8503560" cy="1737000"/>
+            <a:ext cx="8502840" cy="1736280"/>
           </a:xfrm>
           <a:prstGeom prst="rect">
             <a:avLst/>
@@ -15849,7 +15831,7 @@
         <p:spPr>
           <a:xfrm>
             <a:off x="320040" y="2999160"/>
-            <a:ext cx="8503560" cy="347040"/>
+            <a:ext cx="8502840" cy="346320"/>
           </a:xfrm>
           <a:prstGeom prst="rect">
             <a:avLst/>
@@ -15880,7 +15862,7 @@
         <p:spPr>
           <a:xfrm>
             <a:off x="457200" y="2999160"/>
-            <a:ext cx="8046360" cy="347040"/>
+            <a:ext cx="8045640" cy="346320"/>
           </a:xfrm>
           <a:prstGeom prst="rect">
             <a:avLst/>
@@ -15935,7 +15917,7 @@
         <p:spPr>
           <a:xfrm>
             <a:off x="438840" y="3401640"/>
-            <a:ext cx="2029680" cy="1261440"/>
+            <a:ext cx="2028960" cy="1260720"/>
           </a:xfrm>
           <a:prstGeom prst="rect">
             <a:avLst/>
@@ -15973,7 +15955,7 @@
         <p:spPr>
           <a:xfrm>
             <a:off x="438840" y="3401640"/>
-            <a:ext cx="2029680" cy="63720"/>
+            <a:ext cx="2028960" cy="63000"/>
           </a:xfrm>
           <a:prstGeom prst="rect">
             <a:avLst/>
@@ -16004,7 +15986,7 @@
         <p:spPr>
           <a:xfrm>
             <a:off x="530280" y="3493080"/>
-            <a:ext cx="1846800" cy="347040"/>
+            <a:ext cx="1846080" cy="346320"/>
           </a:xfrm>
           <a:prstGeom prst="rect">
             <a:avLst/>
@@ -16059,7 +16041,7 @@
         <p:spPr>
           <a:xfrm>
             <a:off x="530280" y="3858840"/>
-            <a:ext cx="1846800" cy="731160"/>
+            <a:ext cx="1846080" cy="730440"/>
           </a:xfrm>
           <a:prstGeom prst="rect">
             <a:avLst/>
@@ -16114,7 +16096,7 @@
         <p:spPr>
           <a:xfrm>
             <a:off x="2615040" y="3401640"/>
-            <a:ext cx="2029680" cy="1261440"/>
+            <a:ext cx="2028960" cy="1260720"/>
           </a:xfrm>
           <a:prstGeom prst="rect">
             <a:avLst/>
@@ -16152,7 +16134,7 @@
         <p:spPr>
           <a:xfrm>
             <a:off x="2615040" y="3401640"/>
-            <a:ext cx="2029680" cy="63720"/>
+            <a:ext cx="2028960" cy="63000"/>
           </a:xfrm>
           <a:prstGeom prst="rect">
             <a:avLst/>
@@ -16183,7 +16165,7 @@
         <p:spPr>
           <a:xfrm>
             <a:off x="2706480" y="3493080"/>
-            <a:ext cx="1846800" cy="347040"/>
+            <a:ext cx="1846080" cy="346320"/>
           </a:xfrm>
           <a:prstGeom prst="rect">
             <a:avLst/>
@@ -16238,7 +16220,7 @@
         <p:spPr>
           <a:xfrm>
             <a:off x="2706480" y="3858840"/>
-            <a:ext cx="1846800" cy="731160"/>
+            <a:ext cx="1846080" cy="730440"/>
           </a:xfrm>
           <a:prstGeom prst="rect">
             <a:avLst/>
@@ -16293,7 +16275,7 @@
         <p:spPr>
           <a:xfrm>
             <a:off x="4791600" y="3401640"/>
-            <a:ext cx="2029680" cy="1261440"/>
+            <a:ext cx="2028960" cy="1260720"/>
           </a:xfrm>
           <a:prstGeom prst="rect">
             <a:avLst/>
@@ -16331,7 +16313,7 @@
         <p:spPr>
           <a:xfrm>
             <a:off x="4791600" y="3401640"/>
-            <a:ext cx="2029680" cy="63720"/>
+            <a:ext cx="2028960" cy="63000"/>
           </a:xfrm>
           <a:prstGeom prst="rect">
             <a:avLst/>
@@ -16362,7 +16344,7 @@
         <p:spPr>
           <a:xfrm>
             <a:off x="4883040" y="3493080"/>
-            <a:ext cx="1846800" cy="347040"/>
+            <a:ext cx="1846080" cy="346320"/>
           </a:xfrm>
           <a:prstGeom prst="rect">
             <a:avLst/>
@@ -16417,7 +16399,7 @@
         <p:spPr>
           <a:xfrm>
             <a:off x="4883040" y="3858840"/>
-            <a:ext cx="1846800" cy="731160"/>
+            <a:ext cx="1846080" cy="730440"/>
           </a:xfrm>
           <a:prstGeom prst="rect">
             <a:avLst/>
@@ -16472,7 +16454,7 @@
         <p:spPr>
           <a:xfrm>
             <a:off x="6967800" y="3401640"/>
-            <a:ext cx="2029680" cy="1261440"/>
+            <a:ext cx="2028960" cy="1260720"/>
           </a:xfrm>
           <a:prstGeom prst="rect">
             <a:avLst/>
@@ -16510,7 +16492,7 @@
         <p:spPr>
           <a:xfrm>
             <a:off x="6967800" y="3401640"/>
-            <a:ext cx="2029680" cy="63720"/>
+            <a:ext cx="2028960" cy="63000"/>
           </a:xfrm>
           <a:prstGeom prst="rect">
             <a:avLst/>
@@ -16541,7 +16523,7 @@
         <p:spPr>
           <a:xfrm>
             <a:off x="7059240" y="3493080"/>
-            <a:ext cx="1846800" cy="347040"/>
+            <a:ext cx="1846080" cy="346320"/>
           </a:xfrm>
           <a:prstGeom prst="rect">
             <a:avLst/>
@@ -16596,7 +16578,7 @@
         <p:spPr>
           <a:xfrm>
             <a:off x="7059240" y="3858840"/>
-            <a:ext cx="1846800" cy="731160"/>
+            <a:ext cx="1846080" cy="730440"/>
           </a:xfrm>
           <a:prstGeom prst="rect">
             <a:avLst/>
@@ -16651,7 +16633,7 @@
         <p:spPr>
           <a:xfrm>
             <a:off x="320040" y="4773240"/>
-            <a:ext cx="8503560" cy="273960"/>
+            <a:ext cx="8502840" cy="273240"/>
           </a:xfrm>
           <a:prstGeom prst="rect">
             <a:avLst/>
@@ -16689,7 +16671,7 @@
         <p:spPr>
           <a:xfrm>
             <a:off x="320040" y="4773240"/>
-            <a:ext cx="91080" cy="273960"/>
+            <a:ext cx="90360" cy="273240"/>
           </a:xfrm>
           <a:prstGeom prst="rect">
             <a:avLst/>
@@ -16720,7 +16702,7 @@
         <p:spPr>
           <a:xfrm>
             <a:off x="502920" y="4773240"/>
-            <a:ext cx="8229240" cy="273960"/>
+            <a:ext cx="8228520" cy="273240"/>
           </a:xfrm>
           <a:prstGeom prst="rect">
             <a:avLst/>
@@ -16822,7 +16804,7 @@
         <p:spPr>
           <a:xfrm>
             <a:off x="0" y="0"/>
-            <a:ext cx="9143640" cy="1005480"/>
+            <a:ext cx="9142920" cy="1004760"/>
           </a:xfrm>
           <a:prstGeom prst="rect">
             <a:avLst/>
@@ -16853,7 +16835,7 @@
         <p:spPr>
           <a:xfrm>
             <a:off x="0" y="0"/>
-            <a:ext cx="109440" cy="1005480"/>
+            <a:ext cx="108720" cy="1004760"/>
           </a:xfrm>
           <a:prstGeom prst="rect">
             <a:avLst/>
@@ -16884,7 +16866,7 @@
         <p:spPr>
           <a:xfrm>
             <a:off x="255960" y="128160"/>
-            <a:ext cx="8503560" cy="548280"/>
+            <a:ext cx="8502840" cy="547560"/>
           </a:xfrm>
           <a:prstGeom prst="rect">
             <a:avLst/>
@@ -16939,7 +16921,7 @@
         <p:spPr>
           <a:xfrm>
             <a:off x="255960" y="658440"/>
-            <a:ext cx="8503560" cy="273960"/>
+            <a:ext cx="8502840" cy="273240"/>
           </a:xfrm>
           <a:prstGeom prst="rect">
             <a:avLst/>
@@ -16994,7 +16976,7 @@
         <p:spPr>
           <a:xfrm>
             <a:off x="320040" y="1143000"/>
-            <a:ext cx="8503560" cy="804240"/>
+            <a:ext cx="8502840" cy="803520"/>
           </a:xfrm>
           <a:prstGeom prst="rect">
             <a:avLst/>
@@ -17032,7 +17014,7 @@
         <p:spPr>
           <a:xfrm>
             <a:off x="320040" y="1143000"/>
-            <a:ext cx="8503560" cy="72720"/>
+            <a:ext cx="8502840" cy="72000"/>
           </a:xfrm>
           <a:prstGeom prst="rect">
             <a:avLst/>
@@ -17063,7 +17045,7 @@
         <p:spPr>
           <a:xfrm>
             <a:off x="457200" y="1261800"/>
-            <a:ext cx="8229240" cy="566640"/>
+            <a:ext cx="8228520" cy="565920"/>
           </a:xfrm>
           <a:prstGeom prst="rect">
             <a:avLst/>
@@ -17118,7 +17100,7 @@
         <p:spPr>
           <a:xfrm>
             <a:off x="320040" y="2057400"/>
-            <a:ext cx="2742840" cy="1261440"/>
+            <a:ext cx="2742120" cy="1260720"/>
           </a:xfrm>
           <a:prstGeom prst="rect">
             <a:avLst/>
@@ -17156,7 +17138,7 @@
         <p:spPr>
           <a:xfrm>
             <a:off x="320040" y="2057400"/>
-            <a:ext cx="2742840" cy="63720"/>
+            <a:ext cx="2742120" cy="63000"/>
           </a:xfrm>
           <a:prstGeom prst="rect">
             <a:avLst/>
@@ -17187,7 +17169,7 @@
         <p:spPr>
           <a:xfrm>
             <a:off x="2423160" y="2148840"/>
-            <a:ext cx="566640" cy="255600"/>
+            <a:ext cx="565920" cy="254880"/>
           </a:xfrm>
           <a:prstGeom prst="rect">
             <a:avLst/>
@@ -17225,7 +17207,7 @@
         <p:spPr>
           <a:xfrm>
             <a:off x="2423160" y="2148840"/>
-            <a:ext cx="566640" cy="255600"/>
+            <a:ext cx="565920" cy="254880"/>
           </a:xfrm>
           <a:prstGeom prst="rect">
             <a:avLst/>
@@ -17290,7 +17272,7 @@
         <p:spPr>
           <a:xfrm>
             <a:off x="457200" y="2185560"/>
-            <a:ext cx="1919880" cy="319680"/>
+            <a:ext cx="1919160" cy="318960"/>
           </a:xfrm>
           <a:prstGeom prst="rect">
             <a:avLst/>
@@ -17345,7 +17327,7 @@
         <p:spPr>
           <a:xfrm>
             <a:off x="457200" y="2532960"/>
-            <a:ext cx="2486880" cy="319680"/>
+            <a:ext cx="2486160" cy="318960"/>
           </a:xfrm>
           <a:prstGeom prst="rect">
             <a:avLst/>
@@ -17400,7 +17382,7 @@
         <p:spPr>
           <a:xfrm>
             <a:off x="457200" y="2880360"/>
-            <a:ext cx="2486880" cy="319680"/>
+            <a:ext cx="2486160" cy="318960"/>
           </a:xfrm>
           <a:prstGeom prst="rect">
             <a:avLst/>
@@ -17455,7 +17437,7 @@
         <p:spPr>
           <a:xfrm>
             <a:off x="3264480" y="2057400"/>
-            <a:ext cx="2742840" cy="1261440"/>
+            <a:ext cx="2855160" cy="1542240"/>
           </a:xfrm>
           <a:prstGeom prst="rect">
             <a:avLst/>
@@ -17493,7 +17475,7 @@
         <p:spPr>
           <a:xfrm>
             <a:off x="3264480" y="2057400"/>
-            <a:ext cx="2742840" cy="63720"/>
+            <a:ext cx="2742120" cy="63000"/>
           </a:xfrm>
           <a:prstGeom prst="rect">
             <a:avLst/>
@@ -17524,7 +17506,7 @@
         <p:spPr>
           <a:xfrm>
             <a:off x="3401640" y="2185560"/>
-            <a:ext cx="1919880" cy="319680"/>
+            <a:ext cx="1919160" cy="318960"/>
           </a:xfrm>
           <a:prstGeom prst="rect">
             <a:avLst/>
@@ -17579,7 +17561,7 @@
         <p:spPr>
           <a:xfrm>
             <a:off x="3401640" y="2532960"/>
-            <a:ext cx="2486880" cy="319680"/>
+            <a:ext cx="2486160" cy="318960"/>
           </a:xfrm>
           <a:prstGeom prst="rect">
             <a:avLst/>
@@ -17634,7 +17616,7 @@
         <p:spPr>
           <a:xfrm>
             <a:off x="3401640" y="2880360"/>
-            <a:ext cx="2486880" cy="319680"/>
+            <a:ext cx="2486160" cy="318960"/>
           </a:xfrm>
           <a:prstGeom prst="rect">
             <a:avLst/>
@@ -17682,83 +17664,14 @@
       </p:sp>
       <p:sp>
         <p:nvSpPr>
-          <p:cNvPr id="493" name="Shape 19"/>
-          <p:cNvSpPr/>
-          <p:nvPr/>
-        </p:nvSpPr>
-        <p:spPr>
-          <a:xfrm>
-            <a:off x="6208920" y="3447360"/>
-            <a:ext cx="2742840" cy="1261440"/>
-          </a:xfrm>
-          <a:prstGeom prst="rect">
-            <a:avLst/>
-          </a:prstGeom>
-          <a:solidFill>
-            <a:srgbClr val="1a2f45"/>
-          </a:solidFill>
-          <a:ln w="12700">
-            <a:solidFill>
-              <a:srgbClr val="1a2f45"/>
-            </a:solidFill>
-            <a:round/>
-          </a:ln>
-          <a:effectLst>
-            <a:outerShdw algn="bl" blurRad="101520" dir="8100000" dist="25455" kx="0" ky="0" rotWithShape="0" sx="100000" sy="100000">
-              <a:srgbClr val="000000">
-                <a:alpha val="18000"/>
-              </a:srgbClr>
-            </a:outerShdw>
-          </a:effectLst>
-        </p:spPr>
-        <p:style>
-          <a:lnRef idx="0"/>
-          <a:fillRef idx="0"/>
-          <a:effectRef idx="0"/>
-          <a:fontRef idx="minor"/>
-        </p:style>
-      </p:sp>
-      <p:sp>
-        <p:nvSpPr>
-          <p:cNvPr id="494" name="Shape 20"/>
-          <p:cNvSpPr/>
-          <p:nvPr/>
-        </p:nvSpPr>
-        <p:spPr>
-          <a:xfrm>
-            <a:off x="6208920" y="3447360"/>
-            <a:ext cx="2742840" cy="63720"/>
-          </a:xfrm>
-          <a:prstGeom prst="rect">
-            <a:avLst/>
-          </a:prstGeom>
-          <a:solidFill>
-            <a:srgbClr val="9b5de5"/>
-          </a:solidFill>
-          <a:ln w="12700">
-            <a:solidFill>
-              <a:srgbClr val="9b5de5"/>
-            </a:solidFill>
-            <a:round/>
-          </a:ln>
-        </p:spPr>
-        <p:style>
-          <a:lnRef idx="0"/>
-          <a:fillRef idx="0"/>
-          <a:effectRef idx="0"/>
-          <a:fontRef idx="minor"/>
-        </p:style>
-      </p:sp>
-      <p:sp>
-        <p:nvSpPr>
-          <p:cNvPr id="495" name="Text 21"/>
+          <p:cNvPr id="493" name="Text 21"/>
           <p:cNvSpPr/>
           <p:nvPr/>
         </p:nvSpPr>
         <p:spPr>
           <a:xfrm>
             <a:off x="6346080" y="3575160"/>
-            <a:ext cx="1919880" cy="319680"/>
+            <a:ext cx="1919160" cy="318960"/>
           </a:xfrm>
           <a:prstGeom prst="rect">
             <a:avLst/>
@@ -17806,14 +17719,14 @@
       </p:sp>
       <p:sp>
         <p:nvSpPr>
-          <p:cNvPr id="496" name="Text 22"/>
+          <p:cNvPr id="494" name="Text 22"/>
           <p:cNvSpPr/>
           <p:nvPr/>
         </p:nvSpPr>
         <p:spPr>
           <a:xfrm>
             <a:off x="6346080" y="3922920"/>
-            <a:ext cx="2486880" cy="319680"/>
+            <a:ext cx="2486160" cy="318960"/>
           </a:xfrm>
           <a:prstGeom prst="rect">
             <a:avLst/>
@@ -17861,14 +17774,14 @@
       </p:sp>
       <p:sp>
         <p:nvSpPr>
-          <p:cNvPr id="497" name="Text 23"/>
+          <p:cNvPr id="495" name="Text 23"/>
           <p:cNvSpPr/>
           <p:nvPr/>
         </p:nvSpPr>
         <p:spPr>
           <a:xfrm>
             <a:off x="6346080" y="4270320"/>
-            <a:ext cx="2486880" cy="319680"/>
+            <a:ext cx="2486160" cy="318960"/>
           </a:xfrm>
           <a:prstGeom prst="rect">
             <a:avLst/>
@@ -17916,52 +17829,14 @@
       </p:sp>
       <p:sp>
         <p:nvSpPr>
-          <p:cNvPr id="498" name="Shape 24"/>
+          <p:cNvPr id="496" name="Shape 25"/>
           <p:cNvSpPr/>
           <p:nvPr/>
         </p:nvSpPr>
         <p:spPr>
           <a:xfrm>
             <a:off x="320040" y="3447360"/>
-            <a:ext cx="2742840" cy="1261440"/>
-          </a:xfrm>
-          <a:prstGeom prst="rect">
-            <a:avLst/>
-          </a:prstGeom>
-          <a:solidFill>
-            <a:srgbClr val="1a2f45"/>
-          </a:solidFill>
-          <a:ln w="12700">
-            <a:solidFill>
-              <a:srgbClr val="1a2f45"/>
-            </a:solidFill>
-            <a:round/>
-          </a:ln>
-          <a:effectLst>
-            <a:outerShdw algn="bl" blurRad="101520" dir="8100000" dist="25455" kx="0" ky="0" rotWithShape="0" sx="100000" sy="100000">
-              <a:srgbClr val="000000">
-                <a:alpha val="18000"/>
-              </a:srgbClr>
-            </a:outerShdw>
-          </a:effectLst>
-        </p:spPr>
-        <p:style>
-          <a:lnRef idx="0"/>
-          <a:fillRef idx="0"/>
-          <a:effectRef idx="0"/>
-          <a:fontRef idx="minor"/>
-        </p:style>
-      </p:sp>
-      <p:sp>
-        <p:nvSpPr>
-          <p:cNvPr id="499" name="Shape 25"/>
-          <p:cNvSpPr/>
-          <p:nvPr/>
-        </p:nvSpPr>
-        <p:spPr>
-          <a:xfrm>
-            <a:off x="320040" y="3447360"/>
-            <a:ext cx="2742840" cy="63720"/>
+            <a:ext cx="2742120" cy="63000"/>
           </a:xfrm>
           <a:prstGeom prst="rect">
             <a:avLst/>
@@ -17985,14 +17860,14 @@
       </p:sp>
       <p:sp>
         <p:nvSpPr>
-          <p:cNvPr id="500" name="Text 26"/>
-          <p:cNvSpPr/>
-          <p:nvPr/>
-        </p:nvSpPr>
-        <p:spPr>
-          <a:xfrm>
-            <a:off x="457200" y="3575160"/>
-            <a:ext cx="1919880" cy="319680"/>
+          <p:cNvPr id="497" name="Text 27"/>
+          <p:cNvSpPr/>
+          <p:nvPr/>
+        </p:nvSpPr>
+        <p:spPr>
+          <a:xfrm>
+            <a:off x="457200" y="3922920"/>
+            <a:ext cx="2486160" cy="318960"/>
           </a:xfrm>
           <a:prstGeom prst="rect">
             <a:avLst/>
@@ -18023,31 +17898,31 @@
               </a:tabLst>
             </a:pPr>
             <a:r>
-              <a:rPr b="1" lang="en-US" sz="1200" spc="-1" strike="noStrike">
-                <a:solidFill>
-                  <a:srgbClr val="ffb703"/>
+              <a:rPr b="0" lang="en-US" sz="1000" spc="-1" strike="noStrike">
+                <a:solidFill>
+                  <a:srgbClr val="f0f4f8"/>
                 </a:solidFill>
                 <a:latin typeface="Calibri"/>
                 <a:ea typeface="Calibri"/>
               </a:rPr>
-              <a:t>Encapsulation</a:t>
-            </a:r>
-            <a:endParaRPr b="0" lang="en-IN" sz="1200" spc="-1" strike="noStrike">
-              <a:latin typeface="Arial"/>
-            </a:endParaRPr>
-          </a:p>
-        </p:txBody>
-      </p:sp>
-      <p:sp>
-        <p:nvSpPr>
-          <p:cNvPr id="501" name="Text 27"/>
-          <p:cNvSpPr/>
-          <p:nvPr/>
-        </p:nvSpPr>
-        <p:spPr>
-          <a:xfrm>
-            <a:off x="457200" y="3922920"/>
-            <a:ext cx="2486880" cy="319680"/>
+              <a:t>Private data, getters/setters</a:t>
+            </a:r>
+            <a:endParaRPr b="0" lang="en-IN" sz="1000" spc="-1" strike="noStrike">
+              <a:latin typeface="Arial"/>
+            </a:endParaRPr>
+          </a:p>
+        </p:txBody>
+      </p:sp>
+      <p:sp>
+        <p:nvSpPr>
+          <p:cNvPr id="498" name="Text 28"/>
+          <p:cNvSpPr/>
+          <p:nvPr/>
+        </p:nvSpPr>
+        <p:spPr>
+          <a:xfrm>
+            <a:off x="457200" y="4270320"/>
+            <a:ext cx="2486160" cy="318960"/>
           </a:xfrm>
           <a:prstGeom prst="rect">
             <a:avLst/>
@@ -18078,68 +17953,13 @@
               </a:tabLst>
             </a:pPr>
             <a:r>
-              <a:rPr b="0" lang="en-US" sz="1000" spc="-1" strike="noStrike">
-                <a:solidFill>
-                  <a:srgbClr val="f0f4f8"/>
+              <a:rPr b="0" i="1" lang="en-US" sz="950" spc="-1" strike="noStrike">
+                <a:solidFill>
+                  <a:srgbClr val="8da9c4"/>
                 </a:solidFill>
                 <a:latin typeface="Calibri"/>
                 <a:ea typeface="Calibri"/>
               </a:rPr>
-              <a:t>Private data, getters/setters</a:t>
-            </a:r>
-            <a:endParaRPr b="0" lang="en-IN" sz="1000" spc="-1" strike="noStrike">
-              <a:latin typeface="Arial"/>
-            </a:endParaRPr>
-          </a:p>
-        </p:txBody>
-      </p:sp>
-      <p:sp>
-        <p:nvSpPr>
-          <p:cNvPr id="502" name="Text 28"/>
-          <p:cNvSpPr/>
-          <p:nvPr/>
-        </p:nvSpPr>
-        <p:spPr>
-          <a:xfrm>
-            <a:off x="457200" y="4270320"/>
-            <a:ext cx="2486880" cy="319680"/>
-          </a:xfrm>
-          <a:prstGeom prst="rect">
-            <a:avLst/>
-          </a:prstGeom>
-          <a:noFill/>
-          <a:ln w="0">
-            <a:noFill/>
-          </a:ln>
-        </p:spPr>
-        <p:style>
-          <a:lnRef idx="0"/>
-          <a:fillRef idx="0"/>
-          <a:effectRef idx="0"/>
-          <a:fontRef idx="minor"/>
-        </p:style>
-        <p:txBody>
-          <a:bodyPr lIns="0" rIns="0" tIns="0" bIns="0" anchor="ctr">
-            <a:noAutofit/>
-          </a:bodyPr>
-          <a:p>
-            <a:pPr>
-              <a:lnSpc>
-                <a:spcPct val="100000"/>
-              </a:lnSpc>
-              <a:buNone/>
-              <a:tabLst>
-                <a:tab algn="l" pos="0"/>
-              </a:tabLst>
-            </a:pPr>
-            <a:r>
-              <a:rPr b="0" i="1" lang="en-US" sz="950" spc="-1" strike="noStrike">
-                <a:solidFill>
-                  <a:srgbClr val="8da9c4"/>
-                </a:solidFill>
-                <a:latin typeface="Calibri"/>
-                <a:ea typeface="Calibri"/>
-              </a:rPr>
               <a:t>Day 2 — Tuesday</a:t>
             </a:r>
             <a:endParaRPr b="0" lang="en-IN" sz="950" spc="-1" strike="noStrike">
@@ -18150,52 +17970,14 @@
       </p:sp>
       <p:sp>
         <p:nvSpPr>
-          <p:cNvPr id="503" name="Shape 29"/>
+          <p:cNvPr id="499" name="Shape 30"/>
           <p:cNvSpPr/>
           <p:nvPr/>
         </p:nvSpPr>
         <p:spPr>
           <a:xfrm>
             <a:off x="3264480" y="4837320"/>
-            <a:ext cx="2742840" cy="1261440"/>
-          </a:xfrm>
-          <a:prstGeom prst="rect">
-            <a:avLst/>
-          </a:prstGeom>
-          <a:solidFill>
-            <a:srgbClr val="1a2f45"/>
-          </a:solidFill>
-          <a:ln w="12700">
-            <a:solidFill>
-              <a:srgbClr val="1a2f45"/>
-            </a:solidFill>
-            <a:round/>
-          </a:ln>
-          <a:effectLst>
-            <a:outerShdw algn="bl" blurRad="101520" dir="8100000" dist="25455" kx="0" ky="0" rotWithShape="0" sx="100000" sy="100000">
-              <a:srgbClr val="000000">
-                <a:alpha val="18000"/>
-              </a:srgbClr>
-            </a:outerShdw>
-          </a:effectLst>
-        </p:spPr>
-        <p:style>
-          <a:lnRef idx="0"/>
-          <a:fillRef idx="0"/>
-          <a:effectRef idx="0"/>
-          <a:fontRef idx="minor"/>
-        </p:style>
-      </p:sp>
-      <p:sp>
-        <p:nvSpPr>
-          <p:cNvPr id="504" name="Shape 30"/>
-          <p:cNvSpPr/>
-          <p:nvPr/>
-        </p:nvSpPr>
-        <p:spPr>
-          <a:xfrm>
-            <a:off x="3264480" y="4837320"/>
-            <a:ext cx="2742840" cy="63720"/>
+            <a:ext cx="2742120" cy="63000"/>
           </a:xfrm>
           <a:prstGeom prst="rect">
             <a:avLst/>
@@ -18219,14 +18001,14 @@
       </p:sp>
       <p:sp>
         <p:nvSpPr>
-          <p:cNvPr id="505" name="Text 31"/>
+          <p:cNvPr id="500" name="Text 31"/>
           <p:cNvSpPr/>
           <p:nvPr/>
         </p:nvSpPr>
         <p:spPr>
           <a:xfrm>
             <a:off x="3401640" y="4965120"/>
-            <a:ext cx="1919880" cy="319680"/>
+            <a:ext cx="1919160" cy="318960"/>
           </a:xfrm>
           <a:prstGeom prst="rect">
             <a:avLst/>
@@ -18274,14 +18056,14 @@
       </p:sp>
       <p:sp>
         <p:nvSpPr>
-          <p:cNvPr id="506" name="Text 32"/>
+          <p:cNvPr id="501" name="Text 32"/>
           <p:cNvSpPr/>
           <p:nvPr/>
         </p:nvSpPr>
         <p:spPr>
           <a:xfrm>
             <a:off x="3401640" y="5312520"/>
-            <a:ext cx="2486880" cy="319680"/>
+            <a:ext cx="2486160" cy="318960"/>
           </a:xfrm>
           <a:prstGeom prst="rect">
             <a:avLst/>
@@ -18329,14 +18111,14 @@
       </p:sp>
       <p:sp>
         <p:nvSpPr>
-          <p:cNvPr id="507" name="Text 33"/>
+          <p:cNvPr id="502" name="Text 33"/>
           <p:cNvSpPr/>
           <p:nvPr/>
         </p:nvSpPr>
         <p:spPr>
           <a:xfrm>
             <a:off x="3401640" y="5660280"/>
-            <a:ext cx="2486880" cy="319680"/>
+            <a:ext cx="2486160" cy="318960"/>
           </a:xfrm>
           <a:prstGeom prst="rect">
             <a:avLst/>
@@ -18384,83 +18166,14 @@
       </p:sp>
       <p:sp>
         <p:nvSpPr>
-          <p:cNvPr id="508" name="Shape 34"/>
-          <p:cNvSpPr/>
-          <p:nvPr/>
-        </p:nvSpPr>
-        <p:spPr>
-          <a:xfrm>
-            <a:off x="6208920" y="4837320"/>
-            <a:ext cx="2742840" cy="1261440"/>
-          </a:xfrm>
-          <a:prstGeom prst="rect">
-            <a:avLst/>
-          </a:prstGeom>
-          <a:solidFill>
-            <a:srgbClr val="1a2f45"/>
-          </a:solidFill>
-          <a:ln w="12700">
-            <a:solidFill>
-              <a:srgbClr val="1a2f45"/>
-            </a:solidFill>
-            <a:round/>
-          </a:ln>
-          <a:effectLst>
-            <a:outerShdw algn="bl" blurRad="101520" dir="8100000" dist="25455" kx="0" ky="0" rotWithShape="0" sx="100000" sy="100000">
-              <a:srgbClr val="000000">
-                <a:alpha val="18000"/>
-              </a:srgbClr>
-            </a:outerShdw>
-          </a:effectLst>
-        </p:spPr>
-        <p:style>
-          <a:lnRef idx="0"/>
-          <a:fillRef idx="0"/>
-          <a:effectRef idx="0"/>
-          <a:fontRef idx="minor"/>
-        </p:style>
-      </p:sp>
-      <p:sp>
-        <p:nvSpPr>
-          <p:cNvPr id="509" name="Shape 35"/>
-          <p:cNvSpPr/>
-          <p:nvPr/>
-        </p:nvSpPr>
-        <p:spPr>
-          <a:xfrm>
-            <a:off x="6208920" y="4837320"/>
-            <a:ext cx="2742840" cy="63720"/>
-          </a:xfrm>
-          <a:prstGeom prst="rect">
-            <a:avLst/>
-          </a:prstGeom>
-          <a:solidFill>
-            <a:srgbClr val="90e0ef"/>
-          </a:solidFill>
-          <a:ln w="12700">
-            <a:solidFill>
-              <a:srgbClr val="90e0ef"/>
-            </a:solidFill>
-            <a:round/>
-          </a:ln>
-        </p:spPr>
-        <p:style>
-          <a:lnRef idx="0"/>
-          <a:fillRef idx="0"/>
-          <a:effectRef idx="0"/>
-          <a:fontRef idx="minor"/>
-        </p:style>
-      </p:sp>
-      <p:sp>
-        <p:nvSpPr>
-          <p:cNvPr id="510" name="Text 36"/>
+          <p:cNvPr id="503" name="Text 36"/>
           <p:cNvSpPr/>
           <p:nvPr/>
         </p:nvSpPr>
         <p:spPr>
           <a:xfrm>
             <a:off x="6346080" y="4965120"/>
-            <a:ext cx="1919880" cy="319680"/>
+            <a:ext cx="1919160" cy="318960"/>
           </a:xfrm>
           <a:prstGeom prst="rect">
             <a:avLst/>
@@ -18508,14 +18221,14 @@
       </p:sp>
       <p:sp>
         <p:nvSpPr>
-          <p:cNvPr id="511" name="Text 37"/>
+          <p:cNvPr id="504" name="Text 37"/>
           <p:cNvSpPr/>
           <p:nvPr/>
         </p:nvSpPr>
         <p:spPr>
           <a:xfrm>
             <a:off x="6346080" y="5312520"/>
-            <a:ext cx="2486880" cy="319680"/>
+            <a:ext cx="2486160" cy="318960"/>
           </a:xfrm>
           <a:prstGeom prst="rect">
             <a:avLst/>
@@ -18563,14 +18276,14 @@
       </p:sp>
       <p:sp>
         <p:nvSpPr>
-          <p:cNvPr id="512" name="Text 38"/>
+          <p:cNvPr id="505" name="Text 38"/>
           <p:cNvSpPr/>
           <p:nvPr/>
         </p:nvSpPr>
         <p:spPr>
           <a:xfrm>
             <a:off x="6346080" y="5660280"/>
-            <a:ext cx="2486880" cy="319680"/>
+            <a:ext cx="2486160" cy="318960"/>
           </a:xfrm>
           <a:prstGeom prst="rect">
             <a:avLst/>
@@ -18618,14 +18331,14 @@
       </p:sp>
       <p:sp>
         <p:nvSpPr>
-          <p:cNvPr id="513" name="Shape 39"/>
+          <p:cNvPr id="506" name="Shape 39"/>
           <p:cNvSpPr/>
           <p:nvPr/>
         </p:nvSpPr>
         <p:spPr>
           <a:xfrm>
             <a:off x="320040" y="4773240"/>
-            <a:ext cx="8503560" cy="273960"/>
+            <a:ext cx="8502840" cy="273240"/>
           </a:xfrm>
           <a:prstGeom prst="rect">
             <a:avLst/>
@@ -18656,14 +18369,14 @@
       </p:sp>
       <p:sp>
         <p:nvSpPr>
-          <p:cNvPr id="514" name="Shape 40"/>
+          <p:cNvPr id="507" name="Shape 40"/>
           <p:cNvSpPr/>
           <p:nvPr/>
         </p:nvSpPr>
         <p:spPr>
           <a:xfrm>
             <a:off x="320040" y="4773240"/>
-            <a:ext cx="91080" cy="273960"/>
+            <a:ext cx="90360" cy="273240"/>
           </a:xfrm>
           <a:prstGeom prst="rect">
             <a:avLst/>
@@ -18687,14 +18400,14 @@
       </p:sp>
       <p:sp>
         <p:nvSpPr>
-          <p:cNvPr id="515" name="Text 41"/>
+          <p:cNvPr id="508" name="Text 41"/>
           <p:cNvSpPr/>
           <p:nvPr/>
         </p:nvSpPr>
         <p:spPr>
           <a:xfrm>
             <a:off x="502920" y="4773240"/>
-            <a:ext cx="8229240" cy="273960"/>
+            <a:ext cx="8228520" cy="273240"/>
           </a:xfrm>
           <a:prstGeom prst="rect">
             <a:avLst/>
@@ -18789,14 +18502,14 @@
       </p:grpSpPr>
       <p:sp>
         <p:nvSpPr>
-          <p:cNvPr id="516" name="Shape 0"/>
+          <p:cNvPr id="509" name="Shape 0"/>
           <p:cNvSpPr/>
           <p:nvPr/>
         </p:nvSpPr>
         <p:spPr>
           <a:xfrm>
             <a:off x="0" y="0"/>
-            <a:ext cx="9143640" cy="1005480"/>
+            <a:ext cx="9142920" cy="1004760"/>
           </a:xfrm>
           <a:prstGeom prst="rect">
             <a:avLst/>
@@ -18820,14 +18533,14 @@
       </p:sp>
       <p:sp>
         <p:nvSpPr>
-          <p:cNvPr id="517" name="Shape 1"/>
+          <p:cNvPr id="510" name="Shape 1"/>
           <p:cNvSpPr/>
           <p:nvPr/>
         </p:nvSpPr>
         <p:spPr>
           <a:xfrm>
             <a:off x="0" y="0"/>
-            <a:ext cx="109440" cy="1005480"/>
+            <a:ext cx="108720" cy="1004760"/>
           </a:xfrm>
           <a:prstGeom prst="rect">
             <a:avLst/>
@@ -18851,14 +18564,14 @@
       </p:sp>
       <p:sp>
         <p:nvSpPr>
-          <p:cNvPr id="518" name="Text 2"/>
+          <p:cNvPr id="511" name="Text 2"/>
           <p:cNvSpPr/>
           <p:nvPr/>
         </p:nvSpPr>
         <p:spPr>
           <a:xfrm>
             <a:off x="255960" y="128160"/>
-            <a:ext cx="8503560" cy="548280"/>
+            <a:ext cx="8502840" cy="547560"/>
           </a:xfrm>
           <a:prstGeom prst="rect">
             <a:avLst/>
@@ -18906,14 +18619,14 @@
       </p:sp>
       <p:sp>
         <p:nvSpPr>
-          <p:cNvPr id="519" name="Text 3"/>
+          <p:cNvPr id="512" name="Text 3"/>
           <p:cNvSpPr/>
           <p:nvPr/>
         </p:nvSpPr>
         <p:spPr>
           <a:xfrm>
             <a:off x="255960" y="658440"/>
-            <a:ext cx="8503560" cy="273960"/>
+            <a:ext cx="8502840" cy="273240"/>
           </a:xfrm>
           <a:prstGeom prst="rect">
             <a:avLst/>
@@ -18961,14 +18674,14 @@
       </p:sp>
       <p:sp>
         <p:nvSpPr>
-          <p:cNvPr id="520" name="Shape 4"/>
+          <p:cNvPr id="513" name="Shape 4"/>
           <p:cNvSpPr/>
           <p:nvPr/>
         </p:nvSpPr>
         <p:spPr>
           <a:xfrm>
             <a:off x="320040" y="1170360"/>
-            <a:ext cx="4205880" cy="895680"/>
+            <a:ext cx="4205160" cy="894960"/>
           </a:xfrm>
           <a:prstGeom prst="rect">
             <a:avLst/>
@@ -18999,14 +18712,14 @@
       </p:sp>
       <p:sp>
         <p:nvSpPr>
-          <p:cNvPr id="521" name="Shape 5"/>
+          <p:cNvPr id="514" name="Shape 5"/>
           <p:cNvSpPr/>
           <p:nvPr/>
         </p:nvSpPr>
         <p:spPr>
           <a:xfrm>
             <a:off x="320040" y="1170360"/>
-            <a:ext cx="72720" cy="895680"/>
+            <a:ext cx="72000" cy="894960"/>
           </a:xfrm>
           <a:prstGeom prst="rect">
             <a:avLst/>
@@ -19030,14 +18743,14 @@
       </p:sp>
       <p:sp>
         <p:nvSpPr>
-          <p:cNvPr id="522" name="Shape 6"/>
+          <p:cNvPr id="515" name="Shape 6"/>
           <p:cNvSpPr/>
           <p:nvPr/>
         </p:nvSpPr>
         <p:spPr>
           <a:xfrm>
             <a:off x="484560" y="1225440"/>
-            <a:ext cx="365400" cy="365400"/>
+            <a:ext cx="364680" cy="364680"/>
           </a:xfrm>
           <a:prstGeom prst="ellipse">
             <a:avLst/>
@@ -19061,14 +18774,14 @@
       </p:sp>
       <p:sp>
         <p:nvSpPr>
-          <p:cNvPr id="523" name="Text 7"/>
+          <p:cNvPr id="516" name="Text 7"/>
           <p:cNvSpPr/>
           <p:nvPr/>
         </p:nvSpPr>
         <p:spPr>
           <a:xfrm>
             <a:off x="484560" y="1225440"/>
-            <a:ext cx="365400" cy="365400"/>
+            <a:ext cx="364680" cy="364680"/>
           </a:xfrm>
           <a:prstGeom prst="rect">
             <a:avLst/>
@@ -19116,14 +18829,14 @@
       </p:sp>
       <p:sp>
         <p:nvSpPr>
-          <p:cNvPr id="524" name="Text 8"/>
+          <p:cNvPr id="517" name="Text 8"/>
           <p:cNvSpPr/>
           <p:nvPr/>
         </p:nvSpPr>
         <p:spPr>
           <a:xfrm>
             <a:off x="941760" y="1225440"/>
-            <a:ext cx="1508400" cy="319680"/>
+            <a:ext cx="1507680" cy="318960"/>
           </a:xfrm>
           <a:prstGeom prst="rect">
             <a:avLst/>
@@ -19171,14 +18884,14 @@
       </p:sp>
       <p:sp>
         <p:nvSpPr>
-          <p:cNvPr id="525" name="Text 9"/>
+          <p:cNvPr id="518" name="Text 9"/>
           <p:cNvSpPr/>
           <p:nvPr/>
         </p:nvSpPr>
         <p:spPr>
           <a:xfrm>
             <a:off x="941760" y="1591200"/>
-            <a:ext cx="3474360" cy="420120"/>
+            <a:ext cx="3473640" cy="419400"/>
           </a:xfrm>
           <a:prstGeom prst="rect">
             <a:avLst/>
@@ -19226,14 +18939,14 @@
       </p:sp>
       <p:sp>
         <p:nvSpPr>
-          <p:cNvPr id="526" name="Shape 10"/>
+          <p:cNvPr id="519" name="Shape 10"/>
           <p:cNvSpPr/>
           <p:nvPr/>
         </p:nvSpPr>
         <p:spPr>
           <a:xfrm>
             <a:off x="4800600" y="1170360"/>
-            <a:ext cx="4205880" cy="895680"/>
+            <a:ext cx="4205160" cy="894960"/>
           </a:xfrm>
           <a:prstGeom prst="rect">
             <a:avLst/>
@@ -19264,14 +18977,14 @@
       </p:sp>
       <p:sp>
         <p:nvSpPr>
-          <p:cNvPr id="527" name="Shape 11"/>
+          <p:cNvPr id="520" name="Shape 11"/>
           <p:cNvSpPr/>
           <p:nvPr/>
         </p:nvSpPr>
         <p:spPr>
           <a:xfrm>
             <a:off x="4800600" y="1170360"/>
-            <a:ext cx="72720" cy="895680"/>
+            <a:ext cx="72000" cy="894960"/>
           </a:xfrm>
           <a:prstGeom prst="rect">
             <a:avLst/>
@@ -19295,14 +19008,14 @@
       </p:sp>
       <p:sp>
         <p:nvSpPr>
-          <p:cNvPr id="528" name="Shape 12"/>
+          <p:cNvPr id="521" name="Shape 12"/>
           <p:cNvSpPr/>
           <p:nvPr/>
         </p:nvSpPr>
         <p:spPr>
           <a:xfrm>
             <a:off x="4965120" y="1225440"/>
-            <a:ext cx="365400" cy="365400"/>
+            <a:ext cx="364680" cy="364680"/>
           </a:xfrm>
           <a:prstGeom prst="ellipse">
             <a:avLst/>
@@ -19326,14 +19039,14 @@
       </p:sp>
       <p:sp>
         <p:nvSpPr>
-          <p:cNvPr id="529" name="Text 13"/>
+          <p:cNvPr id="522" name="Text 13"/>
           <p:cNvSpPr/>
           <p:nvPr/>
         </p:nvSpPr>
         <p:spPr>
           <a:xfrm>
             <a:off x="4965120" y="1225440"/>
-            <a:ext cx="365400" cy="365400"/>
+            <a:ext cx="364680" cy="364680"/>
           </a:xfrm>
           <a:prstGeom prst="rect">
             <a:avLst/>
@@ -19381,14 +19094,14 @@
       </p:sp>
       <p:sp>
         <p:nvSpPr>
-          <p:cNvPr id="530" name="Text 14"/>
+          <p:cNvPr id="523" name="Text 14"/>
           <p:cNvSpPr/>
           <p:nvPr/>
         </p:nvSpPr>
         <p:spPr>
           <a:xfrm>
             <a:off x="5422320" y="1225440"/>
-            <a:ext cx="1508400" cy="319680"/>
+            <a:ext cx="1507680" cy="318960"/>
           </a:xfrm>
           <a:prstGeom prst="rect">
             <a:avLst/>
@@ -19436,14 +19149,14 @@
       </p:sp>
       <p:sp>
         <p:nvSpPr>
-          <p:cNvPr id="531" name="Text 15"/>
+          <p:cNvPr id="524" name="Text 15"/>
           <p:cNvSpPr/>
           <p:nvPr/>
         </p:nvSpPr>
         <p:spPr>
           <a:xfrm>
             <a:off x="5422320" y="1591200"/>
-            <a:ext cx="3474360" cy="420120"/>
+            <a:ext cx="3473640" cy="419400"/>
           </a:xfrm>
           <a:prstGeom prst="rect">
             <a:avLst/>
@@ -19491,14 +19204,14 @@
       </p:sp>
       <p:sp>
         <p:nvSpPr>
-          <p:cNvPr id="532" name="Shape 16"/>
+          <p:cNvPr id="525" name="Shape 16"/>
           <p:cNvSpPr/>
           <p:nvPr/>
         </p:nvSpPr>
         <p:spPr>
           <a:xfrm>
             <a:off x="320040" y="2139840"/>
-            <a:ext cx="4205880" cy="895680"/>
+            <a:ext cx="4205160" cy="894960"/>
           </a:xfrm>
           <a:prstGeom prst="rect">
             <a:avLst/>
@@ -19529,14 +19242,14 @@
       </p:sp>
       <p:sp>
         <p:nvSpPr>
-          <p:cNvPr id="533" name="Shape 17"/>
+          <p:cNvPr id="526" name="Shape 17"/>
           <p:cNvSpPr/>
           <p:nvPr/>
         </p:nvSpPr>
         <p:spPr>
           <a:xfrm>
             <a:off x="320040" y="2139840"/>
-            <a:ext cx="72720" cy="895680"/>
+            <a:ext cx="72000" cy="894960"/>
           </a:xfrm>
           <a:prstGeom prst="rect">
             <a:avLst/>
@@ -19560,14 +19273,14 @@
       </p:sp>
       <p:sp>
         <p:nvSpPr>
-          <p:cNvPr id="534" name="Shape 18"/>
+          <p:cNvPr id="527" name="Shape 18"/>
           <p:cNvSpPr/>
           <p:nvPr/>
         </p:nvSpPr>
         <p:spPr>
           <a:xfrm>
             <a:off x="484560" y="2194560"/>
-            <a:ext cx="365400" cy="365400"/>
+            <a:ext cx="364680" cy="364680"/>
           </a:xfrm>
           <a:prstGeom prst="ellipse">
             <a:avLst/>
@@ -19591,14 +19304,14 @@
       </p:sp>
       <p:sp>
         <p:nvSpPr>
-          <p:cNvPr id="535" name="Text 19"/>
+          <p:cNvPr id="528" name="Text 19"/>
           <p:cNvSpPr/>
           <p:nvPr/>
         </p:nvSpPr>
         <p:spPr>
           <a:xfrm>
             <a:off x="484560" y="2194560"/>
-            <a:ext cx="365400" cy="365400"/>
+            <a:ext cx="364680" cy="364680"/>
           </a:xfrm>
           <a:prstGeom prst="rect">
             <a:avLst/>
@@ -19646,14 +19359,14 @@
       </p:sp>
       <p:sp>
         <p:nvSpPr>
-          <p:cNvPr id="536" name="Text 20"/>
+          <p:cNvPr id="529" name="Text 20"/>
           <p:cNvSpPr/>
           <p:nvPr/>
         </p:nvSpPr>
         <p:spPr>
           <a:xfrm>
             <a:off x="941760" y="2194560"/>
-            <a:ext cx="1508400" cy="319680"/>
+            <a:ext cx="1507680" cy="318960"/>
           </a:xfrm>
           <a:prstGeom prst="rect">
             <a:avLst/>
@@ -19701,14 +19414,14 @@
       </p:sp>
       <p:sp>
         <p:nvSpPr>
-          <p:cNvPr id="537" name="Text 21"/>
+          <p:cNvPr id="530" name="Text 21"/>
           <p:cNvSpPr/>
           <p:nvPr/>
         </p:nvSpPr>
         <p:spPr>
           <a:xfrm>
             <a:off x="941760" y="2560320"/>
-            <a:ext cx="3474360" cy="420120"/>
+            <a:ext cx="3473640" cy="419400"/>
           </a:xfrm>
           <a:prstGeom prst="rect">
             <a:avLst/>
@@ -19756,14 +19469,14 @@
       </p:sp>
       <p:sp>
         <p:nvSpPr>
-          <p:cNvPr id="538" name="Shape 22"/>
+          <p:cNvPr id="531" name="Shape 22"/>
           <p:cNvSpPr/>
           <p:nvPr/>
         </p:nvSpPr>
         <p:spPr>
           <a:xfrm>
             <a:off x="4800600" y="2139840"/>
-            <a:ext cx="4205880" cy="895680"/>
+            <a:ext cx="4205160" cy="894960"/>
           </a:xfrm>
           <a:prstGeom prst="rect">
             <a:avLst/>
@@ -19794,14 +19507,14 @@
       </p:sp>
       <p:sp>
         <p:nvSpPr>
-          <p:cNvPr id="539" name="Shape 23"/>
+          <p:cNvPr id="532" name="Shape 23"/>
           <p:cNvSpPr/>
           <p:nvPr/>
         </p:nvSpPr>
         <p:spPr>
           <a:xfrm>
             <a:off x="4800600" y="2139840"/>
-            <a:ext cx="72720" cy="895680"/>
+            <a:ext cx="72000" cy="894960"/>
           </a:xfrm>
           <a:prstGeom prst="rect">
             <a:avLst/>
@@ -19825,14 +19538,14 @@
       </p:sp>
       <p:sp>
         <p:nvSpPr>
-          <p:cNvPr id="540" name="Shape 24"/>
+          <p:cNvPr id="533" name="Shape 24"/>
           <p:cNvSpPr/>
           <p:nvPr/>
         </p:nvSpPr>
         <p:spPr>
           <a:xfrm>
             <a:off x="4965120" y="2194560"/>
-            <a:ext cx="365400" cy="365400"/>
+            <a:ext cx="364680" cy="364680"/>
           </a:xfrm>
           <a:prstGeom prst="ellipse">
             <a:avLst/>
@@ -19856,14 +19569,14 @@
       </p:sp>
       <p:sp>
         <p:nvSpPr>
-          <p:cNvPr id="541" name="Text 25"/>
+          <p:cNvPr id="534" name="Text 25"/>
           <p:cNvSpPr/>
           <p:nvPr/>
         </p:nvSpPr>
         <p:spPr>
           <a:xfrm>
             <a:off x="4965120" y="2194560"/>
-            <a:ext cx="365400" cy="365400"/>
+            <a:ext cx="364680" cy="364680"/>
           </a:xfrm>
           <a:prstGeom prst="rect">
             <a:avLst/>
@@ -19911,14 +19624,14 @@
       </p:sp>
       <p:sp>
         <p:nvSpPr>
-          <p:cNvPr id="542" name="Text 26"/>
+          <p:cNvPr id="535" name="Text 26"/>
           <p:cNvSpPr/>
           <p:nvPr/>
         </p:nvSpPr>
         <p:spPr>
           <a:xfrm>
             <a:off x="5422320" y="2194560"/>
-            <a:ext cx="1508400" cy="319680"/>
+            <a:ext cx="1507680" cy="318960"/>
           </a:xfrm>
           <a:prstGeom prst="rect">
             <a:avLst/>
@@ -19966,14 +19679,14 @@
       </p:sp>
       <p:sp>
         <p:nvSpPr>
-          <p:cNvPr id="543" name="Text 27"/>
+          <p:cNvPr id="536" name="Text 27"/>
           <p:cNvSpPr/>
           <p:nvPr/>
         </p:nvSpPr>
         <p:spPr>
           <a:xfrm>
             <a:off x="5422320" y="2560320"/>
-            <a:ext cx="3474360" cy="420120"/>
+            <a:ext cx="3473640" cy="419400"/>
           </a:xfrm>
           <a:prstGeom prst="rect">
             <a:avLst/>
@@ -20021,14 +19734,14 @@
       </p:sp>
       <p:sp>
         <p:nvSpPr>
-          <p:cNvPr id="544" name="Shape 28"/>
+          <p:cNvPr id="537" name="Shape 28"/>
           <p:cNvSpPr/>
           <p:nvPr/>
         </p:nvSpPr>
         <p:spPr>
           <a:xfrm>
             <a:off x="320040" y="3108960"/>
-            <a:ext cx="4205880" cy="895680"/>
+            <a:ext cx="4205160" cy="894960"/>
           </a:xfrm>
           <a:prstGeom prst="rect">
             <a:avLst/>
@@ -20059,14 +19772,14 @@
       </p:sp>
       <p:sp>
         <p:nvSpPr>
-          <p:cNvPr id="545" name="Shape 29"/>
+          <p:cNvPr id="538" name="Shape 29"/>
           <p:cNvSpPr/>
           <p:nvPr/>
         </p:nvSpPr>
         <p:spPr>
           <a:xfrm>
             <a:off x="320040" y="3108960"/>
-            <a:ext cx="72720" cy="895680"/>
+            <a:ext cx="72000" cy="894960"/>
           </a:xfrm>
           <a:prstGeom prst="rect">
             <a:avLst/>
@@ -20090,14 +19803,14 @@
       </p:sp>
       <p:sp>
         <p:nvSpPr>
-          <p:cNvPr id="546" name="Shape 30"/>
+          <p:cNvPr id="539" name="Shape 30"/>
           <p:cNvSpPr/>
           <p:nvPr/>
         </p:nvSpPr>
         <p:spPr>
           <a:xfrm>
             <a:off x="484560" y="3163680"/>
-            <a:ext cx="365400" cy="365400"/>
+            <a:ext cx="364680" cy="364680"/>
           </a:xfrm>
           <a:prstGeom prst="ellipse">
             <a:avLst/>
@@ -20121,14 +19834,14 @@
       </p:sp>
       <p:sp>
         <p:nvSpPr>
-          <p:cNvPr id="547" name="Text 31"/>
+          <p:cNvPr id="540" name="Text 31"/>
           <p:cNvSpPr/>
           <p:nvPr/>
         </p:nvSpPr>
         <p:spPr>
           <a:xfrm>
             <a:off x="484560" y="3163680"/>
-            <a:ext cx="365400" cy="365400"/>
+            <a:ext cx="364680" cy="364680"/>
           </a:xfrm>
           <a:prstGeom prst="rect">
             <a:avLst/>
@@ -20176,14 +19889,14 @@
       </p:sp>
       <p:sp>
         <p:nvSpPr>
-          <p:cNvPr id="548" name="Text 32"/>
+          <p:cNvPr id="541" name="Text 32"/>
           <p:cNvSpPr/>
           <p:nvPr/>
         </p:nvSpPr>
         <p:spPr>
           <a:xfrm>
             <a:off x="941760" y="3163680"/>
-            <a:ext cx="1508400" cy="319680"/>
+            <a:ext cx="1507680" cy="318960"/>
           </a:xfrm>
           <a:prstGeom prst="rect">
             <a:avLst/>
@@ -20231,14 +19944,14 @@
       </p:sp>
       <p:sp>
         <p:nvSpPr>
-          <p:cNvPr id="549" name="Text 33"/>
+          <p:cNvPr id="542" name="Text 33"/>
           <p:cNvSpPr/>
           <p:nvPr/>
         </p:nvSpPr>
         <p:spPr>
           <a:xfrm>
             <a:off x="941760" y="3529440"/>
-            <a:ext cx="3474360" cy="420120"/>
+            <a:ext cx="3473640" cy="419400"/>
           </a:xfrm>
           <a:prstGeom prst="rect">
             <a:avLst/>
@@ -20286,14 +19999,14 @@
       </p:sp>
       <p:sp>
         <p:nvSpPr>
-          <p:cNvPr id="550" name="Shape 34"/>
+          <p:cNvPr id="543" name="Shape 34"/>
           <p:cNvSpPr/>
           <p:nvPr/>
         </p:nvSpPr>
         <p:spPr>
           <a:xfrm>
             <a:off x="4800600" y="3108960"/>
-            <a:ext cx="4205880" cy="895680"/>
+            <a:ext cx="4205160" cy="894960"/>
           </a:xfrm>
           <a:prstGeom prst="rect">
             <a:avLst/>
@@ -20324,14 +20037,14 @@
       </p:sp>
       <p:sp>
         <p:nvSpPr>
-          <p:cNvPr id="551" name="Shape 35"/>
+          <p:cNvPr id="544" name="Shape 35"/>
           <p:cNvSpPr/>
           <p:nvPr/>
         </p:nvSpPr>
         <p:spPr>
           <a:xfrm>
             <a:off x="4800600" y="3108960"/>
-            <a:ext cx="72720" cy="895680"/>
+            <a:ext cx="72000" cy="894960"/>
           </a:xfrm>
           <a:prstGeom prst="rect">
             <a:avLst/>
@@ -20355,14 +20068,14 @@
       </p:sp>
       <p:sp>
         <p:nvSpPr>
-          <p:cNvPr id="552" name="Shape 36"/>
+          <p:cNvPr id="545" name="Shape 36"/>
           <p:cNvSpPr/>
           <p:nvPr/>
         </p:nvSpPr>
         <p:spPr>
           <a:xfrm>
             <a:off x="4965120" y="3163680"/>
-            <a:ext cx="365400" cy="365400"/>
+            <a:ext cx="364680" cy="364680"/>
           </a:xfrm>
           <a:prstGeom prst="ellipse">
             <a:avLst/>
@@ -20386,14 +20099,14 @@
       </p:sp>
       <p:sp>
         <p:nvSpPr>
-          <p:cNvPr id="553" name="Text 37"/>
+          <p:cNvPr id="546" name="Text 37"/>
           <p:cNvSpPr/>
           <p:nvPr/>
         </p:nvSpPr>
         <p:spPr>
           <a:xfrm>
             <a:off x="4965120" y="3163680"/>
-            <a:ext cx="365400" cy="365400"/>
+            <a:ext cx="364680" cy="364680"/>
           </a:xfrm>
           <a:prstGeom prst="rect">
             <a:avLst/>
@@ -20441,14 +20154,14 @@
       </p:sp>
       <p:sp>
         <p:nvSpPr>
-          <p:cNvPr id="554" name="Text 38"/>
+          <p:cNvPr id="547" name="Text 38"/>
           <p:cNvSpPr/>
           <p:nvPr/>
         </p:nvSpPr>
         <p:spPr>
           <a:xfrm>
             <a:off x="5422320" y="3163680"/>
-            <a:ext cx="1508400" cy="319680"/>
+            <a:ext cx="1507680" cy="318960"/>
           </a:xfrm>
           <a:prstGeom prst="rect">
             <a:avLst/>
@@ -20496,14 +20209,14 @@
       </p:sp>
       <p:sp>
         <p:nvSpPr>
-          <p:cNvPr id="555" name="Text 39"/>
+          <p:cNvPr id="548" name="Text 39"/>
           <p:cNvSpPr/>
           <p:nvPr/>
         </p:nvSpPr>
         <p:spPr>
           <a:xfrm>
             <a:off x="5422320" y="3529440"/>
-            <a:ext cx="3474360" cy="420120"/>
+            <a:ext cx="3473640" cy="419400"/>
           </a:xfrm>
           <a:prstGeom prst="rect">
             <a:avLst/>
@@ -20551,14 +20264,14 @@
       </p:sp>
       <p:sp>
         <p:nvSpPr>
-          <p:cNvPr id="556" name="Shape 40"/>
+          <p:cNvPr id="549" name="Shape 40"/>
           <p:cNvSpPr/>
           <p:nvPr/>
         </p:nvSpPr>
         <p:spPr>
           <a:xfrm>
             <a:off x="320040" y="4078080"/>
-            <a:ext cx="4205880" cy="895680"/>
+            <a:ext cx="4205160" cy="894960"/>
           </a:xfrm>
           <a:prstGeom prst="rect">
             <a:avLst/>
@@ -20589,14 +20302,14 @@
       </p:sp>
       <p:sp>
         <p:nvSpPr>
-          <p:cNvPr id="557" name="Shape 41"/>
+          <p:cNvPr id="550" name="Shape 41"/>
           <p:cNvSpPr/>
           <p:nvPr/>
         </p:nvSpPr>
         <p:spPr>
           <a:xfrm>
             <a:off x="320040" y="4078080"/>
-            <a:ext cx="72720" cy="895680"/>
+            <a:ext cx="72000" cy="894960"/>
           </a:xfrm>
           <a:prstGeom prst="rect">
             <a:avLst/>
@@ -20620,14 +20333,14 @@
       </p:sp>
       <p:sp>
         <p:nvSpPr>
-          <p:cNvPr id="558" name="Shape 42"/>
+          <p:cNvPr id="551" name="Shape 42"/>
           <p:cNvSpPr/>
           <p:nvPr/>
         </p:nvSpPr>
         <p:spPr>
           <a:xfrm>
             <a:off x="484560" y="4133160"/>
-            <a:ext cx="365400" cy="365400"/>
+            <a:ext cx="364680" cy="364680"/>
           </a:xfrm>
           <a:prstGeom prst="ellipse">
             <a:avLst/>
@@ -20651,14 +20364,14 @@
       </p:sp>
       <p:sp>
         <p:nvSpPr>
-          <p:cNvPr id="559" name="Text 43"/>
+          <p:cNvPr id="552" name="Text 43"/>
           <p:cNvSpPr/>
           <p:nvPr/>
         </p:nvSpPr>
         <p:spPr>
           <a:xfrm>
             <a:off x="484560" y="4133160"/>
-            <a:ext cx="365400" cy="365400"/>
+            <a:ext cx="364680" cy="364680"/>
           </a:xfrm>
           <a:prstGeom prst="rect">
             <a:avLst/>
@@ -20706,14 +20419,14 @@
       </p:sp>
       <p:sp>
         <p:nvSpPr>
-          <p:cNvPr id="560" name="Text 44"/>
+          <p:cNvPr id="553" name="Text 44"/>
           <p:cNvSpPr/>
           <p:nvPr/>
         </p:nvSpPr>
         <p:spPr>
           <a:xfrm>
             <a:off x="941760" y="4133160"/>
-            <a:ext cx="1508400" cy="319680"/>
+            <a:ext cx="1507680" cy="318960"/>
           </a:xfrm>
           <a:prstGeom prst="rect">
             <a:avLst/>
@@ -20761,14 +20474,14 @@
       </p:sp>
       <p:sp>
         <p:nvSpPr>
-          <p:cNvPr id="561" name="Text 45"/>
+          <p:cNvPr id="554" name="Text 45"/>
           <p:cNvSpPr/>
           <p:nvPr/>
         </p:nvSpPr>
         <p:spPr>
           <a:xfrm>
             <a:off x="941760" y="4498920"/>
-            <a:ext cx="3474360" cy="420120"/>
+            <a:ext cx="3473640" cy="419400"/>
           </a:xfrm>
           <a:prstGeom prst="rect">
             <a:avLst/>
@@ -20816,14 +20529,14 @@
       </p:sp>
       <p:sp>
         <p:nvSpPr>
-          <p:cNvPr id="562" name="Shape 46"/>
+          <p:cNvPr id="555" name="Shape 46"/>
           <p:cNvSpPr/>
           <p:nvPr/>
         </p:nvSpPr>
         <p:spPr>
           <a:xfrm>
             <a:off x="4800600" y="4078080"/>
-            <a:ext cx="4205880" cy="895680"/>
+            <a:ext cx="4205160" cy="894960"/>
           </a:xfrm>
           <a:prstGeom prst="rect">
             <a:avLst/>
@@ -20854,14 +20567,14 @@
       </p:sp>
       <p:sp>
         <p:nvSpPr>
-          <p:cNvPr id="563" name="Shape 47"/>
+          <p:cNvPr id="556" name="Shape 47"/>
           <p:cNvSpPr/>
           <p:nvPr/>
         </p:nvSpPr>
         <p:spPr>
           <a:xfrm>
             <a:off x="4800600" y="4078080"/>
-            <a:ext cx="72720" cy="895680"/>
+            <a:ext cx="72000" cy="894960"/>
           </a:xfrm>
           <a:prstGeom prst="rect">
             <a:avLst/>
@@ -20885,14 +20598,14 @@
       </p:sp>
       <p:sp>
         <p:nvSpPr>
-          <p:cNvPr id="564" name="Shape 48"/>
+          <p:cNvPr id="557" name="Shape 48"/>
           <p:cNvSpPr/>
           <p:nvPr/>
         </p:nvSpPr>
         <p:spPr>
           <a:xfrm>
             <a:off x="4965120" y="4133160"/>
-            <a:ext cx="365400" cy="365400"/>
+            <a:ext cx="364680" cy="364680"/>
           </a:xfrm>
           <a:prstGeom prst="ellipse">
             <a:avLst/>
@@ -20916,14 +20629,14 @@
       </p:sp>
       <p:sp>
         <p:nvSpPr>
-          <p:cNvPr id="565" name="Text 49"/>
+          <p:cNvPr id="558" name="Text 49"/>
           <p:cNvSpPr/>
           <p:nvPr/>
         </p:nvSpPr>
         <p:spPr>
           <a:xfrm>
             <a:off x="4965120" y="4133160"/>
-            <a:ext cx="365400" cy="365400"/>
+            <a:ext cx="364680" cy="364680"/>
           </a:xfrm>
           <a:prstGeom prst="rect">
             <a:avLst/>
@@ -20971,14 +20684,14 @@
       </p:sp>
       <p:sp>
         <p:nvSpPr>
-          <p:cNvPr id="566" name="Text 50"/>
+          <p:cNvPr id="559" name="Text 50"/>
           <p:cNvSpPr/>
           <p:nvPr/>
         </p:nvSpPr>
         <p:spPr>
           <a:xfrm>
             <a:off x="5422320" y="4133160"/>
-            <a:ext cx="1508400" cy="319680"/>
+            <a:ext cx="1507680" cy="318960"/>
           </a:xfrm>
           <a:prstGeom prst="rect">
             <a:avLst/>
@@ -21026,14 +20739,14 @@
       </p:sp>
       <p:sp>
         <p:nvSpPr>
-          <p:cNvPr id="567" name="Text 51"/>
+          <p:cNvPr id="560" name="Text 51"/>
           <p:cNvSpPr/>
           <p:nvPr/>
         </p:nvSpPr>
         <p:spPr>
           <a:xfrm>
             <a:off x="5422320" y="4498920"/>
-            <a:ext cx="3474360" cy="420120"/>
+            <a:ext cx="3473640" cy="419400"/>
           </a:xfrm>
           <a:prstGeom prst="rect">
             <a:avLst/>
@@ -21081,14 +20794,14 @@
       </p:sp>
       <p:sp>
         <p:nvSpPr>
-          <p:cNvPr id="568" name="Shape 52"/>
+          <p:cNvPr id="561" name="Shape 52"/>
           <p:cNvSpPr/>
           <p:nvPr/>
         </p:nvSpPr>
         <p:spPr>
           <a:xfrm>
             <a:off x="320040" y="4937760"/>
-            <a:ext cx="8503560" cy="109440"/>
+            <a:ext cx="8502840" cy="108720"/>
           </a:xfrm>
           <a:prstGeom prst="rect">
             <a:avLst/>
@@ -21116,61 +20829,6 @@
           <a:effectRef idx="0"/>
           <a:fontRef idx="minor"/>
         </p:style>
-      </p:sp>
-      <p:sp>
-        <p:nvSpPr>
-          <p:cNvPr id="569" name="Text 53"/>
-          <p:cNvSpPr/>
-          <p:nvPr/>
-        </p:nvSpPr>
-        <p:spPr>
-          <a:xfrm>
-            <a:off x="457200" y="4937760"/>
-            <a:ext cx="8229240" cy="109440"/>
-          </a:xfrm>
-          <a:prstGeom prst="rect">
-            <a:avLst/>
-          </a:prstGeom>
-          <a:noFill/>
-          <a:ln w="0">
-            <a:noFill/>
-          </a:ln>
-        </p:spPr>
-        <p:style>
-          <a:lnRef idx="0"/>
-          <a:fillRef idx="0"/>
-          <a:effectRef idx="0"/>
-          <a:fontRef idx="minor"/>
-        </p:style>
-        <p:txBody>
-          <a:bodyPr lIns="90000" rIns="90000" tIns="90000" bIns="90000" anchor="ctr">
-            <a:noAutofit/>
-          </a:bodyPr>
-          <a:p>
-            <a:pPr algn="ctr">
-              <a:lnSpc>
-                <a:spcPct val="100000"/>
-              </a:lnSpc>
-              <a:buNone/>
-              <a:tabLst>
-                <a:tab algn="l" pos="0"/>
-              </a:tabLst>
-            </a:pPr>
-            <a:r>
-              <a:rPr b="0" i="1" lang="en-US" sz="850" spc="-1" strike="noStrike">
-                <a:solidFill>
-                  <a:srgbClr val="8da9c4"/>
-                </a:solidFill>
-                <a:latin typeface="Calibri"/>
-                <a:ea typeface="Calibri"/>
-              </a:rPr>
-              <a:t>Day 2: Encapsulation · Polymorphism · Abstraction · Memory  |  Day 3: Inheritance  |  Day 4: OOP Project  |  Day 5: Interview Prep</a:t>
-            </a:r>
-            <a:endParaRPr b="0" lang="en-IN" sz="850" spc="-1" strike="noStrike">
-              <a:latin typeface="Arial"/>
-            </a:endParaRPr>
-          </a:p>
-        </p:txBody>
       </p:sp>
     </p:spTree>
   </p:cSld>
@@ -21218,7 +20876,7 @@
         <p:spPr>
           <a:xfrm>
             <a:off x="0" y="0"/>
-            <a:ext cx="9143640" cy="1005480"/>
+            <a:ext cx="9142920" cy="1004760"/>
           </a:xfrm>
           <a:prstGeom prst="rect">
             <a:avLst/>
@@ -21249,7 +20907,7 @@
         <p:spPr>
           <a:xfrm>
             <a:off x="0" y="0"/>
-            <a:ext cx="109440" cy="1005480"/>
+            <a:ext cx="108720" cy="1004760"/>
           </a:xfrm>
           <a:prstGeom prst="rect">
             <a:avLst/>
@@ -21280,7 +20938,7 @@
         <p:spPr>
           <a:xfrm>
             <a:off x="255960" y="128160"/>
-            <a:ext cx="8503560" cy="548280"/>
+            <a:ext cx="8502840" cy="547560"/>
           </a:xfrm>
           <a:prstGeom prst="rect">
             <a:avLst/>
@@ -21335,7 +20993,7 @@
         <p:spPr>
           <a:xfrm>
             <a:off x="255960" y="658440"/>
-            <a:ext cx="8503560" cy="273960"/>
+            <a:ext cx="8502840" cy="273240"/>
           </a:xfrm>
           <a:prstGeom prst="rect">
             <a:avLst/>
@@ -21390,7 +21048,7 @@
         <p:spPr>
           <a:xfrm>
             <a:off x="365760" y="1170360"/>
-            <a:ext cx="8412120" cy="566640"/>
+            <a:ext cx="8411400" cy="565920"/>
           </a:xfrm>
           <a:prstGeom prst="rect">
             <a:avLst/>
@@ -21428,7 +21086,7 @@
         <p:spPr>
           <a:xfrm>
             <a:off x="365760" y="1170360"/>
-            <a:ext cx="475200" cy="566640"/>
+            <a:ext cx="474480" cy="565920"/>
           </a:xfrm>
           <a:prstGeom prst="rect">
             <a:avLst/>
@@ -21459,7 +21117,7 @@
         <p:spPr>
           <a:xfrm>
             <a:off x="365760" y="1170360"/>
-            <a:ext cx="475200" cy="566640"/>
+            <a:ext cx="474480" cy="565920"/>
           </a:xfrm>
           <a:prstGeom prst="rect">
             <a:avLst/>
@@ -21514,7 +21172,7 @@
         <p:spPr>
           <a:xfrm>
             <a:off x="951120" y="1225440"/>
-            <a:ext cx="2925720" cy="255600"/>
+            <a:ext cx="2925000" cy="254880"/>
           </a:xfrm>
           <a:prstGeom prst="rect">
             <a:avLst/>
@@ -21569,7 +21227,7 @@
         <p:spPr>
           <a:xfrm>
             <a:off x="951120" y="1499760"/>
-            <a:ext cx="7589160" cy="200880"/>
+            <a:ext cx="7588440" cy="200160"/>
           </a:xfrm>
           <a:prstGeom prst="rect">
             <a:avLst/>
@@ -21624,7 +21282,7 @@
         <p:spPr>
           <a:xfrm>
             <a:off x="365760" y="1828800"/>
-            <a:ext cx="8412120" cy="566640"/>
+            <a:ext cx="8411400" cy="565920"/>
           </a:xfrm>
           <a:prstGeom prst="rect">
             <a:avLst/>
@@ -21662,7 +21320,7 @@
         <p:spPr>
           <a:xfrm>
             <a:off x="365760" y="1828800"/>
-            <a:ext cx="475200" cy="566640"/>
+            <a:ext cx="474480" cy="565920"/>
           </a:xfrm>
           <a:prstGeom prst="rect">
             <a:avLst/>
@@ -21693,7 +21351,7 @@
         <p:spPr>
           <a:xfrm>
             <a:off x="365760" y="1828800"/>
-            <a:ext cx="475200" cy="566640"/>
+            <a:ext cx="474480" cy="565920"/>
           </a:xfrm>
           <a:prstGeom prst="rect">
             <a:avLst/>
@@ -21748,7 +21406,7 @@
         <p:spPr>
           <a:xfrm>
             <a:off x="951120" y="1883520"/>
-            <a:ext cx="2925720" cy="255600"/>
+            <a:ext cx="2925000" cy="254880"/>
           </a:xfrm>
           <a:prstGeom prst="rect">
             <a:avLst/>
@@ -21803,7 +21461,7 @@
         <p:spPr>
           <a:xfrm>
             <a:off x="951120" y="2157840"/>
-            <a:ext cx="7589160" cy="200880"/>
+            <a:ext cx="7588440" cy="200160"/>
           </a:xfrm>
           <a:prstGeom prst="rect">
             <a:avLst/>
@@ -21858,7 +21516,7 @@
         <p:spPr>
           <a:xfrm>
             <a:off x="365760" y="2487240"/>
-            <a:ext cx="8412120" cy="566640"/>
+            <a:ext cx="8411400" cy="565920"/>
           </a:xfrm>
           <a:prstGeom prst="rect">
             <a:avLst/>
@@ -21896,7 +21554,7 @@
         <p:spPr>
           <a:xfrm>
             <a:off x="365760" y="2487240"/>
-            <a:ext cx="475200" cy="566640"/>
+            <a:ext cx="474480" cy="565920"/>
           </a:xfrm>
           <a:prstGeom prst="rect">
             <a:avLst/>
@@ -21927,7 +21585,7 @@
         <p:spPr>
           <a:xfrm>
             <a:off x="365760" y="2487240"/>
-            <a:ext cx="475200" cy="566640"/>
+            <a:ext cx="474480" cy="565920"/>
           </a:xfrm>
           <a:prstGeom prst="rect">
             <a:avLst/>
@@ -21982,7 +21640,7 @@
         <p:spPr>
           <a:xfrm>
             <a:off x="951120" y="2541960"/>
-            <a:ext cx="2925720" cy="255600"/>
+            <a:ext cx="2925000" cy="254880"/>
           </a:xfrm>
           <a:prstGeom prst="rect">
             <a:avLst/>
@@ -22037,7 +21695,7 @@
         <p:spPr>
           <a:xfrm>
             <a:off x="951120" y="2816280"/>
-            <a:ext cx="7589160" cy="200880"/>
+            <a:ext cx="7588440" cy="200160"/>
           </a:xfrm>
           <a:prstGeom prst="rect">
             <a:avLst/>
@@ -22092,7 +21750,7 @@
         <p:spPr>
           <a:xfrm>
             <a:off x="365760" y="3145680"/>
-            <a:ext cx="8412120" cy="566640"/>
+            <a:ext cx="8411400" cy="565920"/>
           </a:xfrm>
           <a:prstGeom prst="rect">
             <a:avLst/>
@@ -22130,7 +21788,7 @@
         <p:spPr>
           <a:xfrm>
             <a:off x="365760" y="3145680"/>
-            <a:ext cx="475200" cy="566640"/>
+            <a:ext cx="474480" cy="565920"/>
           </a:xfrm>
           <a:prstGeom prst="rect">
             <a:avLst/>
@@ -22161,7 +21819,7 @@
         <p:spPr>
           <a:xfrm>
             <a:off x="365760" y="3145680"/>
-            <a:ext cx="475200" cy="566640"/>
+            <a:ext cx="474480" cy="565920"/>
           </a:xfrm>
           <a:prstGeom prst="rect">
             <a:avLst/>
@@ -22216,7 +21874,7 @@
         <p:spPr>
           <a:xfrm>
             <a:off x="951120" y="3200400"/>
-            <a:ext cx="2925720" cy="255600"/>
+            <a:ext cx="2925000" cy="254880"/>
           </a:xfrm>
           <a:prstGeom prst="rect">
             <a:avLst/>
@@ -22271,7 +21929,7 @@
         <p:spPr>
           <a:xfrm>
             <a:off x="951120" y="3474720"/>
-            <a:ext cx="7589160" cy="200880"/>
+            <a:ext cx="7588440" cy="200160"/>
           </a:xfrm>
           <a:prstGeom prst="rect">
             <a:avLst/>
@@ -22326,7 +21984,7 @@
         <p:spPr>
           <a:xfrm>
             <a:off x="365760" y="3803760"/>
-            <a:ext cx="8412120" cy="566640"/>
+            <a:ext cx="8411400" cy="565920"/>
           </a:xfrm>
           <a:prstGeom prst="rect">
             <a:avLst/>
@@ -22364,7 +22022,7 @@
         <p:spPr>
           <a:xfrm>
             <a:off x="365760" y="3803760"/>
-            <a:ext cx="475200" cy="566640"/>
+            <a:ext cx="474480" cy="565920"/>
           </a:xfrm>
           <a:prstGeom prst="rect">
             <a:avLst/>
@@ -22395,7 +22053,7 @@
         <p:spPr>
           <a:xfrm>
             <a:off x="365760" y="3803760"/>
-            <a:ext cx="475200" cy="566640"/>
+            <a:ext cx="474480" cy="565920"/>
           </a:xfrm>
           <a:prstGeom prst="rect">
             <a:avLst/>
@@ -22450,7 +22108,7 @@
         <p:spPr>
           <a:xfrm>
             <a:off x="951120" y="3858840"/>
-            <a:ext cx="2925720" cy="255600"/>
+            <a:ext cx="2925000" cy="254880"/>
           </a:xfrm>
           <a:prstGeom prst="rect">
             <a:avLst/>
@@ -22505,7 +22163,7 @@
         <p:spPr>
           <a:xfrm>
             <a:off x="951120" y="4133160"/>
-            <a:ext cx="7589160" cy="200880"/>
+            <a:ext cx="7588440" cy="200160"/>
           </a:xfrm>
           <a:prstGeom prst="rect">
             <a:avLst/>
@@ -22560,7 +22218,7 @@
         <p:spPr>
           <a:xfrm>
             <a:off x="365760" y="4462200"/>
-            <a:ext cx="8412120" cy="566640"/>
+            <a:ext cx="8411400" cy="565920"/>
           </a:xfrm>
           <a:prstGeom prst="rect">
             <a:avLst/>
@@ -22598,7 +22256,7 @@
         <p:spPr>
           <a:xfrm>
             <a:off x="365760" y="4462200"/>
-            <a:ext cx="475200" cy="566640"/>
+            <a:ext cx="474480" cy="565920"/>
           </a:xfrm>
           <a:prstGeom prst="rect">
             <a:avLst/>
@@ -22629,7 +22287,7 @@
         <p:spPr>
           <a:xfrm>
             <a:off x="365760" y="4462200"/>
-            <a:ext cx="475200" cy="566640"/>
+            <a:ext cx="474480" cy="565920"/>
           </a:xfrm>
           <a:prstGeom prst="rect">
             <a:avLst/>
@@ -22684,7 +22342,7 @@
         <p:spPr>
           <a:xfrm>
             <a:off x="951120" y="4517280"/>
-            <a:ext cx="2925720" cy="255600"/>
+            <a:ext cx="2925000" cy="254880"/>
           </a:xfrm>
           <a:prstGeom prst="rect">
             <a:avLst/>
@@ -22739,7 +22397,7 @@
         <p:spPr>
           <a:xfrm>
             <a:off x="951120" y="4791600"/>
-            <a:ext cx="7589160" cy="200880"/>
+            <a:ext cx="7588440" cy="200160"/>
           </a:xfrm>
           <a:prstGeom prst="rect">
             <a:avLst/>
@@ -22831,7 +22489,7 @@
         <p:spPr>
           <a:xfrm>
             <a:off x="0" y="0"/>
-            <a:ext cx="9143640" cy="1005480"/>
+            <a:ext cx="9142920" cy="1004760"/>
           </a:xfrm>
           <a:prstGeom prst="rect">
             <a:avLst/>
@@ -22862,7 +22520,7 @@
         <p:spPr>
           <a:xfrm>
             <a:off x="0" y="0"/>
-            <a:ext cx="109440" cy="1005480"/>
+            <a:ext cx="108720" cy="1004760"/>
           </a:xfrm>
           <a:prstGeom prst="rect">
             <a:avLst/>
@@ -22893,7 +22551,7 @@
         <p:spPr>
           <a:xfrm>
             <a:off x="255960" y="128160"/>
-            <a:ext cx="8503560" cy="548280"/>
+            <a:ext cx="8502840" cy="547560"/>
           </a:xfrm>
           <a:prstGeom prst="rect">
             <a:avLst/>
@@ -22948,7 +22606,7 @@
         <p:spPr>
           <a:xfrm>
             <a:off x="255960" y="658440"/>
-            <a:ext cx="8503560" cy="273960"/>
+            <a:ext cx="8502840" cy="273240"/>
           </a:xfrm>
           <a:prstGeom prst="rect">
             <a:avLst/>
@@ -23003,7 +22661,7 @@
         <p:spPr>
           <a:xfrm>
             <a:off x="320040" y="1143000"/>
-            <a:ext cx="8503560" cy="914040"/>
+            <a:ext cx="8502840" cy="913320"/>
           </a:xfrm>
           <a:prstGeom prst="rect">
             <a:avLst/>
@@ -23041,7 +22699,7 @@
         <p:spPr>
           <a:xfrm>
             <a:off x="320040" y="1143000"/>
-            <a:ext cx="8503560" cy="72720"/>
+            <a:ext cx="8502840" cy="72000"/>
           </a:xfrm>
           <a:prstGeom prst="rect">
             <a:avLst/>
@@ -23072,7 +22730,7 @@
         <p:spPr>
           <a:xfrm>
             <a:off x="457200" y="1261800"/>
-            <a:ext cx="1691280" cy="475200"/>
+            <a:ext cx="1690560" cy="474480"/>
           </a:xfrm>
           <a:prstGeom prst="rect">
             <a:avLst/>
@@ -23137,7 +22795,7 @@
         <p:spPr>
           <a:xfrm>
             <a:off x="2148840" y="1261800"/>
-            <a:ext cx="6491880" cy="475200"/>
+            <a:ext cx="6491160" cy="474480"/>
           </a:xfrm>
           <a:prstGeom prst="rect">
             <a:avLst/>
@@ -23192,7 +22850,7 @@
         <p:spPr>
           <a:xfrm>
             <a:off x="457200" y="1901880"/>
-            <a:ext cx="8229240" cy="255600"/>
+            <a:ext cx="8228520" cy="254880"/>
           </a:xfrm>
           <a:prstGeom prst="rect">
             <a:avLst/>
@@ -23247,7 +22905,7 @@
         <p:spPr>
           <a:xfrm>
             <a:off x="320040" y="2267640"/>
-            <a:ext cx="4096080" cy="2742840"/>
+            <a:ext cx="4095360" cy="2742120"/>
           </a:xfrm>
           <a:prstGeom prst="rect">
             <a:avLst/>
@@ -23285,7 +22943,7 @@
         <p:spPr>
           <a:xfrm>
             <a:off x="457200" y="2377440"/>
-            <a:ext cx="3748680" cy="273960"/>
+            <a:ext cx="3747960" cy="273240"/>
           </a:xfrm>
           <a:prstGeom prst="rect">
             <a:avLst/>
@@ -23340,7 +22998,7 @@
         <p:spPr>
           <a:xfrm>
             <a:off x="365760" y="2706480"/>
-            <a:ext cx="4004640" cy="2175840"/>
+            <a:ext cx="4003920" cy="2175120"/>
           </a:xfrm>
           <a:prstGeom prst="rect">
             <a:avLst/>
@@ -23371,7 +23029,7 @@
         <p:spPr>
           <a:xfrm>
             <a:off x="365760" y="2706480"/>
-            <a:ext cx="566640" cy="200880"/>
+            <a:ext cx="565920" cy="200160"/>
           </a:xfrm>
           <a:prstGeom prst="rect">
             <a:avLst/>
@@ -23402,7 +23060,7 @@
         <p:spPr>
           <a:xfrm>
             <a:off x="365760" y="2706480"/>
-            <a:ext cx="566640" cy="200880"/>
+            <a:ext cx="565920" cy="200160"/>
           </a:xfrm>
           <a:prstGeom prst="rect">
             <a:avLst/>
@@ -23457,7 +23115,7 @@
         <p:spPr>
           <a:xfrm>
             <a:off x="457200" y="2962800"/>
-            <a:ext cx="3821760" cy="1874160"/>
+            <a:ext cx="3821040" cy="1873440"/>
           </a:xfrm>
           <a:prstGeom prst="rect">
             <a:avLst/>
@@ -23646,7 +23304,7 @@
         <p:spPr>
           <a:xfrm>
             <a:off x="4727520" y="2267640"/>
-            <a:ext cx="4096080" cy="2742840"/>
+            <a:ext cx="4095360" cy="2742120"/>
           </a:xfrm>
           <a:prstGeom prst="rect">
             <a:avLst/>
@@ -23684,7 +23342,7 @@
         <p:spPr>
           <a:xfrm>
             <a:off x="4864680" y="2377440"/>
-            <a:ext cx="3748680" cy="273960"/>
+            <a:ext cx="3747960" cy="273240"/>
           </a:xfrm>
           <a:prstGeom prst="rect">
             <a:avLst/>
@@ -23739,7 +23397,7 @@
         <p:spPr>
           <a:xfrm>
             <a:off x="4864680" y="2706480"/>
-            <a:ext cx="3748680" cy="2175840"/>
+            <a:ext cx="3747960" cy="2175120"/>
           </a:xfrm>
           <a:prstGeom prst="rect">
             <a:avLst/>
@@ -23767,7 +23425,7 @@
               <a:buClr>
                 <a:srgbClr val="f0f4f8"/>
               </a:buClr>
-              <a:buFont typeface="Symbol" charset="2"/>
+              <a:buFont typeface="Symbol"/>
               <a:buChar char=""/>
             </a:pPr>
             <a:r>
@@ -23792,7 +23450,7 @@
               <a:buClr>
                 <a:srgbClr val="f0f4f8"/>
               </a:buClr>
-              <a:buFont typeface="Symbol" charset="2"/>
+              <a:buFont typeface="Symbol"/>
               <a:buChar char=""/>
             </a:pPr>
             <a:r>
@@ -23817,7 +23475,7 @@
               <a:buClr>
                 <a:srgbClr val="f0f4f8"/>
               </a:buClr>
-              <a:buFont typeface="Symbol" charset="2"/>
+              <a:buFont typeface="Symbol"/>
               <a:buChar char=""/>
             </a:pPr>
             <a:r>
@@ -23842,7 +23500,7 @@
               <a:buClr>
                 <a:srgbClr val="f0f4f8"/>
               </a:buClr>
-              <a:buFont typeface="Symbol" charset="2"/>
+              <a:buFont typeface="Symbol"/>
               <a:buChar char=""/>
             </a:pPr>
             <a:r>
@@ -23867,7 +23525,7 @@
               <a:buClr>
                 <a:srgbClr val="f0f4f8"/>
               </a:buClr>
-              <a:buFont typeface="Symbol" charset="2"/>
+              <a:buFont typeface="Symbol"/>
               <a:buChar char=""/>
             </a:pPr>
             <a:r>
@@ -23892,7 +23550,7 @@
               <a:buClr>
                 <a:srgbClr val="f0f4f8"/>
               </a:buClr>
-              <a:buFont typeface="Symbol" charset="2"/>
+              <a:buFont typeface="Symbol"/>
               <a:buChar char=""/>
             </a:pPr>
             <a:r>
@@ -23920,7 +23578,7 @@
         <p:spPr>
           <a:xfrm>
             <a:off x="320040" y="4773240"/>
-            <a:ext cx="8503560" cy="273960"/>
+            <a:ext cx="8502840" cy="273240"/>
           </a:xfrm>
           <a:prstGeom prst="rect">
             <a:avLst/>
@@ -23958,7 +23616,7 @@
         <p:spPr>
           <a:xfrm>
             <a:off x="320040" y="4773240"/>
-            <a:ext cx="91080" cy="273960"/>
+            <a:ext cx="90360" cy="273240"/>
           </a:xfrm>
           <a:prstGeom prst="rect">
             <a:avLst/>
@@ -23989,7 +23647,7 @@
         <p:spPr>
           <a:xfrm>
             <a:off x="502920" y="4773240"/>
-            <a:ext cx="8229240" cy="273960"/>
+            <a:ext cx="8228520" cy="273240"/>
           </a:xfrm>
           <a:prstGeom prst="rect">
             <a:avLst/>
@@ -24091,7 +23749,7 @@
         <p:spPr>
           <a:xfrm>
             <a:off x="0" y="0"/>
-            <a:ext cx="9143640" cy="1005480"/>
+            <a:ext cx="9142920" cy="1004760"/>
           </a:xfrm>
           <a:prstGeom prst="rect">
             <a:avLst/>
@@ -24122,7 +23780,7 @@
         <p:spPr>
           <a:xfrm>
             <a:off x="0" y="0"/>
-            <a:ext cx="109440" cy="1005480"/>
+            <a:ext cx="108720" cy="1004760"/>
           </a:xfrm>
           <a:prstGeom prst="rect">
             <a:avLst/>
@@ -24153,7 +23811,7 @@
         <p:spPr>
           <a:xfrm>
             <a:off x="255960" y="128160"/>
-            <a:ext cx="8503560" cy="548280"/>
+            <a:ext cx="8502840" cy="547560"/>
           </a:xfrm>
           <a:prstGeom prst="rect">
             <a:avLst/>
@@ -24208,7 +23866,7 @@
         <p:spPr>
           <a:xfrm>
             <a:off x="255960" y="658440"/>
-            <a:ext cx="8503560" cy="273960"/>
+            <a:ext cx="8502840" cy="273240"/>
           </a:xfrm>
           <a:prstGeom prst="rect">
             <a:avLst/>
@@ -24263,7 +23921,7 @@
         <p:spPr>
           <a:xfrm>
             <a:off x="320040" y="1143000"/>
-            <a:ext cx="8503560" cy="383760"/>
+            <a:ext cx="8502840" cy="383040"/>
           </a:xfrm>
           <a:prstGeom prst="rect">
             <a:avLst/>
@@ -24294,7 +23952,7 @@
         <p:spPr>
           <a:xfrm>
             <a:off x="457200" y="1143000"/>
-            <a:ext cx="2011320" cy="383760"/>
+            <a:ext cx="2010600" cy="383040"/>
           </a:xfrm>
           <a:prstGeom prst="rect">
             <a:avLst/>
@@ -24349,7 +24007,7 @@
         <p:spPr>
           <a:xfrm>
             <a:off x="2468880" y="1143000"/>
-            <a:ext cx="2742840" cy="383760"/>
+            <a:ext cx="2742120" cy="383040"/>
           </a:xfrm>
           <a:prstGeom prst="rect">
             <a:avLst/>
@@ -24404,7 +24062,7 @@
         <p:spPr>
           <a:xfrm>
             <a:off x="5212080" y="1143000"/>
-            <a:ext cx="3474360" cy="383760"/>
+            <a:ext cx="3473640" cy="383040"/>
           </a:xfrm>
           <a:prstGeom prst="rect">
             <a:avLst/>
@@ -24459,7 +24117,7 @@
         <p:spPr>
           <a:xfrm>
             <a:off x="320040" y="1572840"/>
-            <a:ext cx="8503560" cy="511560"/>
+            <a:ext cx="8502840" cy="510840"/>
           </a:xfrm>
           <a:prstGeom prst="rect">
             <a:avLst/>
@@ -24497,7 +24155,7 @@
         <p:spPr>
           <a:xfrm>
             <a:off x="320040" y="1572840"/>
-            <a:ext cx="72720" cy="511560"/>
+            <a:ext cx="72000" cy="510840"/>
           </a:xfrm>
           <a:prstGeom prst="rect">
             <a:avLst/>
@@ -24528,7 +24186,7 @@
         <p:spPr>
           <a:xfrm>
             <a:off x="457200" y="1572840"/>
-            <a:ext cx="1965600" cy="511560"/>
+            <a:ext cx="1964880" cy="510840"/>
           </a:xfrm>
           <a:prstGeom prst="rect">
             <a:avLst/>
@@ -24583,7 +24241,7 @@
         <p:spPr>
           <a:xfrm>
             <a:off x="2468880" y="1572840"/>
-            <a:ext cx="2697120" cy="511560"/>
+            <a:ext cx="2696400" cy="510840"/>
           </a:xfrm>
           <a:prstGeom prst="rect">
             <a:avLst/>
@@ -24638,7 +24296,7 @@
         <p:spPr>
           <a:xfrm>
             <a:off x="5212080" y="1572840"/>
-            <a:ext cx="3474360" cy="511560"/>
+            <a:ext cx="3473640" cy="510840"/>
           </a:xfrm>
           <a:prstGeom prst="rect">
             <a:avLst/>
@@ -24693,7 +24351,7 @@
         <p:spPr>
           <a:xfrm>
             <a:off x="320040" y="2139840"/>
-            <a:ext cx="8503560" cy="511560"/>
+            <a:ext cx="8502840" cy="510840"/>
           </a:xfrm>
           <a:prstGeom prst="rect">
             <a:avLst/>
@@ -24731,7 +24389,7 @@
         <p:spPr>
           <a:xfrm>
             <a:off x="320040" y="2139840"/>
-            <a:ext cx="72720" cy="511560"/>
+            <a:ext cx="72000" cy="510840"/>
           </a:xfrm>
           <a:prstGeom prst="rect">
             <a:avLst/>
@@ -24762,7 +24420,7 @@
         <p:spPr>
           <a:xfrm>
             <a:off x="457200" y="2139840"/>
-            <a:ext cx="1965600" cy="511560"/>
+            <a:ext cx="1964880" cy="510840"/>
           </a:xfrm>
           <a:prstGeom prst="rect">
             <a:avLst/>
@@ -24817,7 +24475,7 @@
         <p:spPr>
           <a:xfrm>
             <a:off x="2468880" y="2139840"/>
-            <a:ext cx="2697120" cy="511560"/>
+            <a:ext cx="2696400" cy="510840"/>
           </a:xfrm>
           <a:prstGeom prst="rect">
             <a:avLst/>
@@ -24872,7 +24530,7 @@
         <p:spPr>
           <a:xfrm>
             <a:off x="5212080" y="2139840"/>
-            <a:ext cx="3474360" cy="511560"/>
+            <a:ext cx="3473640" cy="510840"/>
           </a:xfrm>
           <a:prstGeom prst="rect">
             <a:avLst/>
@@ -24927,7 +24585,7 @@
         <p:spPr>
           <a:xfrm>
             <a:off x="320040" y="2706480"/>
-            <a:ext cx="8503560" cy="511560"/>
+            <a:ext cx="8502840" cy="510840"/>
           </a:xfrm>
           <a:prstGeom prst="rect">
             <a:avLst/>
@@ -24965,7 +24623,7 @@
         <p:spPr>
           <a:xfrm>
             <a:off x="320040" y="2706480"/>
-            <a:ext cx="72720" cy="511560"/>
+            <a:ext cx="72000" cy="510840"/>
           </a:xfrm>
           <a:prstGeom prst="rect">
             <a:avLst/>
@@ -24996,7 +24654,7 @@
         <p:spPr>
           <a:xfrm>
             <a:off x="457200" y="2706480"/>
-            <a:ext cx="1965600" cy="511560"/>
+            <a:ext cx="1964880" cy="510840"/>
           </a:xfrm>
           <a:prstGeom prst="rect">
             <a:avLst/>
@@ -25051,7 +24709,7 @@
         <p:spPr>
           <a:xfrm>
             <a:off x="2468880" y="2706480"/>
-            <a:ext cx="2697120" cy="511560"/>
+            <a:ext cx="2696400" cy="510840"/>
           </a:xfrm>
           <a:prstGeom prst="rect">
             <a:avLst/>
@@ -25106,7 +24764,7 @@
         <p:spPr>
           <a:xfrm>
             <a:off x="5212080" y="2706480"/>
-            <a:ext cx="3474360" cy="511560"/>
+            <a:ext cx="3473640" cy="510840"/>
           </a:xfrm>
           <a:prstGeom prst="rect">
             <a:avLst/>
@@ -25161,7 +24819,7 @@
         <p:spPr>
           <a:xfrm>
             <a:off x="320040" y="3273480"/>
-            <a:ext cx="8503560" cy="511560"/>
+            <a:ext cx="8502840" cy="510840"/>
           </a:xfrm>
           <a:prstGeom prst="rect">
             <a:avLst/>
@@ -25199,7 +24857,7 @@
         <p:spPr>
           <a:xfrm>
             <a:off x="320040" y="3273480"/>
-            <a:ext cx="72720" cy="511560"/>
+            <a:ext cx="72000" cy="510840"/>
           </a:xfrm>
           <a:prstGeom prst="rect">
             <a:avLst/>
@@ -25230,7 +24888,7 @@
         <p:spPr>
           <a:xfrm>
             <a:off x="457200" y="3273480"/>
-            <a:ext cx="1965600" cy="511560"/>
+            <a:ext cx="1964880" cy="510840"/>
           </a:xfrm>
           <a:prstGeom prst="rect">
             <a:avLst/>
@@ -25285,7 +24943,7 @@
         <p:spPr>
           <a:xfrm>
             <a:off x="2468880" y="3273480"/>
-            <a:ext cx="2697120" cy="511560"/>
+            <a:ext cx="2696400" cy="510840"/>
           </a:xfrm>
           <a:prstGeom prst="rect">
             <a:avLst/>
@@ -25340,7 +24998,7 @@
         <p:spPr>
           <a:xfrm>
             <a:off x="5212080" y="3273480"/>
-            <a:ext cx="3474360" cy="511560"/>
+            <a:ext cx="3473640" cy="510840"/>
           </a:xfrm>
           <a:prstGeom prst="rect">
             <a:avLst/>
@@ -25395,7 +25053,7 @@
         <p:spPr>
           <a:xfrm>
             <a:off x="320040" y="3840480"/>
-            <a:ext cx="8503560" cy="511560"/>
+            <a:ext cx="8502840" cy="510840"/>
           </a:xfrm>
           <a:prstGeom prst="rect">
             <a:avLst/>
@@ -25433,7 +25091,7 @@
         <p:spPr>
           <a:xfrm>
             <a:off x="320040" y="3840480"/>
-            <a:ext cx="72720" cy="511560"/>
+            <a:ext cx="72000" cy="510840"/>
           </a:xfrm>
           <a:prstGeom prst="rect">
             <a:avLst/>
@@ -25464,7 +25122,7 @@
         <p:spPr>
           <a:xfrm>
             <a:off x="457200" y="3840480"/>
-            <a:ext cx="1965600" cy="511560"/>
+            <a:ext cx="1964880" cy="510840"/>
           </a:xfrm>
           <a:prstGeom prst="rect">
             <a:avLst/>
@@ -25519,7 +25177,7 @@
         <p:spPr>
           <a:xfrm>
             <a:off x="2468880" y="3840480"/>
-            <a:ext cx="2697120" cy="511560"/>
+            <a:ext cx="2696400" cy="510840"/>
           </a:xfrm>
           <a:prstGeom prst="rect">
             <a:avLst/>
@@ -25574,7 +25232,7 @@
         <p:spPr>
           <a:xfrm>
             <a:off x="5212080" y="3840480"/>
-            <a:ext cx="3474360" cy="511560"/>
+            <a:ext cx="3473640" cy="510840"/>
           </a:xfrm>
           <a:prstGeom prst="rect">
             <a:avLst/>
@@ -25629,7 +25287,7 @@
         <p:spPr>
           <a:xfrm>
             <a:off x="320040" y="4407480"/>
-            <a:ext cx="8503560" cy="511560"/>
+            <a:ext cx="8502840" cy="510840"/>
           </a:xfrm>
           <a:prstGeom prst="rect">
             <a:avLst/>
@@ -25667,7 +25325,7 @@
         <p:spPr>
           <a:xfrm>
             <a:off x="320040" y="4407480"/>
-            <a:ext cx="72720" cy="511560"/>
+            <a:ext cx="72000" cy="510840"/>
           </a:xfrm>
           <a:prstGeom prst="rect">
             <a:avLst/>
@@ -25698,7 +25356,7 @@
         <p:spPr>
           <a:xfrm>
             <a:off x="457200" y="4407480"/>
-            <a:ext cx="1965600" cy="511560"/>
+            <a:ext cx="1964880" cy="510840"/>
           </a:xfrm>
           <a:prstGeom prst="rect">
             <a:avLst/>
@@ -25753,7 +25411,7 @@
         <p:spPr>
           <a:xfrm>
             <a:off x="2468880" y="4407480"/>
-            <a:ext cx="2697120" cy="511560"/>
+            <a:ext cx="2696400" cy="510840"/>
           </a:xfrm>
           <a:prstGeom prst="rect">
             <a:avLst/>
@@ -25808,7 +25466,7 @@
         <p:spPr>
           <a:xfrm>
             <a:off x="5212080" y="4407480"/>
-            <a:ext cx="3474360" cy="511560"/>
+            <a:ext cx="3473640" cy="510840"/>
           </a:xfrm>
           <a:prstGeom prst="rect">
             <a:avLst/>
@@ -25863,7 +25521,7 @@
         <p:spPr>
           <a:xfrm>
             <a:off x="320040" y="4773240"/>
-            <a:ext cx="8503560" cy="273960"/>
+            <a:ext cx="8502840" cy="273240"/>
           </a:xfrm>
           <a:prstGeom prst="rect">
             <a:avLst/>
@@ -25901,7 +25559,7 @@
         <p:spPr>
           <a:xfrm>
             <a:off x="320040" y="4773240"/>
-            <a:ext cx="91080" cy="273960"/>
+            <a:ext cx="90360" cy="273240"/>
           </a:xfrm>
           <a:prstGeom prst="rect">
             <a:avLst/>
@@ -25932,7 +25590,7 @@
         <p:spPr>
           <a:xfrm>
             <a:off x="360000" y="5143680"/>
-            <a:ext cx="8229240" cy="273960"/>
+            <a:ext cx="8228520" cy="273240"/>
           </a:xfrm>
           <a:prstGeom prst="rect">
             <a:avLst/>
@@ -26034,7 +25692,7 @@
         <p:spPr>
           <a:xfrm>
             <a:off x="0" y="0"/>
-            <a:ext cx="9143640" cy="1005480"/>
+            <a:ext cx="9142920" cy="1004760"/>
           </a:xfrm>
           <a:prstGeom prst="rect">
             <a:avLst/>
@@ -26065,7 +25723,7 @@
         <p:spPr>
           <a:xfrm>
             <a:off x="0" y="0"/>
-            <a:ext cx="109440" cy="1005480"/>
+            <a:ext cx="108720" cy="1004760"/>
           </a:xfrm>
           <a:prstGeom prst="rect">
             <a:avLst/>
@@ -26096,7 +25754,7 @@
         <p:spPr>
           <a:xfrm>
             <a:off x="255960" y="128160"/>
-            <a:ext cx="8503560" cy="548280"/>
+            <a:ext cx="8502840" cy="547560"/>
           </a:xfrm>
           <a:prstGeom prst="rect">
             <a:avLst/>
@@ -26151,7 +25809,7 @@
         <p:spPr>
           <a:xfrm>
             <a:off x="255960" y="658440"/>
-            <a:ext cx="8503560" cy="273960"/>
+            <a:ext cx="8502840" cy="273240"/>
           </a:xfrm>
           <a:prstGeom prst="rect">
             <a:avLst/>
@@ -26206,7 +25864,7 @@
         <p:spPr>
           <a:xfrm>
             <a:off x="320040" y="1143000"/>
-            <a:ext cx="8503560" cy="1599840"/>
+            <a:ext cx="8502840" cy="1599120"/>
           </a:xfrm>
           <a:prstGeom prst="rect">
             <a:avLst/>
@@ -26244,7 +25902,7 @@
         <p:spPr>
           <a:xfrm>
             <a:off x="457200" y="1234440"/>
-            <a:ext cx="8046360" cy="273960"/>
+            <a:ext cx="8045640" cy="273240"/>
           </a:xfrm>
           <a:prstGeom prst="rect">
             <a:avLst/>
@@ -26299,7 +25957,7 @@
         <p:spPr>
           <a:xfrm>
             <a:off x="365760" y="1536120"/>
-            <a:ext cx="8412120" cy="1115280"/>
+            <a:ext cx="8457120" cy="1206000"/>
           </a:xfrm>
           <a:prstGeom prst="rect">
             <a:avLst/>
@@ -26330,7 +25988,7 @@
         <p:spPr>
           <a:xfrm>
             <a:off x="365760" y="1536120"/>
-            <a:ext cx="566640" cy="200880"/>
+            <a:ext cx="565920" cy="200160"/>
           </a:xfrm>
           <a:prstGeom prst="rect">
             <a:avLst/>
@@ -26361,7 +26019,7 @@
         <p:spPr>
           <a:xfrm>
             <a:off x="365760" y="1536120"/>
-            <a:ext cx="566640" cy="200880"/>
+            <a:ext cx="565920" cy="200160"/>
           </a:xfrm>
           <a:prstGeom prst="rect">
             <a:avLst/>
@@ -26416,7 +26074,7 @@
         <p:spPr>
           <a:xfrm>
             <a:off x="457200" y="1792080"/>
-            <a:ext cx="8229240" cy="813600"/>
+            <a:ext cx="8228520" cy="812880"/>
           </a:xfrm>
           <a:prstGeom prst="rect">
             <a:avLst/>
@@ -26567,7 +26225,7 @@
         <p:spPr>
           <a:xfrm>
             <a:off x="320040" y="2853000"/>
-            <a:ext cx="2029680" cy="1051200"/>
+            <a:ext cx="2028960" cy="1050480"/>
           </a:xfrm>
           <a:prstGeom prst="rect">
             <a:avLst/>
@@ -26605,7 +26263,7 @@
         <p:spPr>
           <a:xfrm>
             <a:off x="320040" y="2853000"/>
-            <a:ext cx="2029680" cy="54360"/>
+            <a:ext cx="2028960" cy="53640"/>
           </a:xfrm>
           <a:prstGeom prst="rect">
             <a:avLst/>
@@ -26636,7 +26294,7 @@
         <p:spPr>
           <a:xfrm>
             <a:off x="548640" y="2962800"/>
-            <a:ext cx="347040" cy="347040"/>
+            <a:ext cx="346320" cy="346320"/>
           </a:xfrm>
           <a:prstGeom prst="ellipse">
             <a:avLst/>
@@ -26667,7 +26325,7 @@
         <p:spPr>
           <a:xfrm>
             <a:off x="548640" y="2962800"/>
-            <a:ext cx="347040" cy="347040"/>
+            <a:ext cx="346320" cy="346320"/>
           </a:xfrm>
           <a:prstGeom prst="rect">
             <a:avLst/>
@@ -26722,7 +26380,7 @@
         <p:spPr>
           <a:xfrm>
             <a:off x="969120" y="2907720"/>
-            <a:ext cx="1261440" cy="932400"/>
+            <a:ext cx="1260720" cy="931680"/>
           </a:xfrm>
           <a:prstGeom prst="rect">
             <a:avLst/>
@@ -26777,7 +26435,7 @@
         <p:spPr>
           <a:xfrm>
             <a:off x="2350080" y="3246120"/>
-            <a:ext cx="145800" cy="365400"/>
+            <a:ext cx="145080" cy="364680"/>
           </a:xfrm>
           <a:prstGeom prst="rect">
             <a:avLst/>
@@ -26832,7 +26490,7 @@
         <p:spPr>
           <a:xfrm>
             <a:off x="2514600" y="2853000"/>
-            <a:ext cx="2029680" cy="1051200"/>
+            <a:ext cx="2028960" cy="1050480"/>
           </a:xfrm>
           <a:prstGeom prst="rect">
             <a:avLst/>
@@ -26870,7 +26528,7 @@
         <p:spPr>
           <a:xfrm>
             <a:off x="2514600" y="2853000"/>
-            <a:ext cx="2029680" cy="54360"/>
+            <a:ext cx="2028960" cy="53640"/>
           </a:xfrm>
           <a:prstGeom prst="rect">
             <a:avLst/>
@@ -26901,7 +26559,7 @@
         <p:spPr>
           <a:xfrm>
             <a:off x="2743200" y="2962800"/>
-            <a:ext cx="347040" cy="347040"/>
+            <a:ext cx="346320" cy="346320"/>
           </a:xfrm>
           <a:prstGeom prst="ellipse">
             <a:avLst/>
@@ -26932,7 +26590,7 @@
         <p:spPr>
           <a:xfrm>
             <a:off x="2743200" y="2962800"/>
-            <a:ext cx="347040" cy="347040"/>
+            <a:ext cx="346320" cy="346320"/>
           </a:xfrm>
           <a:prstGeom prst="rect">
             <a:avLst/>
@@ -26987,7 +26645,7 @@
         <p:spPr>
           <a:xfrm>
             <a:off x="3163680" y="2907720"/>
-            <a:ext cx="1261440" cy="932400"/>
+            <a:ext cx="1260720" cy="931680"/>
           </a:xfrm>
           <a:prstGeom prst="rect">
             <a:avLst/>
@@ -27042,7 +26700,7 @@
         <p:spPr>
           <a:xfrm>
             <a:off x="4544640" y="3246120"/>
-            <a:ext cx="145800" cy="365400"/>
+            <a:ext cx="145080" cy="364680"/>
           </a:xfrm>
           <a:prstGeom prst="rect">
             <a:avLst/>
@@ -27097,7 +26755,7 @@
         <p:spPr>
           <a:xfrm>
             <a:off x="4709160" y="2853000"/>
-            <a:ext cx="2029680" cy="1051200"/>
+            <a:ext cx="2028960" cy="1050480"/>
           </a:xfrm>
           <a:prstGeom prst="rect">
             <a:avLst/>
@@ -27135,7 +26793,7 @@
         <p:spPr>
           <a:xfrm>
             <a:off x="4709160" y="2853000"/>
-            <a:ext cx="2029680" cy="54360"/>
+            <a:ext cx="2028960" cy="53640"/>
           </a:xfrm>
           <a:prstGeom prst="rect">
             <a:avLst/>
@@ -27166,7 +26824,7 @@
         <p:spPr>
           <a:xfrm>
             <a:off x="4937760" y="2962800"/>
-            <a:ext cx="347040" cy="347040"/>
+            <a:ext cx="346320" cy="346320"/>
           </a:xfrm>
           <a:prstGeom prst="ellipse">
             <a:avLst/>
@@ -27197,7 +26855,7 @@
         <p:spPr>
           <a:xfrm>
             <a:off x="4937760" y="2962800"/>
-            <a:ext cx="347040" cy="347040"/>
+            <a:ext cx="346320" cy="346320"/>
           </a:xfrm>
           <a:prstGeom prst="rect">
             <a:avLst/>
@@ -27252,7 +26910,7 @@
         <p:spPr>
           <a:xfrm>
             <a:off x="5358240" y="2907720"/>
-            <a:ext cx="1261440" cy="932400"/>
+            <a:ext cx="1260720" cy="931680"/>
           </a:xfrm>
           <a:prstGeom prst="rect">
             <a:avLst/>
@@ -27307,7 +26965,7 @@
         <p:spPr>
           <a:xfrm>
             <a:off x="6739200" y="3246120"/>
-            <a:ext cx="145800" cy="365400"/>
+            <a:ext cx="145080" cy="364680"/>
           </a:xfrm>
           <a:prstGeom prst="rect">
             <a:avLst/>
@@ -27362,7 +27020,7 @@
         <p:spPr>
           <a:xfrm>
             <a:off x="6903720" y="2853000"/>
-            <a:ext cx="2029680" cy="1051200"/>
+            <a:ext cx="2028960" cy="1050480"/>
           </a:xfrm>
           <a:prstGeom prst="rect">
             <a:avLst/>
@@ -27400,7 +27058,7 @@
         <p:spPr>
           <a:xfrm>
             <a:off x="6903720" y="2853000"/>
-            <a:ext cx="2029680" cy="54360"/>
+            <a:ext cx="2028960" cy="53640"/>
           </a:xfrm>
           <a:prstGeom prst="rect">
             <a:avLst/>
@@ -27431,7 +27089,7 @@
         <p:spPr>
           <a:xfrm>
             <a:off x="7132320" y="2962800"/>
-            <a:ext cx="347040" cy="347040"/>
+            <a:ext cx="346320" cy="346320"/>
           </a:xfrm>
           <a:prstGeom prst="ellipse">
             <a:avLst/>
@@ -27462,7 +27120,7 @@
         <p:spPr>
           <a:xfrm>
             <a:off x="7132320" y="2962800"/>
-            <a:ext cx="347040" cy="347040"/>
+            <a:ext cx="346320" cy="346320"/>
           </a:xfrm>
           <a:prstGeom prst="rect">
             <a:avLst/>
@@ -27517,7 +27175,7 @@
         <p:spPr>
           <a:xfrm>
             <a:off x="7552800" y="2907720"/>
-            <a:ext cx="1261440" cy="932400"/>
+            <a:ext cx="1260720" cy="931680"/>
           </a:xfrm>
           <a:prstGeom prst="rect">
             <a:avLst/>
@@ -27572,7 +27230,7 @@
         <p:spPr>
           <a:xfrm>
             <a:off x="320040" y="4005000"/>
-            <a:ext cx="8503560" cy="685440"/>
+            <a:ext cx="8502840" cy="684720"/>
           </a:xfrm>
           <a:prstGeom prst="rect">
             <a:avLst/>
@@ -27610,7 +27268,7 @@
         <p:spPr>
           <a:xfrm>
             <a:off x="320040" y="4005000"/>
-            <a:ext cx="8503560" cy="63720"/>
+            <a:ext cx="8502840" cy="63000"/>
           </a:xfrm>
           <a:prstGeom prst="rect">
             <a:avLst/>
@@ -27641,7 +27299,7 @@
         <p:spPr>
           <a:xfrm>
             <a:off x="457200" y="4096440"/>
-            <a:ext cx="3200040" cy="255600"/>
+            <a:ext cx="3199320" cy="254880"/>
           </a:xfrm>
           <a:prstGeom prst="rect">
             <a:avLst/>
@@ -27696,7 +27354,7 @@
         <p:spPr>
           <a:xfrm>
             <a:off x="365760" y="4370760"/>
-            <a:ext cx="8412120" cy="255600"/>
+            <a:ext cx="8411400" cy="254880"/>
           </a:xfrm>
           <a:prstGeom prst="rect">
             <a:avLst/>
@@ -27727,7 +27385,7 @@
         <p:spPr>
           <a:xfrm>
             <a:off x="365760" y="4370760"/>
-            <a:ext cx="566640" cy="200880"/>
+            <a:ext cx="565920" cy="200160"/>
           </a:xfrm>
           <a:prstGeom prst="rect">
             <a:avLst/>
@@ -27758,7 +27416,7 @@
         <p:spPr>
           <a:xfrm>
             <a:off x="365760" y="4370760"/>
-            <a:ext cx="566640" cy="200880"/>
+            <a:ext cx="565920" cy="200160"/>
           </a:xfrm>
           <a:prstGeom prst="rect">
             <a:avLst/>
@@ -27813,26 +27471,40 @@
         <p:spPr>
           <a:xfrm>
             <a:off x="457200" y="4581360"/>
-            <a:ext cx="8229240" cy="45360"/>
-          </a:xfrm>
-          <a:prstGeom prst="rect">
-            <a:avLst/>
-          </a:prstGeom>
-          <a:noFill/>
-          <a:ln w="0">
-            <a:noFill/>
-          </a:ln>
-        </p:spPr>
-        <p:style>
-          <a:lnRef idx="0"/>
-          <a:fillRef idx="0"/>
-          <a:effectRef idx="0"/>
-          <a:fontRef idx="minor"/>
-        </p:style>
-        <p:txBody>
-          <a:bodyPr lIns="90000" rIns="90000" tIns="90000" bIns="90000" anchor="t">
+            <a:ext cx="8228520" cy="44640"/>
+          </a:xfrm>
+          <a:prstGeom prst="rect">
+            <a:avLst/>
+          </a:prstGeom>
+          <a:noFill/>
+          <a:ln w="0">
+            <a:noFill/>
+          </a:ln>
+        </p:spPr>
+        <p:style>
+          <a:lnRef idx="0"/>
+          <a:fillRef idx="0"/>
+          <a:effectRef idx="0"/>
+          <a:fontRef idx="minor"/>
+        </p:style>
+        <p:txBody>
+          <a:bodyPr lIns="90000" rIns="90000" tIns="45360" bIns="45360" anchor="t">
             <a:noAutofit/>
           </a:bodyPr>
+          <a:p>
+            <a:pPr>
+              <a:lnSpc>
+                <a:spcPct val="100000"/>
+              </a:lnSpc>
+              <a:buNone/>
+              <a:tabLst>
+                <a:tab algn="l" pos="0"/>
+              </a:tabLst>
+            </a:pPr>
+            <a:endParaRPr b="0" lang="en-IN" sz="1100" spc="-1" strike="noStrike">
+              <a:latin typeface="Arial"/>
+            </a:endParaRPr>
+          </a:p>
           <a:p>
             <a:pPr>
               <a:lnSpc>
@@ -27891,8 +27563,8 @@
         </p:nvSpPr>
         <p:spPr>
           <a:xfrm>
-            <a:off x="316440" y="5220000"/>
-            <a:ext cx="8503560" cy="273960"/>
+            <a:off x="180000" y="5760000"/>
+            <a:ext cx="8502840" cy="273240"/>
           </a:xfrm>
           <a:prstGeom prst="rect">
             <a:avLst/>
@@ -27969,7 +27641,7 @@
         <p:spPr>
           <a:xfrm>
             <a:off x="320040" y="4773240"/>
-            <a:ext cx="91080" cy="273960"/>
+            <a:ext cx="90360" cy="273240"/>
           </a:xfrm>
           <a:prstGeom prst="rect">
             <a:avLst/>
@@ -27999,8 +27671,8 @@
         </p:nvSpPr>
         <p:spPr>
           <a:xfrm>
-            <a:off x="502920" y="4773240"/>
-            <a:ext cx="8229240" cy="273960"/>
+            <a:off x="231120" y="5306400"/>
+            <a:ext cx="8228520" cy="273240"/>
           </a:xfrm>
           <a:prstGeom prst="rect">
             <a:avLst/>
@@ -28102,7 +27774,7 @@
         <p:spPr>
           <a:xfrm>
             <a:off x="0" y="0"/>
-            <a:ext cx="9143640" cy="1005480"/>
+            <a:ext cx="9142920" cy="1004760"/>
           </a:xfrm>
           <a:prstGeom prst="rect">
             <a:avLst/>
@@ -28133,7 +27805,7 @@
         <p:spPr>
           <a:xfrm>
             <a:off x="0" y="0"/>
-            <a:ext cx="109440" cy="1005480"/>
+            <a:ext cx="108720" cy="1004760"/>
           </a:xfrm>
           <a:prstGeom prst="rect">
             <a:avLst/>
@@ -28164,7 +27836,7 @@
         <p:spPr>
           <a:xfrm>
             <a:off x="255960" y="128160"/>
-            <a:ext cx="8503560" cy="548280"/>
+            <a:ext cx="8502840" cy="547560"/>
           </a:xfrm>
           <a:prstGeom prst="rect">
             <a:avLst/>
@@ -28219,7 +27891,7 @@
         <p:spPr>
           <a:xfrm>
             <a:off x="255960" y="658440"/>
-            <a:ext cx="8503560" cy="273960"/>
+            <a:ext cx="8502840" cy="273240"/>
           </a:xfrm>
           <a:prstGeom prst="rect">
             <a:avLst/>
@@ -28274,7 +27946,7 @@
         <p:spPr>
           <a:xfrm>
             <a:off x="320040" y="1143000"/>
-            <a:ext cx="8503560" cy="1481040"/>
+            <a:ext cx="8502840" cy="1480320"/>
           </a:xfrm>
           <a:prstGeom prst="rect">
             <a:avLst/>
@@ -28312,7 +27984,7 @@
         <p:spPr>
           <a:xfrm>
             <a:off x="457200" y="1234440"/>
-            <a:ext cx="8046360" cy="273960"/>
+            <a:ext cx="8045640" cy="273240"/>
           </a:xfrm>
           <a:prstGeom prst="rect">
             <a:avLst/>
@@ -28367,7 +28039,7 @@
         <p:spPr>
           <a:xfrm>
             <a:off x="365760" y="1536120"/>
-            <a:ext cx="8412120" cy="1005480"/>
+            <a:ext cx="8411400" cy="1004760"/>
           </a:xfrm>
           <a:prstGeom prst="rect">
             <a:avLst/>
@@ -28398,7 +28070,7 @@
         <p:spPr>
           <a:xfrm>
             <a:off x="365760" y="1536120"/>
-            <a:ext cx="566640" cy="200880"/>
+            <a:ext cx="565920" cy="200160"/>
           </a:xfrm>
           <a:prstGeom prst="rect">
             <a:avLst/>
@@ -28429,7 +28101,7 @@
         <p:spPr>
           <a:xfrm>
             <a:off x="365760" y="1536120"/>
-            <a:ext cx="566640" cy="200880"/>
+            <a:ext cx="565920" cy="200160"/>
           </a:xfrm>
           <a:prstGeom prst="rect">
             <a:avLst/>
@@ -28484,7 +28156,7 @@
         <p:spPr>
           <a:xfrm>
             <a:off x="457200" y="1792080"/>
-            <a:ext cx="8229240" cy="703800"/>
+            <a:ext cx="8228520" cy="703080"/>
           </a:xfrm>
           <a:prstGeom prst="rect">
             <a:avLst/>
@@ -28625,7 +28297,7 @@
         <p:spPr>
           <a:xfrm>
             <a:off x="320040" y="2724840"/>
-            <a:ext cx="8503560" cy="868320"/>
+            <a:ext cx="8502840" cy="867600"/>
           </a:xfrm>
           <a:prstGeom prst="rect">
             <a:avLst/>
@@ -28663,7 +28335,7 @@
         <p:spPr>
           <a:xfrm>
             <a:off x="320040" y="2724840"/>
-            <a:ext cx="8503560" cy="72720"/>
+            <a:ext cx="8502840" cy="72000"/>
           </a:xfrm>
           <a:prstGeom prst="rect">
             <a:avLst/>
@@ -28694,7 +28366,7 @@
         <p:spPr>
           <a:xfrm>
             <a:off x="457200" y="2834640"/>
-            <a:ext cx="914040" cy="475200"/>
+            <a:ext cx="913320" cy="474480"/>
           </a:xfrm>
           <a:prstGeom prst="rect">
             <a:avLst/>
@@ -28749,7 +28421,7 @@
         <p:spPr>
           <a:xfrm>
             <a:off x="1371600" y="2834640"/>
-            <a:ext cx="7269120" cy="658080"/>
+            <a:ext cx="7268400" cy="657360"/>
           </a:xfrm>
           <a:prstGeom prst="rect">
             <a:avLst/>
@@ -28804,7 +28476,7 @@
         <p:spPr>
           <a:xfrm>
             <a:off x="320040" y="3703320"/>
-            <a:ext cx="4096080" cy="1298160"/>
+            <a:ext cx="4095360" cy="1297440"/>
           </a:xfrm>
           <a:prstGeom prst="rect">
             <a:avLst/>
@@ -28842,7 +28514,7 @@
         <p:spPr>
           <a:xfrm>
             <a:off x="457200" y="3794760"/>
-            <a:ext cx="3748680" cy="255600"/>
+            <a:ext cx="3747960" cy="254880"/>
           </a:xfrm>
           <a:prstGeom prst="rect">
             <a:avLst/>
@@ -28897,7 +28569,7 @@
         <p:spPr>
           <a:xfrm>
             <a:off x="457200" y="4096440"/>
-            <a:ext cx="3748680" cy="822600"/>
+            <a:ext cx="3747960" cy="821880"/>
           </a:xfrm>
           <a:prstGeom prst="rect">
             <a:avLst/>
@@ -28925,7 +28597,7 @@
               <a:buClr>
                 <a:srgbClr val="f0f4f8"/>
               </a:buClr>
-              <a:buFont typeface="Symbol" charset="2"/>
+              <a:buFont typeface="Symbol"/>
               <a:buChar char=""/>
             </a:pPr>
             <a:r>
@@ -28950,7 +28622,7 @@
               <a:buClr>
                 <a:srgbClr val="f0f4f8"/>
               </a:buClr>
-              <a:buFont typeface="Symbol" charset="2"/>
+              <a:buFont typeface="Symbol"/>
               <a:buChar char=""/>
             </a:pPr>
             <a:r>
@@ -28978,7 +28650,7 @@
         <p:spPr>
           <a:xfrm>
             <a:off x="4727520" y="3703320"/>
-            <a:ext cx="4096080" cy="1298160"/>
+            <a:ext cx="4095360" cy="1297440"/>
           </a:xfrm>
           <a:prstGeom prst="rect">
             <a:avLst/>
@@ -29016,7 +28688,7 @@
         <p:spPr>
           <a:xfrm>
             <a:off x="4864680" y="3794760"/>
-            <a:ext cx="3748680" cy="255600"/>
+            <a:ext cx="3747960" cy="254880"/>
           </a:xfrm>
           <a:prstGeom prst="rect">
             <a:avLst/>
@@ -29071,7 +28743,7 @@
         <p:spPr>
           <a:xfrm>
             <a:off x="4864680" y="4096440"/>
-            <a:ext cx="3748680" cy="822600"/>
+            <a:ext cx="3747960" cy="821880"/>
           </a:xfrm>
           <a:prstGeom prst="rect">
             <a:avLst/>
@@ -29099,7 +28771,7 @@
               <a:buClr>
                 <a:srgbClr val="f0f4f8"/>
               </a:buClr>
-              <a:buFont typeface="Symbol" charset="2"/>
+              <a:buFont typeface="Symbol"/>
               <a:buChar char=""/>
             </a:pPr>
             <a:r>
@@ -29124,7 +28796,7 @@
               <a:buClr>
                 <a:srgbClr val="f0f4f8"/>
               </a:buClr>
-              <a:buFont typeface="Symbol" charset="2"/>
+              <a:buFont typeface="Symbol"/>
               <a:buChar char=""/>
             </a:pPr>
             <a:r>
@@ -29152,7 +28824,7 @@
         <p:spPr>
           <a:xfrm>
             <a:off x="320040" y="4773240"/>
-            <a:ext cx="8503560" cy="273960"/>
+            <a:ext cx="8502840" cy="273240"/>
           </a:xfrm>
           <a:prstGeom prst="rect">
             <a:avLst/>
@@ -29190,7 +28862,7 @@
         <p:spPr>
           <a:xfrm>
             <a:off x="320040" y="4773240"/>
-            <a:ext cx="91080" cy="273960"/>
+            <a:ext cx="90360" cy="273240"/>
           </a:xfrm>
           <a:prstGeom prst="rect">
             <a:avLst/>
@@ -29221,7 +28893,7 @@
         <p:spPr>
           <a:xfrm>
             <a:off x="502920" y="4773240"/>
-            <a:ext cx="8229240" cy="273960"/>
+            <a:ext cx="8228520" cy="273240"/>
           </a:xfrm>
           <a:prstGeom prst="rect">
             <a:avLst/>
@@ -29323,7 +28995,7 @@
         <p:spPr>
           <a:xfrm>
             <a:off x="0" y="0"/>
-            <a:ext cx="9143640" cy="1005480"/>
+            <a:ext cx="9142920" cy="1004760"/>
           </a:xfrm>
           <a:prstGeom prst="rect">
             <a:avLst/>
@@ -29354,7 +29026,7 @@
         <p:spPr>
           <a:xfrm>
             <a:off x="0" y="0"/>
-            <a:ext cx="109440" cy="1005480"/>
+            <a:ext cx="108720" cy="1004760"/>
           </a:xfrm>
           <a:prstGeom prst="rect">
             <a:avLst/>
@@ -29385,7 +29057,7 @@
         <p:spPr>
           <a:xfrm>
             <a:off x="255960" y="128160"/>
-            <a:ext cx="8503560" cy="548280"/>
+            <a:ext cx="8502840" cy="547560"/>
           </a:xfrm>
           <a:prstGeom prst="rect">
             <a:avLst/>
@@ -29440,7 +29112,7 @@
         <p:spPr>
           <a:xfrm>
             <a:off x="255960" y="658440"/>
-            <a:ext cx="8503560" cy="273960"/>
+            <a:ext cx="8502840" cy="273240"/>
           </a:xfrm>
           <a:prstGeom prst="rect">
             <a:avLst/>
@@ -29495,7 +29167,7 @@
         <p:spPr>
           <a:xfrm>
             <a:off x="320040" y="1143000"/>
-            <a:ext cx="4114440" cy="3657240"/>
+            <a:ext cx="4113720" cy="3656520"/>
           </a:xfrm>
           <a:prstGeom prst="rect">
             <a:avLst/>
@@ -29533,7 +29205,7 @@
         <p:spPr>
           <a:xfrm>
             <a:off x="320040" y="1143000"/>
-            <a:ext cx="4114440" cy="383760"/>
+            <a:ext cx="4113720" cy="383040"/>
           </a:xfrm>
           <a:prstGeom prst="rect">
             <a:avLst/>
@@ -29564,7 +29236,7 @@
         <p:spPr>
           <a:xfrm>
             <a:off x="457200" y="1143000"/>
-            <a:ext cx="3840120" cy="383760"/>
+            <a:ext cx="3839400" cy="383040"/>
           </a:xfrm>
           <a:prstGeom prst="rect">
             <a:avLst/>
@@ -29619,7 +29291,7 @@
         <p:spPr>
           <a:xfrm>
             <a:off x="457200" y="1581840"/>
-            <a:ext cx="3840120" cy="475200"/>
+            <a:ext cx="3839400" cy="474480"/>
           </a:xfrm>
           <a:prstGeom prst="rect">
             <a:avLst/>
@@ -29698,7 +29370,7 @@
         <p:spPr>
           <a:xfrm>
             <a:off x="365760" y="2103120"/>
-            <a:ext cx="4004640" cy="2578320"/>
+            <a:ext cx="4003920" cy="2577600"/>
           </a:xfrm>
           <a:prstGeom prst="rect">
             <a:avLst/>
@@ -29729,7 +29401,7 @@
         <p:spPr>
           <a:xfrm>
             <a:off x="365760" y="2103120"/>
-            <a:ext cx="566640" cy="200880"/>
+            <a:ext cx="565920" cy="200160"/>
           </a:xfrm>
           <a:prstGeom prst="rect">
             <a:avLst/>
@@ -29760,7 +29432,7 @@
         <p:spPr>
           <a:xfrm>
             <a:off x="365760" y="2103120"/>
-            <a:ext cx="566640" cy="200880"/>
+            <a:ext cx="565920" cy="200160"/>
           </a:xfrm>
           <a:prstGeom prst="rect">
             <a:avLst/>
@@ -29815,7 +29487,7 @@
         <p:spPr>
           <a:xfrm>
             <a:off x="457200" y="2359080"/>
-            <a:ext cx="3821760" cy="2276640"/>
+            <a:ext cx="3821040" cy="2275920"/>
           </a:xfrm>
           <a:prstGeom prst="rect">
             <a:avLst/>
@@ -30068,7 +29740,7 @@
         <p:spPr>
           <a:xfrm>
             <a:off x="4709160" y="1143000"/>
-            <a:ext cx="4114440" cy="3657240"/>
+            <a:ext cx="4113720" cy="3656520"/>
           </a:xfrm>
           <a:prstGeom prst="rect">
             <a:avLst/>
@@ -30106,7 +29778,7 @@
         <p:spPr>
           <a:xfrm>
             <a:off x="4709160" y="1143000"/>
-            <a:ext cx="4114440" cy="383760"/>
+            <a:ext cx="4113720" cy="383040"/>
           </a:xfrm>
           <a:prstGeom prst="rect">
             <a:avLst/>
@@ -30137,7 +29809,7 @@
         <p:spPr>
           <a:xfrm>
             <a:off x="4846320" y="1143000"/>
-            <a:ext cx="3840120" cy="383760"/>
+            <a:ext cx="3839400" cy="383040"/>
           </a:xfrm>
           <a:prstGeom prst="rect">
             <a:avLst/>
@@ -30192,7 +29864,7 @@
         <p:spPr>
           <a:xfrm>
             <a:off x="4846320" y="1581840"/>
-            <a:ext cx="3840120" cy="475200"/>
+            <a:ext cx="3839400" cy="474480"/>
           </a:xfrm>
           <a:prstGeom prst="rect">
             <a:avLst/>
@@ -30271,7 +29943,7 @@
         <p:spPr>
           <a:xfrm>
             <a:off x="4754880" y="2103120"/>
-            <a:ext cx="4004640" cy="2578320"/>
+            <a:ext cx="4003920" cy="2577600"/>
           </a:xfrm>
           <a:prstGeom prst="rect">
             <a:avLst/>
@@ -30302,7 +29974,7 @@
         <p:spPr>
           <a:xfrm>
             <a:off x="4754880" y="2103120"/>
-            <a:ext cx="566640" cy="200880"/>
+            <a:ext cx="565920" cy="200160"/>
           </a:xfrm>
           <a:prstGeom prst="rect">
             <a:avLst/>
@@ -30333,7 +30005,7 @@
         <p:spPr>
           <a:xfrm>
             <a:off x="4754880" y="2103120"/>
-            <a:ext cx="566640" cy="200880"/>
+            <a:ext cx="565920" cy="200160"/>
           </a:xfrm>
           <a:prstGeom prst="rect">
             <a:avLst/>
@@ -30388,7 +30060,7 @@
         <p:spPr>
           <a:xfrm>
             <a:off x="4846320" y="2359080"/>
-            <a:ext cx="3821760" cy="2276640"/>
+            <a:ext cx="3821040" cy="2275920"/>
           </a:xfrm>
           <a:prstGeom prst="rect">
             <a:avLst/>
@@ -30665,7 +30337,7 @@
         <p:spPr>
           <a:xfrm>
             <a:off x="320040" y="4773240"/>
-            <a:ext cx="8503560" cy="273960"/>
+            <a:ext cx="8502840" cy="273240"/>
           </a:xfrm>
           <a:prstGeom prst="rect">
             <a:avLst/>
@@ -30703,7 +30375,7 @@
         <p:spPr>
           <a:xfrm>
             <a:off x="320040" y="4773240"/>
-            <a:ext cx="91080" cy="273960"/>
+            <a:ext cx="90360" cy="273240"/>
           </a:xfrm>
           <a:prstGeom prst="rect">
             <a:avLst/>
@@ -30734,7 +30406,7 @@
         <p:spPr>
           <a:xfrm>
             <a:off x="502920" y="4773240"/>
-            <a:ext cx="8229240" cy="273960"/>
+            <a:ext cx="8228520" cy="273240"/>
           </a:xfrm>
           <a:prstGeom prst="rect">
             <a:avLst/>
@@ -30836,7 +30508,7 @@
         <p:spPr>
           <a:xfrm>
             <a:off x="0" y="0"/>
-            <a:ext cx="9143640" cy="1005480"/>
+            <a:ext cx="9142920" cy="1004760"/>
           </a:xfrm>
           <a:prstGeom prst="rect">
             <a:avLst/>
@@ -30867,7 +30539,7 @@
         <p:spPr>
           <a:xfrm>
             <a:off x="0" y="0"/>
-            <a:ext cx="109440" cy="1005480"/>
+            <a:ext cx="108720" cy="1004760"/>
           </a:xfrm>
           <a:prstGeom prst="rect">
             <a:avLst/>
@@ -30898,7 +30570,7 @@
         <p:spPr>
           <a:xfrm>
             <a:off x="255960" y="128160"/>
-            <a:ext cx="8503560" cy="548280"/>
+            <a:ext cx="8502840" cy="547560"/>
           </a:xfrm>
           <a:prstGeom prst="rect">
             <a:avLst/>
@@ -30953,7 +30625,7 @@
         <p:spPr>
           <a:xfrm>
             <a:off x="255960" y="658440"/>
-            <a:ext cx="8503560" cy="273960"/>
+            <a:ext cx="8502840" cy="273240"/>
           </a:xfrm>
           <a:prstGeom prst="rect">
             <a:avLst/>
@@ -31008,7 +30680,7 @@
         <p:spPr>
           <a:xfrm>
             <a:off x="320040" y="1143000"/>
-            <a:ext cx="4114440" cy="3657240"/>
+            <a:ext cx="4113720" cy="3656520"/>
           </a:xfrm>
           <a:prstGeom prst="rect">
             <a:avLst/>
@@ -31046,7 +30718,7 @@
         <p:spPr>
           <a:xfrm>
             <a:off x="457200" y="1261800"/>
-            <a:ext cx="3748680" cy="273960"/>
+            <a:ext cx="3747960" cy="273240"/>
           </a:xfrm>
           <a:prstGeom prst="rect">
             <a:avLst/>
@@ -31101,7 +30773,7 @@
         <p:spPr>
           <a:xfrm>
             <a:off x="457200" y="1572840"/>
-            <a:ext cx="3748680" cy="273960"/>
+            <a:ext cx="3747960" cy="273240"/>
           </a:xfrm>
           <a:prstGeom prst="rect">
             <a:avLst/>
@@ -31156,7 +30828,7 @@
         <p:spPr>
           <a:xfrm>
             <a:off x="365760" y="1883520"/>
-            <a:ext cx="4004640" cy="1828440"/>
+            <a:ext cx="4003920" cy="1827720"/>
           </a:xfrm>
           <a:prstGeom prst="rect">
             <a:avLst/>
@@ -31187,7 +30859,7 @@
         <p:spPr>
           <a:xfrm>
             <a:off x="365760" y="1883520"/>
-            <a:ext cx="566640" cy="200880"/>
+            <a:ext cx="565920" cy="200160"/>
           </a:xfrm>
           <a:prstGeom prst="rect">
             <a:avLst/>
@@ -31218,7 +30890,7 @@
         <p:spPr>
           <a:xfrm>
             <a:off x="365760" y="1883520"/>
-            <a:ext cx="566640" cy="200880"/>
+            <a:ext cx="565920" cy="200160"/>
           </a:xfrm>
           <a:prstGeom prst="rect">
             <a:avLst/>
@@ -31273,7 +30945,7 @@
         <p:spPr>
           <a:xfrm>
             <a:off x="457200" y="2139840"/>
-            <a:ext cx="3821760" cy="1526760"/>
+            <a:ext cx="3821040" cy="1526040"/>
           </a:xfrm>
           <a:prstGeom prst="rect">
             <a:avLst/>
@@ -31492,7 +31164,7 @@
         <p:spPr>
           <a:xfrm>
             <a:off x="457200" y="3749040"/>
-            <a:ext cx="3748680" cy="987120"/>
+            <a:ext cx="3747960" cy="986400"/>
           </a:xfrm>
           <a:prstGeom prst="rect">
             <a:avLst/>
@@ -31520,7 +31192,7 @@
               <a:buClr>
                 <a:srgbClr val="f0f4f8"/>
               </a:buClr>
-              <a:buFont typeface="Symbol" charset="2"/>
+              <a:buFont typeface="Symbol"/>
               <a:buChar char=""/>
             </a:pPr>
             <a:r>
@@ -31545,7 +31217,7 @@
               <a:buClr>
                 <a:srgbClr val="f0f4f8"/>
               </a:buClr>
-              <a:buFont typeface="Symbol" charset="2"/>
+              <a:buFont typeface="Symbol"/>
               <a:buChar char=""/>
             </a:pPr>
             <a:r>
@@ -31570,7 +31242,7 @@
               <a:buClr>
                 <a:srgbClr val="f0f4f8"/>
               </a:buClr>
-              <a:buFont typeface="Symbol" charset="2"/>
+              <a:buFont typeface="Symbol"/>
               <a:buChar char=""/>
             </a:pPr>
             <a:r>
@@ -31598,7 +31270,7 @@
         <p:spPr>
           <a:xfrm>
             <a:off x="4709160" y="1143000"/>
-            <a:ext cx="4114440" cy="3657240"/>
+            <a:ext cx="4113720" cy="3656520"/>
           </a:xfrm>
           <a:prstGeom prst="rect">
             <a:avLst/>
@@ -31636,7 +31308,7 @@
         <p:spPr>
           <a:xfrm>
             <a:off x="4846320" y="1261800"/>
-            <a:ext cx="3748680" cy="273960"/>
+            <a:ext cx="3747960" cy="273240"/>
           </a:xfrm>
           <a:prstGeom prst="rect">
             <a:avLst/>
@@ -31691,7 +31363,7 @@
         <p:spPr>
           <a:xfrm>
             <a:off x="4846320" y="1572840"/>
-            <a:ext cx="3748680" cy="273960"/>
+            <a:ext cx="3747960" cy="273240"/>
           </a:xfrm>
           <a:prstGeom prst="rect">
             <a:avLst/>
@@ -31746,7 +31418,7 @@
         <p:spPr>
           <a:xfrm>
             <a:off x="4846320" y="1883520"/>
-            <a:ext cx="3821760" cy="868320"/>
+            <a:ext cx="3821040" cy="867600"/>
           </a:xfrm>
           <a:prstGeom prst="rect">
             <a:avLst/>
@@ -31784,7 +31456,7 @@
         <p:spPr>
           <a:xfrm>
             <a:off x="4846320" y="1883520"/>
-            <a:ext cx="3821760" cy="63720"/>
+            <a:ext cx="3821040" cy="63000"/>
           </a:xfrm>
           <a:prstGeom prst="rect">
             <a:avLst/>
@@ -31815,7 +31487,7 @@
         <p:spPr>
           <a:xfrm>
             <a:off x="4983480" y="1947600"/>
-            <a:ext cx="3565800" cy="237240"/>
+            <a:ext cx="3565080" cy="236520"/>
           </a:xfrm>
           <a:prstGeom prst="rect">
             <a:avLst/>
@@ -31870,7 +31542,7 @@
         <p:spPr>
           <a:xfrm>
             <a:off x="4983480" y="2212920"/>
-            <a:ext cx="3565800" cy="475200"/>
+            <a:ext cx="3565080" cy="474480"/>
           </a:xfrm>
           <a:prstGeom prst="rect">
             <a:avLst/>
@@ -31925,7 +31597,7 @@
         <p:spPr>
           <a:xfrm>
             <a:off x="4754880" y="2788920"/>
-            <a:ext cx="4004640" cy="1901520"/>
+            <a:ext cx="4003920" cy="1900800"/>
           </a:xfrm>
           <a:prstGeom prst="rect">
             <a:avLst/>
@@ -31956,7 +31628,7 @@
         <p:spPr>
           <a:xfrm>
             <a:off x="4754880" y="2788920"/>
-            <a:ext cx="566640" cy="200880"/>
+            <a:ext cx="565920" cy="200160"/>
           </a:xfrm>
           <a:prstGeom prst="rect">
             <a:avLst/>
@@ -31987,7 +31659,7 @@
         <p:spPr>
           <a:xfrm>
             <a:off x="4754880" y="2788920"/>
-            <a:ext cx="566640" cy="200880"/>
+            <a:ext cx="565920" cy="200160"/>
           </a:xfrm>
           <a:prstGeom prst="rect">
             <a:avLst/>
@@ -32042,7 +31714,7 @@
         <p:spPr>
           <a:xfrm>
             <a:off x="4846320" y="3044880"/>
-            <a:ext cx="3821760" cy="1599840"/>
+            <a:ext cx="3821040" cy="1599120"/>
           </a:xfrm>
           <a:prstGeom prst="rect">
             <a:avLst/>
@@ -32271,7 +31943,7 @@
         <p:spPr>
           <a:xfrm>
             <a:off x="320040" y="4773240"/>
-            <a:ext cx="8503560" cy="273960"/>
+            <a:ext cx="8502840" cy="273240"/>
           </a:xfrm>
           <a:prstGeom prst="rect">
             <a:avLst/>
@@ -32309,7 +31981,7 @@
         <p:spPr>
           <a:xfrm>
             <a:off x="320040" y="4773240"/>
-            <a:ext cx="91080" cy="273960"/>
+            <a:ext cx="90360" cy="273240"/>
           </a:xfrm>
           <a:prstGeom prst="rect">
             <a:avLst/>
@@ -32340,7 +32012,7 @@
         <p:spPr>
           <a:xfrm>
             <a:off x="502920" y="4773240"/>
-            <a:ext cx="8229240" cy="273960"/>
+            <a:ext cx="8228520" cy="273240"/>
           </a:xfrm>
           <a:prstGeom prst="rect">
             <a:avLst/>
@@ -32442,7 +32114,7 @@
         <p:spPr>
           <a:xfrm>
             <a:off x="0" y="0"/>
-            <a:ext cx="9143640" cy="1005480"/>
+            <a:ext cx="9142920" cy="1004760"/>
           </a:xfrm>
           <a:prstGeom prst="rect">
             <a:avLst/>
@@ -32473,7 +32145,7 @@
         <p:spPr>
           <a:xfrm>
             <a:off x="0" y="0"/>
-            <a:ext cx="109440" cy="1005480"/>
+            <a:ext cx="108720" cy="1004760"/>
           </a:xfrm>
           <a:prstGeom prst="rect">
             <a:avLst/>
@@ -32504,7 +32176,7 @@
         <p:spPr>
           <a:xfrm>
             <a:off x="255960" y="128160"/>
-            <a:ext cx="8503560" cy="548280"/>
+            <a:ext cx="8502840" cy="547560"/>
           </a:xfrm>
           <a:prstGeom prst="rect">
             <a:avLst/>
@@ -32559,7 +32231,7 @@
         <p:spPr>
           <a:xfrm>
             <a:off x="255960" y="658440"/>
-            <a:ext cx="8503560" cy="273960"/>
+            <a:ext cx="8502840" cy="273240"/>
           </a:xfrm>
           <a:prstGeom prst="rect">
             <a:avLst/>
@@ -32614,7 +32286,7 @@
         <p:spPr>
           <a:xfrm>
             <a:off x="320040" y="1143000"/>
-            <a:ext cx="8503560" cy="1279800"/>
+            <a:ext cx="8502840" cy="1279080"/>
           </a:xfrm>
           <a:prstGeom prst="rect">
             <a:avLst/>
@@ -32652,7 +32324,7 @@
         <p:spPr>
           <a:xfrm>
             <a:off x="320040" y="1143000"/>
-            <a:ext cx="8503560" cy="72720"/>
+            <a:ext cx="8502840" cy="72000"/>
           </a:xfrm>
           <a:prstGeom prst="rect">
             <a:avLst/>
@@ -32683,7 +32355,7 @@
         <p:spPr>
           <a:xfrm>
             <a:off x="457200" y="1261800"/>
-            <a:ext cx="1371240" cy="502560"/>
+            <a:ext cx="1370520" cy="501840"/>
           </a:xfrm>
           <a:prstGeom prst="rect">
             <a:avLst/>
@@ -32738,7 +32410,7 @@
         <p:spPr>
           <a:xfrm>
             <a:off x="1828800" y="1261800"/>
-            <a:ext cx="6949080" cy="502560"/>
+            <a:ext cx="6948360" cy="501840"/>
           </a:xfrm>
           <a:prstGeom prst="rect">
             <a:avLst/>
@@ -32793,7 +32465,7 @@
         <p:spPr>
           <a:xfrm>
             <a:off x="457200" y="1664280"/>
-            <a:ext cx="8229240" cy="658080"/>
+            <a:ext cx="8228520" cy="657360"/>
           </a:xfrm>
           <a:prstGeom prst="rect">
             <a:avLst/>
@@ -32848,7 +32520,7 @@
         <p:spPr>
           <a:xfrm>
             <a:off x="320040" y="2541960"/>
-            <a:ext cx="5074560" cy="2486880"/>
+            <a:ext cx="5073840" cy="2486160"/>
           </a:xfrm>
           <a:prstGeom prst="rect">
             <a:avLst/>
@@ -32886,7 +32558,7 @@
         <p:spPr>
           <a:xfrm>
             <a:off x="457200" y="2651760"/>
-            <a:ext cx="4663080" cy="255600"/>
+            <a:ext cx="4662360" cy="254880"/>
           </a:xfrm>
           <a:prstGeom prst="rect">
             <a:avLst/>
@@ -32941,7 +32613,7 @@
         <p:spPr>
           <a:xfrm>
             <a:off x="365760" y="2944440"/>
-            <a:ext cx="4955760" cy="1938240"/>
+            <a:ext cx="4955040" cy="1937520"/>
           </a:xfrm>
           <a:prstGeom prst="rect">
             <a:avLst/>
@@ -32972,7 +32644,7 @@
         <p:spPr>
           <a:xfrm>
             <a:off x="365760" y="2944440"/>
-            <a:ext cx="566640" cy="200880"/>
+            <a:ext cx="565920" cy="200160"/>
           </a:xfrm>
           <a:prstGeom prst="rect">
             <a:avLst/>
@@ -33003,7 +32675,7 @@
         <p:spPr>
           <a:xfrm>
             <a:off x="365760" y="2944440"/>
-            <a:ext cx="566640" cy="200880"/>
+            <a:ext cx="565920" cy="200160"/>
           </a:xfrm>
           <a:prstGeom prst="rect">
             <a:avLst/>
@@ -33058,7 +32730,7 @@
         <p:spPr>
           <a:xfrm>
             <a:off x="457200" y="3200400"/>
-            <a:ext cx="4772880" cy="1636560"/>
+            <a:ext cx="4772160" cy="1635840"/>
           </a:xfrm>
           <a:prstGeom prst="rect">
             <a:avLst/>
@@ -33419,7 +33091,7 @@
         <p:spPr>
           <a:xfrm>
             <a:off x="5577840" y="2541960"/>
-            <a:ext cx="3245760" cy="2486880"/>
+            <a:ext cx="3245040" cy="2486160"/>
           </a:xfrm>
           <a:prstGeom prst="rect">
             <a:avLst/>
@@ -33457,7 +33129,7 @@
         <p:spPr>
           <a:xfrm>
             <a:off x="5715000" y="2651760"/>
-            <a:ext cx="2925720" cy="255600"/>
+            <a:ext cx="2925000" cy="254880"/>
           </a:xfrm>
           <a:prstGeom prst="rect">
             <a:avLst/>
@@ -33512,7 +33184,7 @@
         <p:spPr>
           <a:xfrm>
             <a:off x="5715000" y="2980800"/>
-            <a:ext cx="2971440" cy="1919880"/>
+            <a:ext cx="2970720" cy="1919160"/>
           </a:xfrm>
           <a:prstGeom prst="rect">
             <a:avLst/>
@@ -33540,7 +33212,7 @@
               <a:buClr>
                 <a:srgbClr val="f0f4f8"/>
               </a:buClr>
-              <a:buFont typeface="Symbol" charset="2"/>
+              <a:buFont typeface="Symbol"/>
               <a:buChar char=""/>
             </a:pPr>
             <a:r>
@@ -33565,7 +33237,7 @@
               <a:buClr>
                 <a:srgbClr val="f0f4f8"/>
               </a:buClr>
-              <a:buFont typeface="Symbol" charset="2"/>
+              <a:buFont typeface="Symbol"/>
               <a:buChar char=""/>
             </a:pPr>
             <a:r>
@@ -33590,7 +33262,7 @@
               <a:buClr>
                 <a:srgbClr val="f0f4f8"/>
               </a:buClr>
-              <a:buFont typeface="Symbol" charset="2"/>
+              <a:buFont typeface="Symbol"/>
               <a:buChar char=""/>
             </a:pPr>
             <a:r>
@@ -33615,7 +33287,7 @@
               <a:buClr>
                 <a:srgbClr val="f0f4f8"/>
               </a:buClr>
-              <a:buFont typeface="Symbol" charset="2"/>
+              <a:buFont typeface="Symbol"/>
               <a:buChar char=""/>
             </a:pPr>
             <a:r>
@@ -33640,7 +33312,7 @@
               <a:buClr>
                 <a:srgbClr val="f0f4f8"/>
               </a:buClr>
-              <a:buFont typeface="Symbol" charset="2"/>
+              <a:buFont typeface="Symbol"/>
               <a:buChar char=""/>
             </a:pPr>
             <a:r>
@@ -33667,8 +33339,8 @@
         </p:nvSpPr>
         <p:spPr>
           <a:xfrm>
-            <a:off x="320040" y="4773240"/>
-            <a:ext cx="8503560" cy="273960"/>
+            <a:off x="180000" y="5126400"/>
+            <a:ext cx="8502840" cy="273240"/>
           </a:xfrm>
           <a:prstGeom prst="rect">
             <a:avLst/>
@@ -33706,7 +33378,7 @@
         <p:spPr>
           <a:xfrm>
             <a:off x="320040" y="4773240"/>
-            <a:ext cx="91080" cy="273960"/>
+            <a:ext cx="90360" cy="273240"/>
           </a:xfrm>
           <a:prstGeom prst="rect">
             <a:avLst/>
@@ -33736,8 +33408,8 @@
         </p:nvSpPr>
         <p:spPr>
           <a:xfrm>
-            <a:off x="502920" y="4773240"/>
-            <a:ext cx="8229240" cy="273960"/>
+            <a:off x="411120" y="5126400"/>
+            <a:ext cx="8228520" cy="273240"/>
           </a:xfrm>
           <a:prstGeom prst="rect">
             <a:avLst/>
@@ -33768,14 +33440,14 @@
               </a:tabLst>
             </a:pPr>
             <a:r>
-              <a:rPr b="1" lang="en-US" sz="950" spc="-1" strike="noStrike">
-                <a:solidFill>
-                  <a:srgbClr val="ffb703"/>
+              <a:rPr b="0" i="1" lang="en-US" sz="950" spc="-1" strike="noStrike">
+                <a:solidFill>
+                  <a:srgbClr val="8da9c4"/>
                 </a:solidFill>
                 <a:latin typeface="Calibri"/>
                 <a:ea typeface="Calibri"/>
               </a:rPr>
-              <a:t>Instructor joke: </a:t>
+              <a:t> </a:t>
             </a:r>
             <a:r>
               <a:rPr b="0" i="1" lang="en-US" sz="950" spc="-1" strike="noStrike">
@@ -33785,7 +33457,7 @@
                 <a:latin typeface="Calibri"/>
                 <a:ea typeface="Calibri"/>
               </a:rPr>
-              <a:t>You could name them 'salman' and 'shahrukh' and it would still work — but don't. Always use 'self' and 'other'.</a:t>
+              <a:t>Always use 'self' and 'other'.</a:t>
             </a:r>
             <a:endParaRPr b="0" lang="en-IN" sz="950" spc="-1" strike="noStrike">
               <a:latin typeface="Arial"/>
